--- a/reference_material/slides/013_Probability_and_Bayes.pptx
+++ b/reference_material/slides/013_Probability_and_Bayes.pptx
@@ -6,13 +6,18 @@
   </p:sldMasterIdLst>
   <p:sldIdLst>
     <p:sldId id="256" r:id="rId2"/>
-    <p:sldId id="258" r:id="rId3"/>
-    <p:sldId id="257" r:id="rId4"/>
-    <p:sldId id="259" r:id="rId5"/>
-    <p:sldId id="260" r:id="rId6"/>
-    <p:sldId id="261" r:id="rId7"/>
-    <p:sldId id="262" r:id="rId8"/>
-    <p:sldId id="263" r:id="rId9"/>
+    <p:sldId id="264" r:id="rId3"/>
+    <p:sldId id="265" r:id="rId4"/>
+    <p:sldId id="258" r:id="rId5"/>
+    <p:sldId id="257" r:id="rId6"/>
+    <p:sldId id="259" r:id="rId7"/>
+    <p:sldId id="260" r:id="rId8"/>
+    <p:sldId id="261" r:id="rId9"/>
+    <p:sldId id="262" r:id="rId10"/>
+    <p:sldId id="266" r:id="rId11"/>
+    <p:sldId id="268" r:id="rId12"/>
+    <p:sldId id="267" r:id="rId13"/>
+    <p:sldId id="263" r:id="rId14"/>
   </p:sldIdLst>
   <p:sldSz cx="12192000" cy="6858000"/>
   <p:notesSz cx="6858000" cy="9144000"/>
@@ -258,7 +263,7 @@
           <a:p>
             <a:fld id="{38EBEB88-524C-934C-AA67-A5128709C9CE}" type="datetimeFigureOut">
               <a:rPr lang="en-US" smtClean="0"/>
-              <a:t>10/18/21</a:t>
+              <a:t>10/4/25</a:t>
             </a:fld>
             <a:endParaRPr lang="en-US"/>
           </a:p>
@@ -469,7 +474,7 @@
           <a:p>
             <a:fld id="{38EBEB88-524C-934C-AA67-A5128709C9CE}" type="datetimeFigureOut">
               <a:rPr lang="en-US" smtClean="0"/>
-              <a:t>10/18/21</a:t>
+              <a:t>10/4/25</a:t>
             </a:fld>
             <a:endParaRPr lang="en-US"/>
           </a:p>
@@ -684,7 +689,7 @@
           <a:p>
             <a:fld id="{38EBEB88-524C-934C-AA67-A5128709C9CE}" type="datetimeFigureOut">
               <a:rPr lang="en-US" smtClean="0"/>
-              <a:t>10/18/21</a:t>
+              <a:t>10/4/25</a:t>
             </a:fld>
             <a:endParaRPr lang="en-US"/>
           </a:p>
@@ -885,7 +890,7 @@
           <a:p>
             <a:fld id="{38EBEB88-524C-934C-AA67-A5128709C9CE}" type="datetimeFigureOut">
               <a:rPr lang="en-US" smtClean="0"/>
-              <a:t>10/18/21</a:t>
+              <a:t>10/4/25</a:t>
             </a:fld>
             <a:endParaRPr lang="en-US"/>
           </a:p>
@@ -1164,7 +1169,7 @@
           <a:p>
             <a:fld id="{38EBEB88-524C-934C-AA67-A5128709C9CE}" type="datetimeFigureOut">
               <a:rPr lang="en-US" smtClean="0"/>
-              <a:t>10/18/21</a:t>
+              <a:t>10/4/25</a:t>
             </a:fld>
             <a:endParaRPr lang="en-US"/>
           </a:p>
@@ -1432,7 +1437,7 @@
           <a:p>
             <a:fld id="{38EBEB88-524C-934C-AA67-A5128709C9CE}" type="datetimeFigureOut">
               <a:rPr lang="en-US" smtClean="0"/>
-              <a:t>10/18/21</a:t>
+              <a:t>10/4/25</a:t>
             </a:fld>
             <a:endParaRPr lang="en-US"/>
           </a:p>
@@ -1848,7 +1853,7 @@
           <a:p>
             <a:fld id="{38EBEB88-524C-934C-AA67-A5128709C9CE}" type="datetimeFigureOut">
               <a:rPr lang="en-US" smtClean="0"/>
-              <a:t>10/18/21</a:t>
+              <a:t>10/4/25</a:t>
             </a:fld>
             <a:endParaRPr lang="en-US"/>
           </a:p>
@@ -1997,7 +2002,7 @@
           <a:p>
             <a:fld id="{38EBEB88-524C-934C-AA67-A5128709C9CE}" type="datetimeFigureOut">
               <a:rPr lang="en-US" smtClean="0"/>
-              <a:t>10/18/21</a:t>
+              <a:t>10/4/25</a:t>
             </a:fld>
             <a:endParaRPr lang="en-US"/>
           </a:p>
@@ -2123,7 +2128,7 @@
           <a:p>
             <a:fld id="{38EBEB88-524C-934C-AA67-A5128709C9CE}" type="datetimeFigureOut">
               <a:rPr lang="en-US" smtClean="0"/>
-              <a:t>10/18/21</a:t>
+              <a:t>10/4/25</a:t>
             </a:fld>
             <a:endParaRPr lang="en-US"/>
           </a:p>
@@ -2374,7 +2379,7 @@
           <a:p>
             <a:fld id="{38EBEB88-524C-934C-AA67-A5128709C9CE}" type="datetimeFigureOut">
               <a:rPr lang="en-US" smtClean="0"/>
-              <a:t>10/18/21</a:t>
+              <a:t>10/4/25</a:t>
             </a:fld>
             <a:endParaRPr lang="en-US"/>
           </a:p>
@@ -2819,7 +2824,7 @@
           <a:p>
             <a:fld id="{38EBEB88-524C-934C-AA67-A5128709C9CE}" type="datetimeFigureOut">
               <a:rPr lang="en-US" smtClean="0"/>
-              <a:t>10/18/21</a:t>
+              <a:t>10/4/25</a:t>
             </a:fld>
             <a:endParaRPr lang="en-US"/>
           </a:p>
@@ -3146,7 +3151,7 @@
           <a:p>
             <a:fld id="{38EBEB88-524C-934C-AA67-A5128709C9CE}" type="datetimeFigureOut">
               <a:rPr lang="en-US" smtClean="0"/>
-              <a:t>10/18/21</a:t>
+              <a:t>10/4/25</a:t>
             </a:fld>
             <a:endParaRPr lang="en-US"/>
           </a:p>
@@ -3698,6 +3703,406 @@
 </p:sld>
 </file>
 
+<file path=ppt/slides/slide10.xml><?xml version="1.0" encoding="utf-8"?>
+<p:sld xmlns:a="http://schemas.openxmlformats.org/drawingml/2006/main" xmlns:r="http://schemas.openxmlformats.org/officeDocument/2006/relationships" xmlns:p="http://schemas.openxmlformats.org/presentationml/2006/main">
+  <p:cSld>
+    <p:spTree>
+      <p:nvGrpSpPr>
+        <p:cNvPr id="1" name=""/>
+        <p:cNvGrpSpPr/>
+        <p:nvPr/>
+      </p:nvGrpSpPr>
+      <p:grpSpPr>
+        <a:xfrm>
+          <a:off x="0" y="0"/>
+          <a:ext cx="0" cy="0"/>
+          <a:chOff x="0" y="0"/>
+          <a:chExt cx="0" cy="0"/>
+        </a:xfrm>
+      </p:grpSpPr>
+      <p:sp>
+        <p:nvSpPr>
+          <p:cNvPr id="2" name="Title 1">
+            <a:extLst>
+              <a:ext uri="{FF2B5EF4-FFF2-40B4-BE49-F238E27FC236}">
+                <a16:creationId xmlns:a16="http://schemas.microsoft.com/office/drawing/2014/main" id="{35230F09-B44A-CB77-DFE0-6E063223B214}"/>
+              </a:ext>
+            </a:extLst>
+          </p:cNvPr>
+          <p:cNvSpPr>
+            <a:spLocks noGrp="1"/>
+          </p:cNvSpPr>
+          <p:nvPr>
+            <p:ph type="title"/>
+          </p:nvPr>
+        </p:nvSpPr>
+        <p:spPr/>
+        <p:txBody>
+          <a:bodyPr/>
+          <a:lstStyle/>
+          <a:p>
+            <a:r>
+              <a:rPr lang="en-US" dirty="0"/>
+              <a:t>Odds</a:t>
+            </a:r>
+          </a:p>
+        </p:txBody>
+      </p:sp>
+      <p:sp>
+        <p:nvSpPr>
+          <p:cNvPr id="3" name="Content Placeholder 2">
+            <a:extLst>
+              <a:ext uri="{FF2B5EF4-FFF2-40B4-BE49-F238E27FC236}">
+                <a16:creationId xmlns:a16="http://schemas.microsoft.com/office/drawing/2014/main" id="{F7464E83-DAA2-5F11-C3F2-FD8C920A5071}"/>
+              </a:ext>
+            </a:extLst>
+          </p:cNvPr>
+          <p:cNvSpPr>
+            <a:spLocks noGrp="1"/>
+          </p:cNvSpPr>
+          <p:nvPr>
+            <p:ph idx="1"/>
+          </p:nvPr>
+        </p:nvSpPr>
+        <p:spPr/>
+        <p:txBody>
+          <a:bodyPr/>
+          <a:lstStyle/>
+          <a:p>
+            <a:r>
+              <a:rPr lang="en-US" dirty="0"/>
+              <a:t>Odds are an alternate expression of probability. </a:t>
+            </a:r>
+          </a:p>
+          <a:p>
+            <a:pPr lvl="1"/>
+            <a:r>
+              <a:rPr lang="en-US" dirty="0"/>
+              <a:t>Ratio of true to not true. </a:t>
+            </a:r>
+          </a:p>
+          <a:p>
+            <a:r>
+              <a:rPr lang="en-US" dirty="0"/>
+              <a:t>Example - 80% chance of winning. </a:t>
+            </a:r>
+          </a:p>
+          <a:p>
+            <a:pPr lvl="1"/>
+            <a:r>
+              <a:rPr lang="en-US" dirty="0"/>
+              <a:t>.8 / .2 = 4</a:t>
+            </a:r>
+            <a:r>
+              <a:rPr lang="en-US"/>
+              <a:t>. </a:t>
+            </a:r>
+            <a:r>
+              <a:rPr lang="en-US" dirty="0"/>
+              <a:t>4 to 1 odds of winning. </a:t>
+            </a:r>
+          </a:p>
+          <a:p>
+            <a:pPr lvl="1"/>
+            <a:r>
+              <a:rPr lang="en-US" dirty="0"/>
+              <a:t>.2 / .8 = .25. 1 to 4 odds of losing. </a:t>
+            </a:r>
+          </a:p>
+        </p:txBody>
+      </p:sp>
+    </p:spTree>
+    <p:extLst>
+      <p:ext uri="{BB962C8B-B14F-4D97-AF65-F5344CB8AC3E}">
+        <p14:creationId xmlns:p14="http://schemas.microsoft.com/office/powerpoint/2010/main" val="3516702342"/>
+      </p:ext>
+    </p:extLst>
+  </p:cSld>
+  <p:clrMapOvr>
+    <a:masterClrMapping/>
+  </p:clrMapOvr>
+</p:sld>
+</file>
+
+<file path=ppt/slides/slide11.xml><?xml version="1.0" encoding="utf-8"?>
+<p:sld xmlns:a="http://schemas.openxmlformats.org/drawingml/2006/main" xmlns:r="http://schemas.openxmlformats.org/officeDocument/2006/relationships" xmlns:p="http://schemas.openxmlformats.org/presentationml/2006/main">
+  <p:cSld>
+    <p:spTree>
+      <p:nvGrpSpPr>
+        <p:cNvPr id="1" name=""/>
+        <p:cNvGrpSpPr/>
+        <p:nvPr/>
+      </p:nvGrpSpPr>
+      <p:grpSpPr>
+        <a:xfrm>
+          <a:off x="0" y="0"/>
+          <a:ext cx="0" cy="0"/>
+          <a:chOff x="0" y="0"/>
+          <a:chExt cx="0" cy="0"/>
+        </a:xfrm>
+      </p:grpSpPr>
+      <p:sp>
+        <p:nvSpPr>
+          <p:cNvPr id="2" name="Title 1">
+            <a:extLst>
+              <a:ext uri="{FF2B5EF4-FFF2-40B4-BE49-F238E27FC236}">
+                <a16:creationId xmlns:a16="http://schemas.microsoft.com/office/drawing/2014/main" id="{F19675AC-B6AC-2B2A-EBAB-D6EDA961AD26}"/>
+              </a:ext>
+            </a:extLst>
+          </p:cNvPr>
+          <p:cNvSpPr>
+            <a:spLocks noGrp="1"/>
+          </p:cNvSpPr>
+          <p:nvPr>
+            <p:ph type="title"/>
+          </p:nvPr>
+        </p:nvSpPr>
+        <p:spPr/>
+        <p:txBody>
+          <a:bodyPr/>
+          <a:lstStyle/>
+          <a:p>
+            <a:r>
+              <a:rPr lang="en-US" dirty="0"/>
+              <a:t>Log Odds</a:t>
+            </a:r>
+          </a:p>
+        </p:txBody>
+      </p:sp>
+      <p:sp>
+        <p:nvSpPr>
+          <p:cNvPr id="3" name="Content Placeholder 2">
+            <a:extLst>
+              <a:ext uri="{FF2B5EF4-FFF2-40B4-BE49-F238E27FC236}">
+                <a16:creationId xmlns:a16="http://schemas.microsoft.com/office/drawing/2014/main" id="{B1CD082F-37FD-EDCB-33E4-44300595AF3C}"/>
+              </a:ext>
+            </a:extLst>
+          </p:cNvPr>
+          <p:cNvSpPr>
+            <a:spLocks noGrp="1"/>
+          </p:cNvSpPr>
+          <p:nvPr>
+            <p:ph idx="1"/>
+          </p:nvPr>
+        </p:nvSpPr>
+        <p:spPr/>
+        <p:txBody>
+          <a:bodyPr/>
+          <a:lstStyle/>
+          <a:p>
+            <a:r>
+              <a:rPr lang="en-US" dirty="0"/>
+              <a:t>Odds are useful in comparing probabilities in combination with logs. </a:t>
+            </a:r>
+          </a:p>
+          <a:p>
+            <a:r>
+              <a:rPr lang="en-US" dirty="0"/>
+              <a:t>By taking the log of the odds, the value becomes symmetrical. </a:t>
+            </a:r>
+          </a:p>
+          <a:p>
+            <a:r>
+              <a:rPr lang="en-US" dirty="0"/>
+              <a:t>This is called the logit – important later in ML. </a:t>
+            </a:r>
+          </a:p>
+        </p:txBody>
+      </p:sp>
+    </p:spTree>
+    <p:extLst>
+      <p:ext uri="{BB962C8B-B14F-4D97-AF65-F5344CB8AC3E}">
+        <p14:creationId xmlns:p14="http://schemas.microsoft.com/office/powerpoint/2010/main" val="3868561471"/>
+      </p:ext>
+    </p:extLst>
+  </p:cSld>
+  <p:clrMapOvr>
+    <a:masterClrMapping/>
+  </p:clrMapOvr>
+</p:sld>
+</file>
+
+<file path=ppt/slides/slide12.xml><?xml version="1.0" encoding="utf-8"?>
+<p:sld xmlns:a="http://schemas.openxmlformats.org/drawingml/2006/main" xmlns:r="http://schemas.openxmlformats.org/officeDocument/2006/relationships" xmlns:p="http://schemas.openxmlformats.org/presentationml/2006/main">
+  <p:cSld>
+    <p:spTree>
+      <p:nvGrpSpPr>
+        <p:cNvPr id="1" name=""/>
+        <p:cNvGrpSpPr/>
+        <p:nvPr/>
+      </p:nvGrpSpPr>
+      <p:grpSpPr>
+        <a:xfrm>
+          <a:off x="0" y="0"/>
+          <a:ext cx="0" cy="0"/>
+          <a:chOff x="0" y="0"/>
+          <a:chExt cx="0" cy="0"/>
+        </a:xfrm>
+      </p:grpSpPr>
+      <p:sp>
+        <p:nvSpPr>
+          <p:cNvPr id="2" name="Title 1">
+            <a:extLst>
+              <a:ext uri="{FF2B5EF4-FFF2-40B4-BE49-F238E27FC236}">
+                <a16:creationId xmlns:a16="http://schemas.microsoft.com/office/drawing/2014/main" id="{5517B2D7-A503-B515-44A2-AD8F388A9F74}"/>
+              </a:ext>
+            </a:extLst>
+          </p:cNvPr>
+          <p:cNvSpPr>
+            <a:spLocks noGrp="1"/>
+          </p:cNvSpPr>
+          <p:nvPr>
+            <p:ph type="title"/>
+          </p:nvPr>
+        </p:nvSpPr>
+        <p:spPr/>
+        <p:txBody>
+          <a:bodyPr/>
+          <a:lstStyle/>
+          <a:p>
+            <a:r>
+              <a:rPr lang="en-US" dirty="0"/>
+              <a:t>Odds and Effect Sizes</a:t>
+            </a:r>
+          </a:p>
+        </p:txBody>
+      </p:sp>
+      <p:sp>
+        <p:nvSpPr>
+          <p:cNvPr id="3" name="Content Placeholder 2">
+            <a:extLst>
+              <a:ext uri="{FF2B5EF4-FFF2-40B4-BE49-F238E27FC236}">
+                <a16:creationId xmlns:a16="http://schemas.microsoft.com/office/drawing/2014/main" id="{1CC57BBE-5EB0-A7A4-E217-B236AD739519}"/>
+              </a:ext>
+            </a:extLst>
+          </p:cNvPr>
+          <p:cNvSpPr>
+            <a:spLocks noGrp="1"/>
+          </p:cNvSpPr>
+          <p:nvPr>
+            <p:ph idx="1"/>
+          </p:nvPr>
+        </p:nvSpPr>
+        <p:spPr/>
+        <p:txBody>
+          <a:bodyPr/>
+          <a:lstStyle/>
+          <a:p>
+            <a:endParaRPr lang="en-US"/>
+          </a:p>
+        </p:txBody>
+      </p:sp>
+    </p:spTree>
+    <p:extLst>
+      <p:ext uri="{BB962C8B-B14F-4D97-AF65-F5344CB8AC3E}">
+        <p14:creationId xmlns:p14="http://schemas.microsoft.com/office/powerpoint/2010/main" val="3956611292"/>
+      </p:ext>
+    </p:extLst>
+  </p:cSld>
+  <p:clrMapOvr>
+    <a:masterClrMapping/>
+  </p:clrMapOvr>
+</p:sld>
+</file>
+
+<file path=ppt/slides/slide13.xml><?xml version="1.0" encoding="utf-8"?>
+<p:sld xmlns:a="http://schemas.openxmlformats.org/drawingml/2006/main" xmlns:r="http://schemas.openxmlformats.org/officeDocument/2006/relationships" xmlns:p="http://schemas.openxmlformats.org/presentationml/2006/main">
+  <p:cSld>
+    <p:spTree>
+      <p:nvGrpSpPr>
+        <p:cNvPr id="1" name=""/>
+        <p:cNvGrpSpPr/>
+        <p:nvPr/>
+      </p:nvGrpSpPr>
+      <p:grpSpPr>
+        <a:xfrm>
+          <a:off x="0" y="0"/>
+          <a:ext cx="0" cy="0"/>
+          <a:chOff x="0" y="0"/>
+          <a:chExt cx="0" cy="0"/>
+        </a:xfrm>
+      </p:grpSpPr>
+      <p:sp>
+        <p:nvSpPr>
+          <p:cNvPr id="2" name="Title 1">
+            <a:extLst>
+              <a:ext uri="{FF2B5EF4-FFF2-40B4-BE49-F238E27FC236}">
+                <a16:creationId xmlns:a16="http://schemas.microsoft.com/office/drawing/2014/main" id="{52FA847A-1163-5E49-A407-9CEA36D1942E}"/>
+              </a:ext>
+            </a:extLst>
+          </p:cNvPr>
+          <p:cNvSpPr>
+            <a:spLocks noGrp="1"/>
+          </p:cNvSpPr>
+          <p:nvPr>
+            <p:ph type="title"/>
+          </p:nvPr>
+        </p:nvSpPr>
+        <p:spPr/>
+        <p:txBody>
+          <a:bodyPr/>
+          <a:lstStyle/>
+          <a:p>
+            <a:r>
+              <a:rPr lang="en-US" dirty="0"/>
+              <a:t>Bayes</a:t>
+            </a:r>
+          </a:p>
+        </p:txBody>
+      </p:sp>
+      <p:sp>
+        <p:nvSpPr>
+          <p:cNvPr id="3" name="Content Placeholder 2">
+            <a:extLst>
+              <a:ext uri="{FF2B5EF4-FFF2-40B4-BE49-F238E27FC236}">
+                <a16:creationId xmlns:a16="http://schemas.microsoft.com/office/drawing/2014/main" id="{1F53A5AB-70E3-5942-8353-02D7E65E9EB9}"/>
+              </a:ext>
+            </a:extLst>
+          </p:cNvPr>
+          <p:cNvSpPr>
+            <a:spLocks noGrp="1"/>
+          </p:cNvSpPr>
+          <p:nvPr>
+            <p:ph idx="1"/>
+          </p:nvPr>
+        </p:nvSpPr>
+        <p:spPr/>
+        <p:txBody>
+          <a:bodyPr/>
+          <a:lstStyle/>
+          <a:p>
+            <a:r>
+              <a:rPr lang="en-US" dirty="0"/>
+              <a:t>Bayes theorem expands on the idea of conditional probability. </a:t>
+            </a:r>
+          </a:p>
+          <a:p>
+            <a:r>
+              <a:rPr lang="en-US" dirty="0"/>
+              <a:t>We can derive it pretty easily, by looking at examples. </a:t>
+            </a:r>
+          </a:p>
+          <a:p>
+            <a:r>
+              <a:rPr lang="en-US" dirty="0"/>
+              <a:t>It is the basis of Bayesian statistics, which we will touch on a little, but not do in great depth. </a:t>
+            </a:r>
+          </a:p>
+        </p:txBody>
+      </p:sp>
+    </p:spTree>
+    <p:extLst>
+      <p:ext uri="{BB962C8B-B14F-4D97-AF65-F5344CB8AC3E}">
+        <p14:creationId xmlns:p14="http://schemas.microsoft.com/office/powerpoint/2010/main" val="1442097028"/>
+      </p:ext>
+    </p:extLst>
+  </p:cSld>
+  <p:clrMapOvr>
+    <a:masterClrMapping/>
+  </p:clrMapOvr>
+</p:sld>
+</file>
+
 <file path=ppt/slides/slide2.xml><?xml version="1.0" encoding="utf-8"?>
 <p:sld xmlns:a="http://schemas.openxmlformats.org/drawingml/2006/main" xmlns:r="http://schemas.openxmlformats.org/officeDocument/2006/relationships" xmlns:p="http://schemas.openxmlformats.org/presentationml/2006/main">
   <p:cSld>
@@ -3720,7 +4125,7 @@
           <p:cNvPr id="2" name="Title 1">
             <a:extLst>
               <a:ext uri="{FF2B5EF4-FFF2-40B4-BE49-F238E27FC236}">
-                <a16:creationId xmlns:a16="http://schemas.microsoft.com/office/drawing/2014/main" id="{3D786B20-D5EC-CF4F-8C37-924A9298E58D}"/>
+                <a16:creationId xmlns:a16="http://schemas.microsoft.com/office/drawing/2014/main" id="{2ADDD541-FF24-883C-5322-EB30CE7E0F91}"/>
               </a:ext>
             </a:extLst>
           </p:cNvPr>
@@ -3738,7 +4143,7 @@
           <a:p>
             <a:r>
               <a:rPr lang="en-US" dirty="0"/>
-              <a:t>What’s the Probability? </a:t>
+              <a:t>Discreet vs Continuous</a:t>
             </a:r>
           </a:p>
         </p:txBody>
@@ -3748,7 +4153,7 @@
           <p:cNvPr id="3" name="Content Placeholder 2">
             <a:extLst>
               <a:ext uri="{FF2B5EF4-FFF2-40B4-BE49-F238E27FC236}">
-                <a16:creationId xmlns:a16="http://schemas.microsoft.com/office/drawing/2014/main" id="{3C7917E6-EC70-C540-B629-F6D3990AB300}"/>
+                <a16:creationId xmlns:a16="http://schemas.microsoft.com/office/drawing/2014/main" id="{2523857F-D266-905B-765C-484582DCFE29}"/>
               </a:ext>
             </a:extLst>
           </p:cNvPr>
@@ -3762,7 +4167,7 @@
         <p:spPr>
           <a:xfrm>
             <a:off x="1451579" y="2015732"/>
-            <a:ext cx="9603275" cy="4146529"/>
+            <a:ext cx="9603275" cy="4037749"/>
           </a:xfrm>
         </p:spPr>
         <p:txBody>
@@ -3771,89 +4176,47 @@
           <a:p>
             <a:r>
               <a:rPr lang="en-US" dirty="0"/>
-              <a:t>Probability = the chances something happens.</a:t>
+              <a:t>Most things we’ve dealt with thus far have been continuous. </a:t>
+            </a:r>
+          </a:p>
+          <a:p>
+            <a:r>
+              <a:rPr lang="en-US" dirty="0"/>
+              <a:t>We also regularly deal with discreet data:</a:t>
             </a:r>
           </a:p>
           <a:p>
             <a:pPr lvl="1"/>
             <a:r>
               <a:rPr lang="en-US" dirty="0"/>
-              <a:t>Or: The fraction of a total possibilities. </a:t>
+              <a:t>Votes. </a:t>
             </a:r>
           </a:p>
           <a:p>
             <a:pPr lvl="1"/>
             <a:r>
               <a:rPr lang="en-US" dirty="0"/>
-              <a:t>E.g. the chances you roll a die and get a 5 = 1/6</a:t>
-            </a:r>
-          </a:p>
-          <a:p>
-            <a:r>
-              <a:rPr lang="en-US" dirty="0"/>
-              <a:t>What does probability matter to us?</a:t>
-            </a:r>
-          </a:p>
-          <a:p>
-            <a:pPr lvl="1"/>
-            <a:r>
-              <a:rPr lang="en-US" dirty="0"/>
-              <a:t>They matter – a little. </a:t>
-            </a:r>
-          </a:p>
-          <a:p>
-            <a:pPr lvl="1"/>
-            <a:r>
-              <a:rPr lang="en-US" dirty="0"/>
-              <a:t>Probabilities are common – e.g. gambling. </a:t>
-            </a:r>
-          </a:p>
-          <a:p>
-            <a:pPr lvl="1"/>
-            <a:r>
-              <a:rPr lang="en-US" dirty="0"/>
-              <a:t>Probability is often misunderstood. </a:t>
-            </a:r>
-          </a:p>
-          <a:p>
-            <a:pPr lvl="1"/>
-            <a:r>
-              <a:rPr lang="en-US" dirty="0"/>
-              <a:t>Probability provides an alternate view of what we are looking at. </a:t>
-            </a:r>
-          </a:p>
-          <a:p>
-            <a:pPr lvl="2"/>
-            <a:r>
-              <a:rPr lang="en-US" dirty="0"/>
-              <a:t>Can reach things like distributions, by looking at probability, instead of data.</a:t>
-            </a:r>
-          </a:p>
-          <a:p>
-            <a:pPr lvl="2"/>
-            <a:r>
-              <a:rPr lang="en-US" dirty="0"/>
-              <a:t>probability something happens = share of data where that happens (</a:t>
-            </a:r>
-            <a:r>
-              <a:rPr lang="en-US" dirty="0" err="1"/>
-              <a:t>apx</a:t>
-            </a:r>
-            <a:r>
-              <a:rPr lang="en-US" dirty="0"/>
-              <a:t>)</a:t>
-            </a:r>
-          </a:p>
-          <a:p>
-            <a:pPr lvl="1"/>
-            <a:endParaRPr lang="en-US" dirty="0"/>
+              <a:t>Purchases. </a:t>
+            </a:r>
+          </a:p>
+          <a:p>
+            <a:r>
+              <a:rPr lang="en-US" dirty="0"/>
+              <a:t>Discreet data has similar distribution patterns. </a:t>
+            </a:r>
+          </a:p>
+          <a:p>
+            <a:r>
+              <a:rPr lang="en-US" dirty="0"/>
+              <a:t>We usually think of discreet things in terms of probability – likelihood that value X occurs. </a:t>
+            </a:r>
           </a:p>
         </p:txBody>
       </p:sp>
     </p:spTree>
     <p:extLst>
       <p:ext uri="{BB962C8B-B14F-4D97-AF65-F5344CB8AC3E}">
-        <p14:creationId xmlns:p14="http://schemas.microsoft.com/office/powerpoint/2010/main" val="3240744396"/>
+        <p14:creationId xmlns:p14="http://schemas.microsoft.com/office/powerpoint/2010/main" val="577072918"/>
       </p:ext>
     </p:extLst>
   </p:cSld>
@@ -3880,6 +4243,248 @@
           <a:chExt cx="0" cy="0"/>
         </a:xfrm>
       </p:grpSpPr>
+      <p:pic>
+        <p:nvPicPr>
+          <p:cNvPr id="1026" name="Picture 2" descr="Understanding Different Kinds of Distributions in Statistics | by  Sachinsoni | Towards AI">
+            <a:extLst>
+              <a:ext uri="{FF2B5EF4-FFF2-40B4-BE49-F238E27FC236}">
+                <a16:creationId xmlns:a16="http://schemas.microsoft.com/office/drawing/2014/main" id="{1B11277F-A5F9-1DAB-7FAE-AE1A348CCE0F}"/>
+              </a:ext>
+            </a:extLst>
+          </p:cNvPr>
+          <p:cNvPicPr>
+            <a:picLocks noChangeAspect="1" noChangeArrowheads="1"/>
+          </p:cNvPicPr>
+          <p:nvPr/>
+        </p:nvPicPr>
+        <p:blipFill>
+          <a:blip r:embed="rId2">
+            <a:extLst>
+              <a:ext uri="{28A0092B-C50C-407E-A947-70E740481C1C}">
+                <a14:useLocalDpi xmlns:a14="http://schemas.microsoft.com/office/drawing/2010/main" val="0"/>
+              </a:ext>
+            </a:extLst>
+          </a:blip>
+          <a:srcRect/>
+          <a:stretch>
+            <a:fillRect/>
+          </a:stretch>
+        </p:blipFill>
+        <p:spPr bwMode="auto">
+          <a:xfrm>
+            <a:off x="0" y="0"/>
+            <a:ext cx="9118600" cy="6350000"/>
+          </a:xfrm>
+          <a:prstGeom prst="rect">
+            <a:avLst/>
+          </a:prstGeom>
+          <a:noFill/>
+          <a:extLst>
+            <a:ext uri="{909E8E84-426E-40DD-AFC4-6F175D3DCCD1}">
+              <a14:hiddenFill xmlns:a14="http://schemas.microsoft.com/office/drawing/2010/main">
+                <a:solidFill>
+                  <a:srgbClr val="FFFFFF"/>
+                </a:solidFill>
+              </a14:hiddenFill>
+            </a:ext>
+          </a:extLst>
+        </p:spPr>
+      </p:pic>
+    </p:spTree>
+    <p:extLst>
+      <p:ext uri="{BB962C8B-B14F-4D97-AF65-F5344CB8AC3E}">
+        <p14:creationId xmlns:p14="http://schemas.microsoft.com/office/powerpoint/2010/main" val="3649868674"/>
+      </p:ext>
+    </p:extLst>
+  </p:cSld>
+  <p:clrMapOvr>
+    <a:masterClrMapping/>
+  </p:clrMapOvr>
+</p:sld>
+</file>
+
+<file path=ppt/slides/slide4.xml><?xml version="1.0" encoding="utf-8"?>
+<p:sld xmlns:a="http://schemas.openxmlformats.org/drawingml/2006/main" xmlns:r="http://schemas.openxmlformats.org/officeDocument/2006/relationships" xmlns:p="http://schemas.openxmlformats.org/presentationml/2006/main">
+  <p:cSld>
+    <p:spTree>
+      <p:nvGrpSpPr>
+        <p:cNvPr id="1" name=""/>
+        <p:cNvGrpSpPr/>
+        <p:nvPr/>
+      </p:nvGrpSpPr>
+      <p:grpSpPr>
+        <a:xfrm>
+          <a:off x="0" y="0"/>
+          <a:ext cx="0" cy="0"/>
+          <a:chOff x="0" y="0"/>
+          <a:chExt cx="0" cy="0"/>
+        </a:xfrm>
+      </p:grpSpPr>
+      <p:sp>
+        <p:nvSpPr>
+          <p:cNvPr id="2" name="Title 1">
+            <a:extLst>
+              <a:ext uri="{FF2B5EF4-FFF2-40B4-BE49-F238E27FC236}">
+                <a16:creationId xmlns:a16="http://schemas.microsoft.com/office/drawing/2014/main" id="{3D786B20-D5EC-CF4F-8C37-924A9298E58D}"/>
+              </a:ext>
+            </a:extLst>
+          </p:cNvPr>
+          <p:cNvSpPr>
+            <a:spLocks noGrp="1"/>
+          </p:cNvSpPr>
+          <p:nvPr>
+            <p:ph type="title"/>
+          </p:nvPr>
+        </p:nvSpPr>
+        <p:spPr/>
+        <p:txBody>
+          <a:bodyPr/>
+          <a:lstStyle/>
+          <a:p>
+            <a:r>
+              <a:rPr lang="en-US" dirty="0"/>
+              <a:t>What’s the Probability? </a:t>
+            </a:r>
+          </a:p>
+        </p:txBody>
+      </p:sp>
+      <p:sp>
+        <p:nvSpPr>
+          <p:cNvPr id="3" name="Content Placeholder 2">
+            <a:extLst>
+              <a:ext uri="{FF2B5EF4-FFF2-40B4-BE49-F238E27FC236}">
+                <a16:creationId xmlns:a16="http://schemas.microsoft.com/office/drawing/2014/main" id="{3C7917E6-EC70-C540-B629-F6D3990AB300}"/>
+              </a:ext>
+            </a:extLst>
+          </p:cNvPr>
+          <p:cNvSpPr>
+            <a:spLocks noGrp="1"/>
+          </p:cNvSpPr>
+          <p:nvPr>
+            <p:ph idx="1"/>
+          </p:nvPr>
+        </p:nvSpPr>
+        <p:spPr>
+          <a:xfrm>
+            <a:off x="1451579" y="2015732"/>
+            <a:ext cx="9603275" cy="4146529"/>
+          </a:xfrm>
+        </p:spPr>
+        <p:txBody>
+          <a:bodyPr/>
+          <a:lstStyle/>
+          <a:p>
+            <a:r>
+              <a:rPr lang="en-US" dirty="0"/>
+              <a:t>Probability = the chances something happens.</a:t>
+            </a:r>
+          </a:p>
+          <a:p>
+            <a:pPr lvl="1"/>
+            <a:r>
+              <a:rPr lang="en-US" dirty="0"/>
+              <a:t>Or: The fraction of a total possibilities. </a:t>
+            </a:r>
+          </a:p>
+          <a:p>
+            <a:pPr lvl="1"/>
+            <a:r>
+              <a:rPr lang="en-US" dirty="0"/>
+              <a:t>E.g. the chances you roll a die and get a 5 = 1/6</a:t>
+            </a:r>
+          </a:p>
+          <a:p>
+            <a:r>
+              <a:rPr lang="en-US" dirty="0"/>
+              <a:t>What does probability matter to us?</a:t>
+            </a:r>
+          </a:p>
+          <a:p>
+            <a:pPr lvl="1"/>
+            <a:r>
+              <a:rPr lang="en-US" dirty="0"/>
+              <a:t>They matter – a little. </a:t>
+            </a:r>
+          </a:p>
+          <a:p>
+            <a:pPr lvl="1"/>
+            <a:r>
+              <a:rPr lang="en-US" dirty="0"/>
+              <a:t>Probabilities are common – e.g. gambling. </a:t>
+            </a:r>
+          </a:p>
+          <a:p>
+            <a:pPr lvl="1"/>
+            <a:r>
+              <a:rPr lang="en-US" dirty="0"/>
+              <a:t>Probability is often misunderstood. </a:t>
+            </a:r>
+          </a:p>
+          <a:p>
+            <a:pPr lvl="1"/>
+            <a:r>
+              <a:rPr lang="en-US" dirty="0"/>
+              <a:t>Probability provides an alternate view of what we are looking at. </a:t>
+            </a:r>
+          </a:p>
+          <a:p>
+            <a:pPr lvl="2"/>
+            <a:r>
+              <a:rPr lang="en-US" dirty="0"/>
+              <a:t>Can reach things like distributions, by looking at probability, instead of data.</a:t>
+            </a:r>
+          </a:p>
+          <a:p>
+            <a:pPr lvl="2"/>
+            <a:r>
+              <a:rPr lang="en-US" dirty="0"/>
+              <a:t>probability something happens = share of data where that happens (</a:t>
+            </a:r>
+            <a:r>
+              <a:rPr lang="en-US" dirty="0" err="1"/>
+              <a:t>apx</a:t>
+            </a:r>
+            <a:r>
+              <a:rPr lang="en-US" dirty="0"/>
+              <a:t>)</a:t>
+            </a:r>
+          </a:p>
+          <a:p>
+            <a:pPr lvl="1"/>
+            <a:endParaRPr lang="en-US" dirty="0"/>
+          </a:p>
+        </p:txBody>
+      </p:sp>
+    </p:spTree>
+    <p:extLst>
+      <p:ext uri="{BB962C8B-B14F-4D97-AF65-F5344CB8AC3E}">
+        <p14:creationId xmlns:p14="http://schemas.microsoft.com/office/powerpoint/2010/main" val="3240744396"/>
+      </p:ext>
+    </p:extLst>
+  </p:cSld>
+  <p:clrMapOvr>
+    <a:masterClrMapping/>
+  </p:clrMapOvr>
+</p:sld>
+</file>
+
+<file path=ppt/slides/slide5.xml><?xml version="1.0" encoding="utf-8"?>
+<p:sld xmlns:a="http://schemas.openxmlformats.org/drawingml/2006/main" xmlns:r="http://schemas.openxmlformats.org/officeDocument/2006/relationships" xmlns:p="http://schemas.openxmlformats.org/presentationml/2006/main">
+  <p:cSld>
+    <p:spTree>
+      <p:nvGrpSpPr>
+        <p:cNvPr id="1" name=""/>
+        <p:cNvGrpSpPr/>
+        <p:nvPr/>
+      </p:nvGrpSpPr>
+      <p:grpSpPr>
+        <a:xfrm>
+          <a:off x="0" y="0"/>
+          <a:ext cx="0" cy="0"/>
+          <a:chOff x="0" y="0"/>
+          <a:chExt cx="0" cy="0"/>
+        </a:xfrm>
+      </p:grpSpPr>
       <p:sp>
         <p:nvSpPr>
           <p:cNvPr id="2" name="Title 1">
@@ -3989,7 +4594,7 @@
 </p:sld>
 </file>
 
-<file path=ppt/slides/slide4.xml><?xml version="1.0" encoding="utf-8"?>
+<file path=ppt/slides/slide6.xml><?xml version="1.0" encoding="utf-8"?>
 <p:sld xmlns:a="http://schemas.openxmlformats.org/drawingml/2006/main" xmlns:r="http://schemas.openxmlformats.org/officeDocument/2006/relationships" xmlns:p="http://schemas.openxmlformats.org/presentationml/2006/main">
   <p:cSld>
     <p:bg>
@@ -4171,7 +4776,7 @@
 </p:sld>
 </file>
 
-<file path=ppt/slides/slide5.xml><?xml version="1.0" encoding="utf-8"?>
+<file path=ppt/slides/slide7.xml><?xml version="1.0" encoding="utf-8"?>
 <p:sld xmlns:a="http://schemas.openxmlformats.org/drawingml/2006/main" xmlns:r="http://schemas.openxmlformats.org/officeDocument/2006/relationships" xmlns:p="http://schemas.openxmlformats.org/presentationml/2006/main">
   <p:cSld>
     <p:spTree>
@@ -4318,7 +4923,7 @@
 </p:sld>
 </file>
 
-<file path=ppt/slides/slide6.xml><?xml version="1.0" encoding="utf-8"?>
+<file path=ppt/slides/slide8.xml><?xml version="1.0" encoding="utf-8"?>
 <p:sld xmlns:a="http://schemas.openxmlformats.org/drawingml/2006/main" xmlns:r="http://schemas.openxmlformats.org/officeDocument/2006/relationships" xmlns:p="http://schemas.openxmlformats.org/presentationml/2006/main">
   <p:cSld>
     <p:bg>
@@ -4541,7 +5146,7 @@
 </p:sld>
 </file>
 
-<file path=ppt/slides/slide7.xml><?xml version="1.0" encoding="utf-8"?>
+<file path=ppt/slides/slide9.xml><?xml version="1.0" encoding="utf-8"?>
 <p:sld xmlns:a="http://schemas.openxmlformats.org/drawingml/2006/main" xmlns:r="http://schemas.openxmlformats.org/officeDocument/2006/relationships" xmlns:p="http://schemas.openxmlformats.org/presentationml/2006/main">
   <p:cSld>
     <p:spTree>
@@ -4659,104 +5264,6 @@
     <p:extLst>
       <p:ext uri="{BB962C8B-B14F-4D97-AF65-F5344CB8AC3E}">
         <p14:creationId xmlns:p14="http://schemas.microsoft.com/office/powerpoint/2010/main" val="702050722"/>
-      </p:ext>
-    </p:extLst>
-  </p:cSld>
-  <p:clrMapOvr>
-    <a:masterClrMapping/>
-  </p:clrMapOvr>
-</p:sld>
-</file>
-
-<file path=ppt/slides/slide8.xml><?xml version="1.0" encoding="utf-8"?>
-<p:sld xmlns:a="http://schemas.openxmlformats.org/drawingml/2006/main" xmlns:r="http://schemas.openxmlformats.org/officeDocument/2006/relationships" xmlns:p="http://schemas.openxmlformats.org/presentationml/2006/main">
-  <p:cSld>
-    <p:spTree>
-      <p:nvGrpSpPr>
-        <p:cNvPr id="1" name=""/>
-        <p:cNvGrpSpPr/>
-        <p:nvPr/>
-      </p:nvGrpSpPr>
-      <p:grpSpPr>
-        <a:xfrm>
-          <a:off x="0" y="0"/>
-          <a:ext cx="0" cy="0"/>
-          <a:chOff x="0" y="0"/>
-          <a:chExt cx="0" cy="0"/>
-        </a:xfrm>
-      </p:grpSpPr>
-      <p:sp>
-        <p:nvSpPr>
-          <p:cNvPr id="2" name="Title 1">
-            <a:extLst>
-              <a:ext uri="{FF2B5EF4-FFF2-40B4-BE49-F238E27FC236}">
-                <a16:creationId xmlns:a16="http://schemas.microsoft.com/office/drawing/2014/main" id="{52FA847A-1163-5E49-A407-9CEA36D1942E}"/>
-              </a:ext>
-            </a:extLst>
-          </p:cNvPr>
-          <p:cNvSpPr>
-            <a:spLocks noGrp="1"/>
-          </p:cNvSpPr>
-          <p:nvPr>
-            <p:ph type="title"/>
-          </p:nvPr>
-        </p:nvSpPr>
-        <p:spPr/>
-        <p:txBody>
-          <a:bodyPr/>
-          <a:lstStyle/>
-          <a:p>
-            <a:r>
-              <a:rPr lang="en-US" dirty="0"/>
-              <a:t>Bayes</a:t>
-            </a:r>
-          </a:p>
-        </p:txBody>
-      </p:sp>
-      <p:sp>
-        <p:nvSpPr>
-          <p:cNvPr id="3" name="Content Placeholder 2">
-            <a:extLst>
-              <a:ext uri="{FF2B5EF4-FFF2-40B4-BE49-F238E27FC236}">
-                <a16:creationId xmlns:a16="http://schemas.microsoft.com/office/drawing/2014/main" id="{1F53A5AB-70E3-5942-8353-02D7E65E9EB9}"/>
-              </a:ext>
-            </a:extLst>
-          </p:cNvPr>
-          <p:cNvSpPr>
-            <a:spLocks noGrp="1"/>
-          </p:cNvSpPr>
-          <p:nvPr>
-            <p:ph idx="1"/>
-          </p:nvPr>
-        </p:nvSpPr>
-        <p:spPr/>
-        <p:txBody>
-          <a:bodyPr/>
-          <a:lstStyle/>
-          <a:p>
-            <a:r>
-              <a:rPr lang="en-US" dirty="0"/>
-              <a:t>Bayes theorem expands on the idea of conditional probability. </a:t>
-            </a:r>
-          </a:p>
-          <a:p>
-            <a:r>
-              <a:rPr lang="en-US" dirty="0"/>
-              <a:t>We can derive it pretty easily, by looking at examples. </a:t>
-            </a:r>
-          </a:p>
-          <a:p>
-            <a:r>
-              <a:rPr lang="en-US" dirty="0"/>
-              <a:t>It is the basis of Bayesian statistics, which we will touch on a little, but not do in great depth. </a:t>
-            </a:r>
-          </a:p>
-        </p:txBody>
-      </p:sp>
-    </p:spTree>
-    <p:extLst>
-      <p:ext uri="{BB962C8B-B14F-4D97-AF65-F5344CB8AC3E}">
-        <p14:creationId xmlns:p14="http://schemas.microsoft.com/office/powerpoint/2010/main" val="1442097028"/>
       </p:ext>
     </p:extLst>
   </p:cSld>

--- a/reference_material/slides/013_Probability_and_Bayes.pptx
+++ b/reference_material/slides/013_Probability_and_Bayes.pptx
@@ -5,19 +5,33 @@
     <p:sldMasterId id="2147483660" r:id="rId1"/>
   </p:sldMasterIdLst>
   <p:sldIdLst>
-    <p:sldId id="256" r:id="rId2"/>
-    <p:sldId id="264" r:id="rId3"/>
-    <p:sldId id="265" r:id="rId4"/>
-    <p:sldId id="258" r:id="rId5"/>
-    <p:sldId id="257" r:id="rId6"/>
-    <p:sldId id="259" r:id="rId7"/>
-    <p:sldId id="260" r:id="rId8"/>
-    <p:sldId id="261" r:id="rId9"/>
-    <p:sldId id="262" r:id="rId10"/>
-    <p:sldId id="266" r:id="rId11"/>
-    <p:sldId id="268" r:id="rId12"/>
-    <p:sldId id="267" r:id="rId13"/>
-    <p:sldId id="263" r:id="rId14"/>
+    <p:sldId id="270" r:id="rId2"/>
+    <p:sldId id="278" r:id="rId3"/>
+    <p:sldId id="256" r:id="rId4"/>
+    <p:sldId id="264" r:id="rId5"/>
+    <p:sldId id="265" r:id="rId6"/>
+    <p:sldId id="271" r:id="rId7"/>
+    <p:sldId id="258" r:id="rId8"/>
+    <p:sldId id="257" r:id="rId9"/>
+    <p:sldId id="279" r:id="rId10"/>
+    <p:sldId id="259" r:id="rId11"/>
+    <p:sldId id="260" r:id="rId12"/>
+    <p:sldId id="261" r:id="rId13"/>
+    <p:sldId id="262" r:id="rId14"/>
+    <p:sldId id="274" r:id="rId15"/>
+    <p:sldId id="281" r:id="rId16"/>
+    <p:sldId id="267" r:id="rId17"/>
+    <p:sldId id="272" r:id="rId18"/>
+    <p:sldId id="280" r:id="rId19"/>
+    <p:sldId id="273" r:id="rId20"/>
+    <p:sldId id="275" r:id="rId21"/>
+    <p:sldId id="282" r:id="rId22"/>
+    <p:sldId id="276" r:id="rId23"/>
+    <p:sldId id="266" r:id="rId24"/>
+    <p:sldId id="277" r:id="rId25"/>
+    <p:sldId id="268" r:id="rId26"/>
+    <p:sldId id="263" r:id="rId27"/>
+    <p:sldId id="269" r:id="rId28"/>
   </p:sldIdLst>
   <p:sldSz cx="12192000" cy="6858000"/>
   <p:notesSz cx="6858000" cy="9144000"/>
@@ -3642,7 +3656,7 @@
           <p:cNvPr id="2" name="Title 1">
             <a:extLst>
               <a:ext uri="{FF2B5EF4-FFF2-40B4-BE49-F238E27FC236}">
-                <a16:creationId xmlns:a16="http://schemas.microsoft.com/office/drawing/2014/main" id="{C302EF34-2FE0-9247-A153-6964C526EAE4}"/>
+                <a16:creationId xmlns:a16="http://schemas.microsoft.com/office/drawing/2014/main" id="{EF55D4DD-BB03-314F-285F-0B3F21C0521B}"/>
               </a:ext>
             </a:extLst>
           </p:cNvPr>
@@ -3650,7 +3664,7 @@
             <a:spLocks noGrp="1"/>
           </p:cNvSpPr>
           <p:nvPr>
-            <p:ph type="ctrTitle"/>
+            <p:ph type="title"/>
           </p:nvPr>
         </p:nvSpPr>
         <p:spPr/>
@@ -3660,17 +3674,17 @@
           <a:p>
             <a:r>
               <a:rPr lang="en-US" dirty="0"/>
-              <a:t>Probability</a:t>
-            </a:r>
-          </a:p>
-        </p:txBody>
-      </p:sp>
-      <p:sp>
-        <p:nvSpPr>
-          <p:cNvPr id="3" name="Subtitle 2">
+              <a:t>Housekeeping</a:t>
+            </a:r>
+          </a:p>
+        </p:txBody>
+      </p:sp>
+      <p:sp>
+        <p:nvSpPr>
+          <p:cNvPr id="3" name="Content Placeholder 2">
             <a:extLst>
               <a:ext uri="{FF2B5EF4-FFF2-40B4-BE49-F238E27FC236}">
-                <a16:creationId xmlns:a16="http://schemas.microsoft.com/office/drawing/2014/main" id="{6E706542-2F47-C249-8FEC-E1F579C97596}"/>
+                <a16:creationId xmlns:a16="http://schemas.microsoft.com/office/drawing/2014/main" id="{E6C49A87-2B8B-09A4-C837-05E67FBA4153}"/>
               </a:ext>
             </a:extLst>
           </p:cNvPr>
@@ -3678,22 +3692,100 @@
             <a:spLocks noGrp="1"/>
           </p:cNvSpPr>
           <p:nvPr>
-            <p:ph type="subTitle" idx="1"/>
-          </p:nvPr>
-        </p:nvSpPr>
-        <p:spPr/>
-        <p:txBody>
-          <a:bodyPr/>
-          <a:lstStyle/>
-          <a:p>
-            <a:endParaRPr lang="en-US"/>
+            <p:ph idx="1"/>
+          </p:nvPr>
+        </p:nvSpPr>
+        <p:spPr>
+          <a:xfrm>
+            <a:off x="1451579" y="2015732"/>
+            <a:ext cx="9603275" cy="4037749"/>
+          </a:xfrm>
+        </p:spPr>
+        <p:txBody>
+          <a:bodyPr/>
+          <a:lstStyle/>
+          <a:p>
+            <a:r>
+              <a:rPr lang="en-US" dirty="0"/>
+              <a:t>Some basic probability concepts. (This part is pretty simple). </a:t>
+            </a:r>
+          </a:p>
+          <a:p>
+            <a:pPr lvl="1"/>
+            <a:r>
+              <a:rPr lang="en-US" dirty="0"/>
+              <a:t>We need a bit now, but this will largely be background. </a:t>
+            </a:r>
+          </a:p>
+          <a:p>
+            <a:pPr lvl="1"/>
+            <a:r>
+              <a:rPr lang="en-US" dirty="0"/>
+              <a:t>Odds and logits. </a:t>
+            </a:r>
+          </a:p>
+          <a:p>
+            <a:r>
+              <a:rPr lang="en-US" dirty="0"/>
+              <a:t>Comparing two distributions. </a:t>
+            </a:r>
+          </a:p>
+          <a:p>
+            <a:pPr lvl="1"/>
+            <a:r>
+              <a:rPr lang="en-US" dirty="0"/>
+              <a:t>Thresholds, overlap, </a:t>
+            </a:r>
+            <a:r>
+              <a:rPr lang="en-US" dirty="0" err="1"/>
+              <a:t>cohen</a:t>
+            </a:r>
+            <a:r>
+              <a:rPr lang="en-US" dirty="0"/>
+              <a:t>. </a:t>
+            </a:r>
+          </a:p>
+          <a:p>
+            <a:r>
+              <a:rPr lang="en-US" dirty="0"/>
+              <a:t>Sampling and estimation. (Chapter 8 now, read ch9 soon-</a:t>
+            </a:r>
+            <a:r>
+              <a:rPr lang="en-US" dirty="0" err="1"/>
+              <a:t>ish</a:t>
+            </a:r>
+            <a:r>
+              <a:rPr lang="en-US" dirty="0"/>
+              <a:t> as well)</a:t>
+            </a:r>
+          </a:p>
+          <a:p>
+            <a:pPr lvl="1"/>
+            <a:r>
+              <a:rPr lang="en-US" dirty="0"/>
+              <a:t>Population vs sample, confidence. </a:t>
+            </a:r>
+          </a:p>
+          <a:p>
+            <a:pPr lvl="1"/>
+            <a:r>
+              <a:rPr lang="en-US" dirty="0"/>
+              <a:t>Simulation and trial coding and tabulation. </a:t>
+            </a:r>
+          </a:p>
+          <a:p>
+            <a:pPr lvl="1"/>
+            <a:r>
+              <a:rPr lang="en-US" dirty="0"/>
+              <a:t>Generalizing from a sample, yay inferential stats! </a:t>
+            </a:r>
           </a:p>
         </p:txBody>
       </p:sp>
     </p:spTree>
     <p:extLst>
       <p:ext uri="{BB962C8B-B14F-4D97-AF65-F5344CB8AC3E}">
-        <p14:creationId xmlns:p14="http://schemas.microsoft.com/office/powerpoint/2010/main" val="3217872114"/>
+        <p14:creationId xmlns:p14="http://schemas.microsoft.com/office/powerpoint/2010/main" val="977182574"/>
       </p:ext>
     </p:extLst>
   </p:cSld>
@@ -3706,6 +3798,30 @@
 <file path=ppt/slides/slide10.xml><?xml version="1.0" encoding="utf-8"?>
 <p:sld xmlns:a="http://schemas.openxmlformats.org/drawingml/2006/main" xmlns:r="http://schemas.openxmlformats.org/officeDocument/2006/relationships" xmlns:p="http://schemas.openxmlformats.org/presentationml/2006/main">
   <p:cSld>
+    <p:bg>
+      <p:bgPr>
+        <a:gradFill rotWithShape="1">
+          <a:gsLst>
+            <a:gs pos="0">
+              <a:schemeClr val="bg2">
+                <a:tint val="94000"/>
+                <a:satMod val="80000"/>
+                <a:lumMod val="106000"/>
+              </a:schemeClr>
+            </a:gs>
+            <a:gs pos="100000">
+              <a:schemeClr val="bg2">
+                <a:shade val="80000"/>
+              </a:schemeClr>
+            </a:gs>
+          </a:gsLst>
+          <a:path path="circle">
+            <a:fillToRect l="43000" r="43000" b="100000"/>
+          </a:path>
+        </a:gradFill>
+        <a:effectLst/>
+      </p:bgPr>
+    </p:bg>
     <p:spTree>
       <p:nvGrpSpPr>
         <p:cNvPr id="1" name=""/>
@@ -3725,7 +3841,7 @@
           <p:cNvPr id="2" name="Title 1">
             <a:extLst>
               <a:ext uri="{FF2B5EF4-FFF2-40B4-BE49-F238E27FC236}">
-                <a16:creationId xmlns:a16="http://schemas.microsoft.com/office/drawing/2014/main" id="{35230F09-B44A-CB77-DFE0-6E063223B214}"/>
+                <a16:creationId xmlns:a16="http://schemas.microsoft.com/office/drawing/2014/main" id="{FB519E84-2B20-554F-96AC-21F5038BBE31}"/>
               </a:ext>
             </a:extLst>
           </p:cNvPr>
@@ -3736,14 +3852,21 @@
             <p:ph type="title"/>
           </p:nvPr>
         </p:nvSpPr>
-        <p:spPr/>
-        <p:txBody>
-          <a:bodyPr/>
-          <a:lstStyle/>
-          <a:p>
-            <a:r>
-              <a:rPr lang="en-US" dirty="0"/>
-              <a:t>Odds</a:t>
+        <p:spPr>
+          <a:xfrm>
+            <a:off x="1451579" y="804519"/>
+            <a:ext cx="9603275" cy="1049235"/>
+          </a:xfrm>
+        </p:spPr>
+        <p:txBody>
+          <a:bodyPr>
+            <a:normAutofit/>
+          </a:bodyPr>
+          <a:lstStyle/>
+          <a:p>
+            <a:r>
+              <a:rPr lang="en-US" dirty="0"/>
+              <a:t>Using Probability – Will We live?</a:t>
             </a:r>
           </a:p>
         </p:txBody>
@@ -3753,7 +3876,7 @@
           <p:cNvPr id="3" name="Content Placeholder 2">
             <a:extLst>
               <a:ext uri="{FF2B5EF4-FFF2-40B4-BE49-F238E27FC236}">
-                <a16:creationId xmlns:a16="http://schemas.microsoft.com/office/drawing/2014/main" id="{F7464E83-DAA2-5F11-C3F2-FD8C920A5071}"/>
+                <a16:creationId xmlns:a16="http://schemas.microsoft.com/office/drawing/2014/main" id="{03680AA9-13F5-EB4B-AF07-8A85470748A0}"/>
               </a:ext>
             </a:extLst>
           </p:cNvPr>
@@ -3764,57 +3887,87 @@
             <p:ph idx="1"/>
           </p:nvPr>
         </p:nvSpPr>
-        <p:spPr/>
-        <p:txBody>
-          <a:bodyPr/>
-          <a:lstStyle/>
-          <a:p>
-            <a:r>
-              <a:rPr lang="en-US" dirty="0"/>
-              <a:t>Odds are an alternate expression of probability. </a:t>
-            </a:r>
-          </a:p>
-          <a:p>
-            <a:pPr lvl="1"/>
-            <a:r>
-              <a:rPr lang="en-US" dirty="0"/>
-              <a:t>Ratio of true to not true. </a:t>
-            </a:r>
-          </a:p>
-          <a:p>
-            <a:r>
-              <a:rPr lang="en-US" dirty="0"/>
-              <a:t>Example - 80% chance of winning. </a:t>
-            </a:r>
-          </a:p>
-          <a:p>
-            <a:pPr lvl="1"/>
-            <a:r>
-              <a:rPr lang="en-US" dirty="0"/>
-              <a:t>.8 / .2 = 4</a:t>
-            </a:r>
-            <a:r>
-              <a:rPr lang="en-US"/>
-              <a:t>. </a:t>
-            </a:r>
-            <a:r>
-              <a:rPr lang="en-US" dirty="0"/>
-              <a:t>4 to 1 odds of winning. </a:t>
-            </a:r>
-          </a:p>
-          <a:p>
-            <a:pPr lvl="1"/>
-            <a:r>
-              <a:rPr lang="en-US" dirty="0"/>
-              <a:t>.2 / .8 = .25. 1 to 4 odds of losing. </a:t>
-            </a:r>
-          </a:p>
-        </p:txBody>
-      </p:sp>
+        <p:spPr>
+          <a:xfrm>
+            <a:off x="571501" y="2015734"/>
+            <a:ext cx="4969614" cy="3450613"/>
+          </a:xfrm>
+        </p:spPr>
+        <p:txBody>
+          <a:bodyPr>
+            <a:normAutofit/>
+          </a:bodyPr>
+          <a:lstStyle/>
+          <a:p>
+            <a:r>
+              <a:rPr lang="en-US" dirty="0"/>
+              <a:t>We need to win at 5 simple games. </a:t>
+            </a:r>
+          </a:p>
+          <a:p>
+            <a:r>
+              <a:rPr lang="en-US" dirty="0"/>
+              <a:t>We are really, really good at games, we win 90% of the time.</a:t>
+            </a:r>
+          </a:p>
+          <a:p>
+            <a:r>
+              <a:rPr lang="en-US" dirty="0"/>
+              <a:t>Are we dead?</a:t>
+            </a:r>
+          </a:p>
+        </p:txBody>
+      </p:sp>
+      <p:pic>
+        <p:nvPicPr>
+          <p:cNvPr id="1026" name="Picture 2" descr="All the best &amp;#39;Squid Game&amp;#39; memes on the internet">
+            <a:extLst>
+              <a:ext uri="{FF2B5EF4-FFF2-40B4-BE49-F238E27FC236}">
+                <a16:creationId xmlns:a16="http://schemas.microsoft.com/office/drawing/2014/main" id="{D878DA7F-B129-2143-BA4F-5B965767096C}"/>
+              </a:ext>
+            </a:extLst>
+          </p:cNvPr>
+          <p:cNvPicPr>
+            <a:picLocks noChangeAspect="1" noChangeArrowheads="1"/>
+          </p:cNvPicPr>
+          <p:nvPr/>
+        </p:nvPicPr>
+        <p:blipFill>
+          <a:blip r:embed="rId2">
+            <a:extLst>
+              <a:ext uri="{28A0092B-C50C-407E-A947-70E740481C1C}">
+                <a14:useLocalDpi xmlns:a14="http://schemas.microsoft.com/office/drawing/2010/main" val="0"/>
+              </a:ext>
+            </a:extLst>
+          </a:blip>
+          <a:stretch>
+            <a:fillRect/>
+          </a:stretch>
+        </p:blipFill>
+        <p:spPr bwMode="auto">
+          <a:xfrm>
+            <a:off x="5541115" y="1932358"/>
+            <a:ext cx="6650885" cy="3325442"/>
+          </a:xfrm>
+          <a:prstGeom prst="rect">
+            <a:avLst/>
+          </a:prstGeom>
+          <a:noFill/>
+          <a:extLst>
+            <a:ext uri="{909E8E84-426E-40DD-AFC4-6F175D3DCCD1}">
+              <a14:hiddenFill xmlns:a14="http://schemas.microsoft.com/office/drawing/2010/main">
+                <a:solidFill>
+                  <a:srgbClr val="FFFFFF"/>
+                </a:solidFill>
+              </a14:hiddenFill>
+            </a:ext>
+          </a:extLst>
+        </p:spPr>
+      </p:pic>
     </p:spTree>
     <p:extLst>
       <p:ext uri="{BB962C8B-B14F-4D97-AF65-F5344CB8AC3E}">
-        <p14:creationId xmlns:p14="http://schemas.microsoft.com/office/powerpoint/2010/main" val="3516702342"/>
+        <p14:creationId xmlns:p14="http://schemas.microsoft.com/office/powerpoint/2010/main" val="3997645213"/>
       </p:ext>
     </p:extLst>
   </p:cSld>
@@ -3846,7 +3999,7 @@
           <p:cNvPr id="2" name="Title 1">
             <a:extLst>
               <a:ext uri="{FF2B5EF4-FFF2-40B4-BE49-F238E27FC236}">
-                <a16:creationId xmlns:a16="http://schemas.microsoft.com/office/drawing/2014/main" id="{F19675AC-B6AC-2B2A-EBAB-D6EDA961AD26}"/>
+                <a16:creationId xmlns:a16="http://schemas.microsoft.com/office/drawing/2014/main" id="{D53E4AA8-B3D4-284A-B0CD-C0DA2209B755}"/>
               </a:ext>
             </a:extLst>
           </p:cNvPr>
@@ -3864,7 +4017,7 @@
           <a:p>
             <a:r>
               <a:rPr lang="en-US" dirty="0"/>
-              <a:t>Log Odds</a:t>
+              <a:t>Will we Live?</a:t>
             </a:r>
           </a:p>
         </p:txBody>
@@ -3874,7 +4027,7 @@
           <p:cNvPr id="3" name="Content Placeholder 2">
             <a:extLst>
               <a:ext uri="{FF2B5EF4-FFF2-40B4-BE49-F238E27FC236}">
-                <a16:creationId xmlns:a16="http://schemas.microsoft.com/office/drawing/2014/main" id="{B1CD082F-37FD-EDCB-33E4-44300595AF3C}"/>
+                <a16:creationId xmlns:a16="http://schemas.microsoft.com/office/drawing/2014/main" id="{725F6146-186E-0C4A-8057-81778B705DC1}"/>
               </a:ext>
             </a:extLst>
           </p:cNvPr>
@@ -3885,34 +4038,83 @@
             <p:ph idx="1"/>
           </p:nvPr>
         </p:nvSpPr>
-        <p:spPr/>
-        <p:txBody>
-          <a:bodyPr/>
-          <a:lstStyle/>
-          <a:p>
-            <a:r>
-              <a:rPr lang="en-US" dirty="0"/>
-              <a:t>Odds are useful in comparing probabilities in combination with logs. </a:t>
-            </a:r>
-          </a:p>
-          <a:p>
-            <a:r>
-              <a:rPr lang="en-US" dirty="0"/>
-              <a:t>By taking the log of the odds, the value becomes symmetrical. </a:t>
-            </a:r>
-          </a:p>
-          <a:p>
-            <a:r>
-              <a:rPr lang="en-US" dirty="0"/>
-              <a:t>This is called the logit – important later in ML. </a:t>
-            </a:r>
+        <p:spPr>
+          <a:xfrm>
+            <a:off x="1451579" y="2015732"/>
+            <a:ext cx="9603275" cy="4037749"/>
+          </a:xfrm>
+        </p:spPr>
+        <p:txBody>
+          <a:bodyPr/>
+          <a:lstStyle/>
+          <a:p>
+            <a:r>
+              <a:rPr lang="en-US" dirty="0"/>
+              <a:t>P(Win) = .9</a:t>
+            </a:r>
+          </a:p>
+          <a:p>
+            <a:r>
+              <a:rPr lang="en-US" dirty="0"/>
+              <a:t>Odds we are alive after:</a:t>
+            </a:r>
+          </a:p>
+          <a:p>
+            <a:pPr lvl="1"/>
+            <a:r>
+              <a:rPr lang="en-US" dirty="0"/>
+              <a:t>1 Game – 90%</a:t>
+            </a:r>
+          </a:p>
+          <a:p>
+            <a:pPr lvl="1"/>
+            <a:r>
+              <a:rPr lang="en-US" dirty="0"/>
+              <a:t>2 Games: P(W1 and W2) = .9 * .9 = .81 = 81%</a:t>
+            </a:r>
+          </a:p>
+          <a:p>
+            <a:pPr lvl="1"/>
+            <a:r>
+              <a:rPr lang="en-US" dirty="0"/>
+              <a:t>3 Games P(W1&amp;W2&amp;W3) = .9^3 = .729 = 73%</a:t>
+            </a:r>
+          </a:p>
+          <a:p>
+            <a:pPr lvl="1"/>
+            <a:r>
+              <a:rPr lang="en-US" dirty="0"/>
+              <a:t>4 Games P(W1&amp;W2&amp;W3&amp;W4) = .9^4 = .66 = 66%</a:t>
+            </a:r>
+          </a:p>
+          <a:p>
+            <a:pPr lvl="1"/>
+            <a:r>
+              <a:rPr lang="en-US" dirty="0"/>
+              <a:t>5 Games P(W1&amp;W2&amp;W3&amp;W4&amp;W5) = .9^5 = 59%</a:t>
+            </a:r>
+          </a:p>
+          <a:p>
+            <a:r>
+              <a:rPr lang="en-US" dirty="0"/>
+              <a:t>Damn it. </a:t>
+            </a:r>
+          </a:p>
+          <a:p>
+            <a:r>
+              <a:rPr lang="en-US" dirty="0"/>
+              <a:t>Even if we are better – 95% win rate, we only survive 77% of the time. </a:t>
+            </a:r>
+          </a:p>
+          <a:p>
+            <a:endParaRPr lang="en-US" dirty="0"/>
           </a:p>
         </p:txBody>
       </p:sp>
     </p:spTree>
     <p:extLst>
       <p:ext uri="{BB962C8B-B14F-4D97-AF65-F5344CB8AC3E}">
-        <p14:creationId xmlns:p14="http://schemas.microsoft.com/office/powerpoint/2010/main" val="3868561471"/>
+        <p14:creationId xmlns:p14="http://schemas.microsoft.com/office/powerpoint/2010/main" val="1293442868"/>
       </p:ext>
     </p:extLst>
   </p:cSld>
@@ -3925,6 +4127,30 @@
 <file path=ppt/slides/slide12.xml><?xml version="1.0" encoding="utf-8"?>
 <p:sld xmlns:a="http://schemas.openxmlformats.org/drawingml/2006/main" xmlns:r="http://schemas.openxmlformats.org/officeDocument/2006/relationships" xmlns:p="http://schemas.openxmlformats.org/presentationml/2006/main">
   <p:cSld>
+    <p:bg>
+      <p:bgPr>
+        <a:gradFill rotWithShape="1">
+          <a:gsLst>
+            <a:gs pos="0">
+              <a:schemeClr val="bg2">
+                <a:tint val="94000"/>
+                <a:satMod val="80000"/>
+                <a:lumMod val="106000"/>
+              </a:schemeClr>
+            </a:gs>
+            <a:gs pos="100000">
+              <a:schemeClr val="bg2">
+                <a:shade val="80000"/>
+              </a:schemeClr>
+            </a:gs>
+          </a:gsLst>
+          <a:path path="circle">
+            <a:fillToRect l="43000" r="43000" b="100000"/>
+          </a:path>
+        </a:gradFill>
+        <a:effectLst/>
+      </p:bgPr>
+    </p:bg>
     <p:spTree>
       <p:nvGrpSpPr>
         <p:cNvPr id="1" name=""/>
@@ -3944,7 +4170,7 @@
           <p:cNvPr id="2" name="Title 1">
             <a:extLst>
               <a:ext uri="{FF2B5EF4-FFF2-40B4-BE49-F238E27FC236}">
-                <a16:creationId xmlns:a16="http://schemas.microsoft.com/office/drawing/2014/main" id="{5517B2D7-A503-B515-44A2-AD8F388A9F74}"/>
+                <a16:creationId xmlns:a16="http://schemas.microsoft.com/office/drawing/2014/main" id="{54BC807B-0003-3849-AAF4-1D4997877BA4}"/>
               </a:ext>
             </a:extLst>
           </p:cNvPr>
@@ -3955,14 +4181,21 @@
             <p:ph type="title"/>
           </p:nvPr>
         </p:nvSpPr>
-        <p:spPr/>
-        <p:txBody>
-          <a:bodyPr/>
-          <a:lstStyle/>
-          <a:p>
-            <a:r>
-              <a:rPr lang="en-US" dirty="0"/>
-              <a:t>Odds and Effect Sizes</a:t>
+        <p:spPr>
+          <a:xfrm>
+            <a:off x="1451579" y="804519"/>
+            <a:ext cx="9603275" cy="1049235"/>
+          </a:xfrm>
+        </p:spPr>
+        <p:txBody>
+          <a:bodyPr>
+            <a:normAutofit/>
+          </a:bodyPr>
+          <a:lstStyle/>
+          <a:p>
+            <a:r>
+              <a:rPr lang="en-US" dirty="0"/>
+              <a:t>Choose Carefully</a:t>
             </a:r>
           </a:p>
         </p:txBody>
@@ -3972,7 +4205,7 @@
           <p:cNvPr id="3" name="Content Placeholder 2">
             <a:extLst>
               <a:ext uri="{FF2B5EF4-FFF2-40B4-BE49-F238E27FC236}">
-                <a16:creationId xmlns:a16="http://schemas.microsoft.com/office/drawing/2014/main" id="{1CC57BBE-5EB0-A7A4-E217-B236AD739519}"/>
+                <a16:creationId xmlns:a16="http://schemas.microsoft.com/office/drawing/2014/main" id="{EF962E4C-0B60-9F41-92C1-84326E6143FA}"/>
               </a:ext>
             </a:extLst>
           </p:cNvPr>
@@ -3983,19 +4216,128 @@
             <p:ph idx="1"/>
           </p:nvPr>
         </p:nvSpPr>
-        <p:spPr/>
-        <p:txBody>
-          <a:bodyPr/>
-          <a:lstStyle/>
-          <a:p>
-            <a:endParaRPr lang="en-US"/>
-          </a:p>
-        </p:txBody>
-      </p:sp>
+        <p:spPr>
+          <a:xfrm>
+            <a:off x="233362" y="2015734"/>
+            <a:ext cx="6946371" cy="4125422"/>
+          </a:xfrm>
+        </p:spPr>
+        <p:txBody>
+          <a:bodyPr>
+            <a:normAutofit lnSpcReduction="10000"/>
+          </a:bodyPr>
+          <a:lstStyle/>
+          <a:p>
+            <a:r>
+              <a:rPr lang="en-US" dirty="0"/>
+              <a:t>Probabilities, especially when there’s more than one involved, are not always intuitive.</a:t>
+            </a:r>
+          </a:p>
+          <a:p>
+            <a:r>
+              <a:rPr lang="en-US" dirty="0"/>
+              <a:t>E.g. Jackpot odds for 6/49 lottery are roughly 1 in 14 million.</a:t>
+            </a:r>
+          </a:p>
+          <a:p>
+            <a:r>
+              <a:rPr lang="en-US" dirty="0"/>
+              <a:t>If your work buys 10 tickets every week, for 30 years. </a:t>
+            </a:r>
+          </a:p>
+          <a:p>
+            <a:pPr lvl="1"/>
+            <a:r>
+              <a:rPr lang="en-US" dirty="0"/>
+              <a:t>10*52*30 = 15,600 chances to win. </a:t>
+            </a:r>
+          </a:p>
+          <a:p>
+            <a:pPr lvl="1"/>
+            <a:r>
+              <a:rPr lang="en-US" dirty="0"/>
+              <a:t>= .1%</a:t>
+            </a:r>
+          </a:p>
+          <a:p>
+            <a:pPr lvl="1"/>
+            <a:r>
+              <a:rPr lang="en-US" dirty="0"/>
+              <a:t>Expected value:</a:t>
+            </a:r>
+          </a:p>
+          <a:p>
+            <a:pPr lvl="2"/>
+            <a:r>
+              <a:rPr lang="en-US" dirty="0"/>
+              <a:t>15,600*$5 = $78,000</a:t>
+            </a:r>
+          </a:p>
+          <a:p>
+            <a:pPr lvl="2"/>
+            <a:r>
+              <a:rPr lang="en-US" dirty="0"/>
+              <a:t>$10 million avg jackpot – $10,000 / people in pool</a:t>
+            </a:r>
+          </a:p>
+          <a:p>
+            <a:r>
+              <a:rPr lang="en-US" dirty="0"/>
+              <a:t>Even so, some people in my old job won ~$3.5m each. </a:t>
+            </a:r>
+          </a:p>
+        </p:txBody>
+      </p:sp>
+      <p:pic>
+        <p:nvPicPr>
+          <p:cNvPr id="2050" name="Picture 2" descr="Squid Game - choosing and push a button [1920x2880]: MemeTemplatesOfficial">
+            <a:extLst>
+              <a:ext uri="{FF2B5EF4-FFF2-40B4-BE49-F238E27FC236}">
+                <a16:creationId xmlns:a16="http://schemas.microsoft.com/office/drawing/2014/main" id="{215B05DE-9FC6-FE46-8A78-F7C6A038FCE5}"/>
+              </a:ext>
+            </a:extLst>
+          </p:cNvPr>
+          <p:cNvPicPr>
+            <a:picLocks noChangeAspect="1" noChangeArrowheads="1"/>
+          </p:cNvPicPr>
+          <p:nvPr/>
+        </p:nvPicPr>
+        <p:blipFill>
+          <a:blip r:embed="rId2">
+            <a:extLst>
+              <a:ext uri="{28A0092B-C50C-407E-A947-70E740481C1C}">
+                <a14:useLocalDpi xmlns:a14="http://schemas.microsoft.com/office/drawing/2010/main" val="0"/>
+              </a:ext>
+            </a:extLst>
+          </a:blip>
+          <a:stretch>
+            <a:fillRect/>
+          </a:stretch>
+        </p:blipFill>
+        <p:spPr bwMode="auto">
+          <a:xfrm>
+            <a:off x="7422989" y="-17694"/>
+            <a:ext cx="4535649" cy="6794980"/>
+          </a:xfrm>
+          <a:prstGeom prst="rect">
+            <a:avLst/>
+          </a:prstGeom>
+          <a:noFill/>
+          <a:extLst>
+            <a:ext uri="{909E8E84-426E-40DD-AFC4-6F175D3DCCD1}">
+              <a14:hiddenFill xmlns:a14="http://schemas.microsoft.com/office/drawing/2010/main">
+                <a:solidFill>
+                  <a:srgbClr val="FFFFFF"/>
+                </a:solidFill>
+              </a14:hiddenFill>
+            </a:ext>
+          </a:extLst>
+        </p:spPr>
+      </p:pic>
     </p:spTree>
     <p:extLst>
       <p:ext uri="{BB962C8B-B14F-4D97-AF65-F5344CB8AC3E}">
-        <p14:creationId xmlns:p14="http://schemas.microsoft.com/office/powerpoint/2010/main" val="3956611292"/>
+        <p14:creationId xmlns:p14="http://schemas.microsoft.com/office/powerpoint/2010/main" val="4095244745"/>
       </p:ext>
     </p:extLst>
   </p:cSld>
@@ -4027,7 +4369,7 @@
           <p:cNvPr id="2" name="Title 1">
             <a:extLst>
               <a:ext uri="{FF2B5EF4-FFF2-40B4-BE49-F238E27FC236}">
-                <a16:creationId xmlns:a16="http://schemas.microsoft.com/office/drawing/2014/main" id="{52FA847A-1163-5E49-A407-9CEA36D1942E}"/>
+                <a16:creationId xmlns:a16="http://schemas.microsoft.com/office/drawing/2014/main" id="{3D20239F-9A82-DF45-AA6F-25B28BD41AA6}"/>
               </a:ext>
             </a:extLst>
           </p:cNvPr>
@@ -4045,7 +4387,7 @@
           <a:p>
             <a:r>
               <a:rPr lang="en-US" dirty="0"/>
-              <a:t>Bayes</a:t>
+              <a:t>Conditional Probability</a:t>
             </a:r>
           </a:p>
         </p:txBody>
@@ -4055,7 +4397,7 @@
           <p:cNvPr id="3" name="Content Placeholder 2">
             <a:extLst>
               <a:ext uri="{FF2B5EF4-FFF2-40B4-BE49-F238E27FC236}">
-                <a16:creationId xmlns:a16="http://schemas.microsoft.com/office/drawing/2014/main" id="{1F53A5AB-70E3-5942-8353-02D7E65E9EB9}"/>
+                <a16:creationId xmlns:a16="http://schemas.microsoft.com/office/drawing/2014/main" id="{DF913740-0231-894D-9658-BE40BCA0C9C4}"/>
               </a:ext>
             </a:extLst>
           </p:cNvPr>
@@ -4073,19 +4415,48 @@
           <a:p>
             <a:r>
               <a:rPr lang="en-US" dirty="0"/>
-              <a:t>Bayes theorem expands on the idea of conditional probability. </a:t>
-            </a:r>
-          </a:p>
-          <a:p>
-            <a:r>
-              <a:rPr lang="en-US" dirty="0"/>
-              <a:t>We can derive it pretty easily, by looking at examples. </a:t>
-            </a:r>
-          </a:p>
-          <a:p>
-            <a:r>
-              <a:rPr lang="en-US" dirty="0"/>
-              <a:t>It is the basis of Bayesian statistics, which we will touch on a little, but not do in great depth. </a:t>
+              <a:t>P(A | B) = probability that A is true, given that B is true.</a:t>
+            </a:r>
+          </a:p>
+          <a:p>
+            <a:r>
+              <a:rPr lang="en-US" dirty="0"/>
+              <a:t>Conditional probability is allows us to say “how likely is X if something happens?”</a:t>
+            </a:r>
+          </a:p>
+          <a:p>
+            <a:pPr lvl="1"/>
+            <a:r>
+              <a:rPr lang="en-US" dirty="0"/>
+              <a:t>E.g. If we are over 7’0” how </a:t>
+            </a:r>
+            <a:r>
+              <a:rPr lang="en-US" dirty="0" err="1"/>
+              <a:t>likey</a:t>
+            </a:r>
+            <a:r>
+              <a:rPr lang="en-US" dirty="0"/>
+              <a:t> are we to make the NBA?</a:t>
+            </a:r>
+          </a:p>
+          <a:p>
+            <a:pPr lvl="1"/>
+            <a:r>
+              <a:rPr lang="en-US" dirty="0"/>
+              <a:t>In the 90s someone calculated that at about 14%</a:t>
+            </a:r>
+          </a:p>
+          <a:p>
+            <a:r>
+              <a:rPr lang="en-US" dirty="0"/>
+              <a:t>Some quick covid tests have reported about a 20% false negative rate. </a:t>
+            </a:r>
+          </a:p>
+          <a:p>
+            <a:pPr lvl="1"/>
+            <a:r>
+              <a:rPr lang="en-US" dirty="0"/>
+              <a:t>P(Test Positive | Have Covid) = 80%</a:t>
             </a:r>
           </a:p>
         </p:txBody>
@@ -4093,7 +4464,856 @@
     </p:spTree>
     <p:extLst>
       <p:ext uri="{BB962C8B-B14F-4D97-AF65-F5344CB8AC3E}">
-        <p14:creationId xmlns:p14="http://schemas.microsoft.com/office/powerpoint/2010/main" val="1442097028"/>
+        <p14:creationId xmlns:p14="http://schemas.microsoft.com/office/powerpoint/2010/main" val="702050722"/>
+      </p:ext>
+    </p:extLst>
+  </p:cSld>
+  <p:clrMapOvr>
+    <a:masterClrMapping/>
+  </p:clrMapOvr>
+</p:sld>
+</file>
+
+<file path=ppt/slides/slide14.xml><?xml version="1.0" encoding="utf-8"?>
+<p:sld xmlns:a="http://schemas.openxmlformats.org/drawingml/2006/main" xmlns:r="http://schemas.openxmlformats.org/officeDocument/2006/relationships" xmlns:p="http://schemas.openxmlformats.org/presentationml/2006/main">
+  <p:cSld>
+    <p:spTree>
+      <p:nvGrpSpPr>
+        <p:cNvPr id="1" name=""/>
+        <p:cNvGrpSpPr/>
+        <p:nvPr/>
+      </p:nvGrpSpPr>
+      <p:grpSpPr>
+        <a:xfrm>
+          <a:off x="0" y="0"/>
+          <a:ext cx="0" cy="0"/>
+          <a:chOff x="0" y="0"/>
+          <a:chExt cx="0" cy="0"/>
+        </a:xfrm>
+      </p:grpSpPr>
+      <p:sp>
+        <p:nvSpPr>
+          <p:cNvPr id="2" name="Title 1">
+            <a:extLst>
+              <a:ext uri="{FF2B5EF4-FFF2-40B4-BE49-F238E27FC236}">
+                <a16:creationId xmlns:a16="http://schemas.microsoft.com/office/drawing/2014/main" id="{5F4C1D0B-BFC8-C12F-F807-53E20790C6BA}"/>
+              </a:ext>
+            </a:extLst>
+          </p:cNvPr>
+          <p:cNvSpPr>
+            <a:spLocks noGrp="1"/>
+          </p:cNvSpPr>
+          <p:nvPr>
+            <p:ph type="title"/>
+          </p:nvPr>
+        </p:nvSpPr>
+        <p:spPr/>
+        <p:txBody>
+          <a:bodyPr/>
+          <a:lstStyle/>
+          <a:p>
+            <a:r>
+              <a:rPr lang="en-US" dirty="0"/>
+              <a:t>Probability at work</a:t>
+            </a:r>
+          </a:p>
+        </p:txBody>
+      </p:sp>
+      <p:sp>
+        <p:nvSpPr>
+          <p:cNvPr id="3" name="Content Placeholder 2">
+            <a:extLst>
+              <a:ext uri="{FF2B5EF4-FFF2-40B4-BE49-F238E27FC236}">
+                <a16:creationId xmlns:a16="http://schemas.microsoft.com/office/drawing/2014/main" id="{5D34C7E8-23F5-DE2A-79B8-909246B2FB98}"/>
+              </a:ext>
+            </a:extLst>
+          </p:cNvPr>
+          <p:cNvSpPr>
+            <a:spLocks noGrp="1"/>
+          </p:cNvSpPr>
+          <p:nvPr>
+            <p:ph idx="1"/>
+          </p:nvPr>
+        </p:nvSpPr>
+        <p:spPr/>
+        <p:txBody>
+          <a:bodyPr/>
+          <a:lstStyle/>
+          <a:p>
+            <a:endParaRPr lang="en-US"/>
+          </a:p>
+        </p:txBody>
+      </p:sp>
+    </p:spTree>
+    <p:extLst>
+      <p:ext uri="{BB962C8B-B14F-4D97-AF65-F5344CB8AC3E}">
+        <p14:creationId xmlns:p14="http://schemas.microsoft.com/office/powerpoint/2010/main" val="1421394941"/>
+      </p:ext>
+    </p:extLst>
+  </p:cSld>
+  <p:clrMapOvr>
+    <a:masterClrMapping/>
+  </p:clrMapOvr>
+</p:sld>
+</file>
+
+<file path=ppt/slides/slide15.xml><?xml version="1.0" encoding="utf-8"?>
+<p:sld xmlns:a="http://schemas.openxmlformats.org/drawingml/2006/main" xmlns:r="http://schemas.openxmlformats.org/officeDocument/2006/relationships" xmlns:p="http://schemas.openxmlformats.org/presentationml/2006/main">
+  <p:cSld>
+    <p:spTree>
+      <p:nvGrpSpPr>
+        <p:cNvPr id="1" name=""/>
+        <p:cNvGrpSpPr/>
+        <p:nvPr/>
+      </p:nvGrpSpPr>
+      <p:grpSpPr>
+        <a:xfrm>
+          <a:off x="0" y="0"/>
+          <a:ext cx="0" cy="0"/>
+          <a:chOff x="0" y="0"/>
+          <a:chExt cx="0" cy="0"/>
+        </a:xfrm>
+      </p:grpSpPr>
+      <p:sp>
+        <p:nvSpPr>
+          <p:cNvPr id="2" name="Title 1">
+            <a:extLst>
+              <a:ext uri="{FF2B5EF4-FFF2-40B4-BE49-F238E27FC236}">
+                <a16:creationId xmlns:a16="http://schemas.microsoft.com/office/drawing/2014/main" id="{22FBDAFD-0666-669A-7138-2CCA97ACDB76}"/>
+              </a:ext>
+            </a:extLst>
+          </p:cNvPr>
+          <p:cNvSpPr>
+            <a:spLocks noGrp="1"/>
+          </p:cNvSpPr>
+          <p:nvPr>
+            <p:ph type="title"/>
+          </p:nvPr>
+        </p:nvSpPr>
+        <p:spPr/>
+        <p:txBody>
+          <a:bodyPr/>
+          <a:lstStyle/>
+          <a:p>
+            <a:r>
+              <a:rPr lang="en-US" dirty="0"/>
+              <a:t>Distribution Comparison</a:t>
+            </a:r>
+          </a:p>
+        </p:txBody>
+      </p:sp>
+      <p:sp>
+        <p:nvSpPr>
+          <p:cNvPr id="3" name="Content Placeholder 2">
+            <a:extLst>
+              <a:ext uri="{FF2B5EF4-FFF2-40B4-BE49-F238E27FC236}">
+                <a16:creationId xmlns:a16="http://schemas.microsoft.com/office/drawing/2014/main" id="{4F2C3283-F2EB-0A1F-9B93-8BC3D76D0E8C}"/>
+              </a:ext>
+            </a:extLst>
+          </p:cNvPr>
+          <p:cNvSpPr>
+            <a:spLocks noGrp="1"/>
+          </p:cNvSpPr>
+          <p:nvPr>
+            <p:ph idx="1"/>
+          </p:nvPr>
+        </p:nvSpPr>
+        <p:spPr>
+          <a:xfrm>
+            <a:off x="6427129" y="2015732"/>
+            <a:ext cx="5764871" cy="4037749"/>
+          </a:xfrm>
+        </p:spPr>
+        <p:txBody>
+          <a:bodyPr/>
+          <a:lstStyle/>
+          <a:p>
+            <a:r>
+              <a:rPr lang="en-US" dirty="0"/>
+              <a:t>Comparing distributions of data for a difference involves probability. </a:t>
+            </a:r>
+          </a:p>
+          <a:p>
+            <a:pPr lvl="1"/>
+            <a:r>
+              <a:rPr lang="en-US" dirty="0"/>
+              <a:t>We can’t just calculate one value like mean and compare. </a:t>
+            </a:r>
+          </a:p>
+          <a:p>
+            <a:pPr lvl="1"/>
+            <a:r>
+              <a:rPr lang="en-US" dirty="0"/>
+              <a:t>We need some concept of ‘different enough’ to compare all items in the set. </a:t>
+            </a:r>
+          </a:p>
+          <a:p>
+            <a:pPr lvl="1"/>
+            <a:r>
+              <a:rPr lang="en-US" dirty="0"/>
+              <a:t>The overall shape of the distribution matters, not just stats like mean. </a:t>
+            </a:r>
+          </a:p>
+          <a:p>
+            <a:r>
+              <a:rPr lang="en-US" dirty="0"/>
+              <a:t>Therefore, we don’t really have an answer like ‘regular’ equality/inequality. </a:t>
+            </a:r>
+          </a:p>
+          <a:p>
+            <a:endParaRPr lang="en-US" dirty="0"/>
+          </a:p>
+        </p:txBody>
+      </p:sp>
+      <p:pic>
+        <p:nvPicPr>
+          <p:cNvPr id="8194" name="Picture 2" descr="Distributions of treatment responses for placebo and an FDA approved... |  Download Scientific Diagram">
+            <a:extLst>
+              <a:ext uri="{FF2B5EF4-FFF2-40B4-BE49-F238E27FC236}">
+                <a16:creationId xmlns:a16="http://schemas.microsoft.com/office/drawing/2014/main" id="{63AF78F2-D6F1-68EC-7033-69F2B989F4D8}"/>
+              </a:ext>
+            </a:extLst>
+          </p:cNvPr>
+          <p:cNvPicPr>
+            <a:picLocks noChangeAspect="1" noChangeArrowheads="1"/>
+          </p:cNvPicPr>
+          <p:nvPr/>
+        </p:nvPicPr>
+        <p:blipFill>
+          <a:blip r:embed="rId2">
+            <a:extLst>
+              <a:ext uri="{28A0092B-C50C-407E-A947-70E740481C1C}">
+                <a14:useLocalDpi xmlns:a14="http://schemas.microsoft.com/office/drawing/2010/main" val="0"/>
+              </a:ext>
+            </a:extLst>
+          </a:blip>
+          <a:srcRect/>
+          <a:stretch>
+            <a:fillRect/>
+          </a:stretch>
+        </p:blipFill>
+        <p:spPr bwMode="auto">
+          <a:xfrm>
+            <a:off x="0" y="1853754"/>
+            <a:ext cx="6427129" cy="4037749"/>
+          </a:xfrm>
+          <a:prstGeom prst="rect">
+            <a:avLst/>
+          </a:prstGeom>
+          <a:noFill/>
+          <a:extLst>
+            <a:ext uri="{909E8E84-426E-40DD-AFC4-6F175D3DCCD1}">
+              <a14:hiddenFill xmlns:a14="http://schemas.microsoft.com/office/drawing/2010/main">
+                <a:solidFill>
+                  <a:srgbClr val="FFFFFF"/>
+                </a:solidFill>
+              </a14:hiddenFill>
+            </a:ext>
+          </a:extLst>
+        </p:spPr>
+      </p:pic>
+    </p:spTree>
+    <p:extLst>
+      <p:ext uri="{BB962C8B-B14F-4D97-AF65-F5344CB8AC3E}">
+        <p14:creationId xmlns:p14="http://schemas.microsoft.com/office/powerpoint/2010/main" val="1704552580"/>
+      </p:ext>
+    </p:extLst>
+  </p:cSld>
+  <p:clrMapOvr>
+    <a:masterClrMapping/>
+  </p:clrMapOvr>
+</p:sld>
+</file>
+
+<file path=ppt/slides/slide16.xml><?xml version="1.0" encoding="utf-8"?>
+<p:sld xmlns:a="http://schemas.openxmlformats.org/drawingml/2006/main" xmlns:r="http://schemas.openxmlformats.org/officeDocument/2006/relationships" xmlns:p="http://schemas.openxmlformats.org/presentationml/2006/main">
+  <p:cSld>
+    <p:spTree>
+      <p:nvGrpSpPr>
+        <p:cNvPr id="1" name=""/>
+        <p:cNvGrpSpPr/>
+        <p:nvPr/>
+      </p:nvGrpSpPr>
+      <p:grpSpPr>
+        <a:xfrm>
+          <a:off x="0" y="0"/>
+          <a:ext cx="0" cy="0"/>
+          <a:chOff x="0" y="0"/>
+          <a:chExt cx="0" cy="0"/>
+        </a:xfrm>
+      </p:grpSpPr>
+      <p:sp>
+        <p:nvSpPr>
+          <p:cNvPr id="2" name="Title 1">
+            <a:extLst>
+              <a:ext uri="{FF2B5EF4-FFF2-40B4-BE49-F238E27FC236}">
+                <a16:creationId xmlns:a16="http://schemas.microsoft.com/office/drawing/2014/main" id="{5517B2D7-A503-B515-44A2-AD8F388A9F74}"/>
+              </a:ext>
+            </a:extLst>
+          </p:cNvPr>
+          <p:cNvSpPr>
+            <a:spLocks noGrp="1"/>
+          </p:cNvSpPr>
+          <p:nvPr>
+            <p:ph type="title"/>
+          </p:nvPr>
+        </p:nvSpPr>
+        <p:spPr/>
+        <p:txBody>
+          <a:bodyPr/>
+          <a:lstStyle/>
+          <a:p>
+            <a:r>
+              <a:rPr lang="en-US" dirty="0"/>
+              <a:t>Odds and Effect Sizes</a:t>
+            </a:r>
+          </a:p>
+        </p:txBody>
+      </p:sp>
+      <p:sp>
+        <p:nvSpPr>
+          <p:cNvPr id="3" name="Content Placeholder 2">
+            <a:extLst>
+              <a:ext uri="{FF2B5EF4-FFF2-40B4-BE49-F238E27FC236}">
+                <a16:creationId xmlns:a16="http://schemas.microsoft.com/office/drawing/2014/main" id="{1CC57BBE-5EB0-A7A4-E217-B236AD739519}"/>
+              </a:ext>
+            </a:extLst>
+          </p:cNvPr>
+          <p:cNvSpPr>
+            <a:spLocks noGrp="1"/>
+          </p:cNvSpPr>
+          <p:nvPr>
+            <p:ph idx="1"/>
+          </p:nvPr>
+        </p:nvSpPr>
+        <p:spPr>
+          <a:xfrm>
+            <a:off x="1451579" y="1853754"/>
+            <a:ext cx="9603275" cy="4199727"/>
+          </a:xfrm>
+        </p:spPr>
+        <p:txBody>
+          <a:bodyPr/>
+          <a:lstStyle/>
+          <a:p>
+            <a:r>
+              <a:rPr lang="en-US" dirty="0"/>
+              <a:t>We’ve seen one way to compare distributions – effect sizes. </a:t>
+            </a:r>
+          </a:p>
+          <a:p>
+            <a:pPr lvl="1"/>
+            <a:r>
+              <a:rPr lang="en-US" dirty="0"/>
+              <a:t>The effect size measures, in context of the variance, how different two distributions are. </a:t>
+            </a:r>
+          </a:p>
+          <a:p>
+            <a:r>
+              <a:rPr lang="en-US" dirty="0"/>
+              <a:t>We can also think of this in terms of probability. </a:t>
+            </a:r>
+          </a:p>
+          <a:p>
+            <a:pPr lvl="1"/>
+            <a:r>
+              <a:rPr lang="en-US" dirty="0"/>
+              <a:t>Are these two samples likely from the same population – hypothesis tests. </a:t>
+            </a:r>
+          </a:p>
+          <a:p>
+            <a:pPr lvl="1"/>
+            <a:r>
+              <a:rPr lang="en-US" dirty="0"/>
+              <a:t>Does this data come from a normal population – normality test. </a:t>
+            </a:r>
+          </a:p>
+          <a:p>
+            <a:r>
+              <a:rPr lang="en-US" dirty="0"/>
+              <a:t>More generically – superiority. </a:t>
+            </a:r>
+          </a:p>
+          <a:p>
+            <a:pPr lvl="1"/>
+            <a:r>
+              <a:rPr lang="en-US" dirty="0"/>
+              <a:t>Two distributions that are totally different will not/barely overlap. </a:t>
+            </a:r>
+          </a:p>
+          <a:p>
+            <a:pPr lvl="1"/>
+            <a:r>
+              <a:rPr lang="en-US" dirty="0"/>
+              <a:t>Two distributions that are from the same population will overlap a lot. </a:t>
+            </a:r>
+          </a:p>
+        </p:txBody>
+      </p:sp>
+    </p:spTree>
+    <p:extLst>
+      <p:ext uri="{BB962C8B-B14F-4D97-AF65-F5344CB8AC3E}">
+        <p14:creationId xmlns:p14="http://schemas.microsoft.com/office/powerpoint/2010/main" val="3956611292"/>
+      </p:ext>
+    </p:extLst>
+  </p:cSld>
+  <p:clrMapOvr>
+    <a:masterClrMapping/>
+  </p:clrMapOvr>
+</p:sld>
+</file>
+
+<file path=ppt/slides/slide17.xml><?xml version="1.0" encoding="utf-8"?>
+<p:sld xmlns:a="http://schemas.openxmlformats.org/drawingml/2006/main" xmlns:r="http://schemas.openxmlformats.org/officeDocument/2006/relationships" xmlns:p="http://schemas.openxmlformats.org/presentationml/2006/main">
+  <p:cSld>
+    <p:spTree>
+      <p:nvGrpSpPr>
+        <p:cNvPr id="1" name=""/>
+        <p:cNvGrpSpPr/>
+        <p:nvPr/>
+      </p:nvGrpSpPr>
+      <p:grpSpPr>
+        <a:xfrm>
+          <a:off x="0" y="0"/>
+          <a:ext cx="0" cy="0"/>
+          <a:chOff x="0" y="0"/>
+          <a:chExt cx="0" cy="0"/>
+        </a:xfrm>
+      </p:grpSpPr>
+      <p:sp>
+        <p:nvSpPr>
+          <p:cNvPr id="2" name="Title 1">
+            <a:extLst>
+              <a:ext uri="{FF2B5EF4-FFF2-40B4-BE49-F238E27FC236}">
+                <a16:creationId xmlns:a16="http://schemas.microsoft.com/office/drawing/2014/main" id="{9E0B047E-DBBC-3D04-CD14-D93E739FED37}"/>
+              </a:ext>
+            </a:extLst>
+          </p:cNvPr>
+          <p:cNvSpPr>
+            <a:spLocks noGrp="1"/>
+          </p:cNvSpPr>
+          <p:nvPr>
+            <p:ph type="title"/>
+          </p:nvPr>
+        </p:nvSpPr>
+        <p:spPr/>
+        <p:txBody>
+          <a:bodyPr/>
+          <a:lstStyle/>
+          <a:p>
+            <a:r>
+              <a:rPr lang="en-US" dirty="0"/>
+              <a:t>Thresholds on Overlap</a:t>
+            </a:r>
+          </a:p>
+        </p:txBody>
+      </p:sp>
+      <p:sp>
+        <p:nvSpPr>
+          <p:cNvPr id="3" name="Content Placeholder 2">
+            <a:extLst>
+              <a:ext uri="{FF2B5EF4-FFF2-40B4-BE49-F238E27FC236}">
+                <a16:creationId xmlns:a16="http://schemas.microsoft.com/office/drawing/2014/main" id="{9F43E4B6-F690-C8B3-76EE-CF219A11E89A}"/>
+              </a:ext>
+            </a:extLst>
+          </p:cNvPr>
+          <p:cNvSpPr>
+            <a:spLocks noGrp="1"/>
+          </p:cNvSpPr>
+          <p:nvPr>
+            <p:ph idx="1"/>
+          </p:nvPr>
+        </p:nvSpPr>
+        <p:spPr>
+          <a:xfrm>
+            <a:off x="0" y="1853754"/>
+            <a:ext cx="6438396" cy="4199727"/>
+          </a:xfrm>
+        </p:spPr>
+        <p:txBody>
+          <a:bodyPr>
+            <a:normAutofit fontScale="92500" lnSpcReduction="20000"/>
+          </a:bodyPr>
+          <a:lstStyle/>
+          <a:p>
+            <a:r>
+              <a:rPr lang="en-US" dirty="0"/>
+              <a:t>Can also compare distributions by looking at their overlap. </a:t>
+            </a:r>
+          </a:p>
+          <a:p>
+            <a:r>
+              <a:rPr lang="en-US" dirty="0"/>
+              <a:t>We can extend this thinking to the idea of a threshold. </a:t>
+            </a:r>
+          </a:p>
+          <a:p>
+            <a:pPr lvl="1"/>
+            <a:r>
+              <a:rPr lang="en-US" dirty="0"/>
+              <a:t>The threshold is a cutoff point that we can use to separate classes (distributions). </a:t>
+            </a:r>
+          </a:p>
+          <a:p>
+            <a:r>
+              <a:rPr lang="en-US" dirty="0"/>
+              <a:t>There are a couple of threshold calculations:</a:t>
+            </a:r>
+          </a:p>
+          <a:p>
+            <a:pPr lvl="1"/>
+            <a:r>
+              <a:rPr lang="en-US" dirty="0"/>
+              <a:t>Simple – average of the means. </a:t>
+            </a:r>
+          </a:p>
+          <a:p>
+            <a:pPr lvl="1"/>
+            <a:r>
+              <a:rPr lang="en-US" dirty="0"/>
+              <a:t>Complex – calculation with means and standard deviations. </a:t>
+            </a:r>
+          </a:p>
+          <a:p>
+            <a:r>
+              <a:rPr lang="en-US" dirty="0"/>
+              <a:t>Can act as a cutoff – over is one distribution, under is the other. </a:t>
+            </a:r>
+          </a:p>
+          <a:p>
+            <a:pPr lvl="1"/>
+            <a:r>
+              <a:rPr lang="en-US" dirty="0"/>
+              <a:t>The purity of the two groups is the quality of the threshold. </a:t>
+            </a:r>
+          </a:p>
+          <a:p>
+            <a:pPr lvl="1"/>
+            <a:r>
+              <a:rPr lang="en-US" dirty="0"/>
+              <a:t>A perfect cutoff means that we can use one value to separate the groups with no errors.</a:t>
+            </a:r>
+          </a:p>
+        </p:txBody>
+      </p:sp>
+      <p:pic>
+        <p:nvPicPr>
+          <p:cNvPr id="5124" name="Picture 4" descr="Risk distributions and area under the ROC curve (AUC) (adapted from... |  Download Scientific Diagram">
+            <a:extLst>
+              <a:ext uri="{FF2B5EF4-FFF2-40B4-BE49-F238E27FC236}">
+                <a16:creationId xmlns:a16="http://schemas.microsoft.com/office/drawing/2014/main" id="{09D8CC62-F962-9F2E-5D29-241523E7B1A3}"/>
+              </a:ext>
+            </a:extLst>
+          </p:cNvPr>
+          <p:cNvPicPr>
+            <a:picLocks noChangeAspect="1" noChangeArrowheads="1"/>
+          </p:cNvPicPr>
+          <p:nvPr/>
+        </p:nvPicPr>
+        <p:blipFill rotWithShape="1">
+          <a:blip r:embed="rId2">
+            <a:extLst>
+              <a:ext uri="{28A0092B-C50C-407E-A947-70E740481C1C}">
+                <a14:useLocalDpi xmlns:a14="http://schemas.microsoft.com/office/drawing/2010/main" val="0"/>
+              </a:ext>
+            </a:extLst>
+          </a:blip>
+          <a:srcRect b="47480"/>
+          <a:stretch>
+            <a:fillRect/>
+          </a:stretch>
+        </p:blipFill>
+        <p:spPr bwMode="auto">
+          <a:xfrm>
+            <a:off x="6438396" y="2610754"/>
+            <a:ext cx="5753604" cy="2072757"/>
+          </a:xfrm>
+          <a:prstGeom prst="rect">
+            <a:avLst/>
+          </a:prstGeom>
+          <a:noFill/>
+          <a:extLst>
+            <a:ext uri="{909E8E84-426E-40DD-AFC4-6F175D3DCCD1}">
+              <a14:hiddenFill xmlns:a14="http://schemas.microsoft.com/office/drawing/2010/main">
+                <a:solidFill>
+                  <a:srgbClr val="FFFFFF"/>
+                </a:solidFill>
+              </a14:hiddenFill>
+            </a:ext>
+          </a:extLst>
+        </p:spPr>
+      </p:pic>
+    </p:spTree>
+    <p:extLst>
+      <p:ext uri="{BB962C8B-B14F-4D97-AF65-F5344CB8AC3E}">
+        <p14:creationId xmlns:p14="http://schemas.microsoft.com/office/powerpoint/2010/main" val="257233449"/>
+      </p:ext>
+    </p:extLst>
+  </p:cSld>
+  <p:clrMapOvr>
+    <a:masterClrMapping/>
+  </p:clrMapOvr>
+</p:sld>
+</file>
+
+<file path=ppt/slides/slide18.xml><?xml version="1.0" encoding="utf-8"?>
+<p:sld xmlns:a="http://schemas.openxmlformats.org/drawingml/2006/main" xmlns:r="http://schemas.openxmlformats.org/officeDocument/2006/relationships" xmlns:p="http://schemas.openxmlformats.org/presentationml/2006/main">
+  <p:cSld>
+    <p:spTree>
+      <p:nvGrpSpPr>
+        <p:cNvPr id="1" name=""/>
+        <p:cNvGrpSpPr/>
+        <p:nvPr/>
+      </p:nvGrpSpPr>
+      <p:grpSpPr>
+        <a:xfrm>
+          <a:off x="0" y="0"/>
+          <a:ext cx="0" cy="0"/>
+          <a:chOff x="0" y="0"/>
+          <a:chExt cx="0" cy="0"/>
+        </a:xfrm>
+      </p:grpSpPr>
+      <p:sp>
+        <p:nvSpPr>
+          <p:cNvPr id="2" name="Title 1">
+            <a:extLst>
+              <a:ext uri="{FF2B5EF4-FFF2-40B4-BE49-F238E27FC236}">
+                <a16:creationId xmlns:a16="http://schemas.microsoft.com/office/drawing/2014/main" id="{DFD6CBCA-25D9-57B1-30E5-A6B31A24F2A9}"/>
+              </a:ext>
+            </a:extLst>
+          </p:cNvPr>
+          <p:cNvSpPr>
+            <a:spLocks noGrp="1"/>
+          </p:cNvSpPr>
+          <p:nvPr>
+            <p:ph type="title"/>
+          </p:nvPr>
+        </p:nvSpPr>
+        <p:spPr/>
+        <p:txBody>
+          <a:bodyPr/>
+          <a:lstStyle/>
+          <a:p>
+            <a:r>
+              <a:rPr lang="en-US" dirty="0"/>
+              <a:t>Using a Threshold</a:t>
+            </a:r>
+          </a:p>
+        </p:txBody>
+      </p:sp>
+      <p:sp>
+        <p:nvSpPr>
+          <p:cNvPr id="3" name="Content Placeholder 2">
+            <a:extLst>
+              <a:ext uri="{FF2B5EF4-FFF2-40B4-BE49-F238E27FC236}">
+                <a16:creationId xmlns:a16="http://schemas.microsoft.com/office/drawing/2014/main" id="{433BB145-9A75-66C8-C7A0-00784B3BD9DE}"/>
+              </a:ext>
+            </a:extLst>
+          </p:cNvPr>
+          <p:cNvSpPr>
+            <a:spLocks noGrp="1"/>
+          </p:cNvSpPr>
+          <p:nvPr>
+            <p:ph idx="1"/>
+          </p:nvPr>
+        </p:nvSpPr>
+        <p:spPr/>
+        <p:txBody>
+          <a:bodyPr/>
+          <a:lstStyle/>
+          <a:p>
+            <a:endParaRPr lang="en-US"/>
+          </a:p>
+        </p:txBody>
+      </p:sp>
+    </p:spTree>
+    <p:extLst>
+      <p:ext uri="{BB962C8B-B14F-4D97-AF65-F5344CB8AC3E}">
+        <p14:creationId xmlns:p14="http://schemas.microsoft.com/office/powerpoint/2010/main" val="2429307724"/>
+      </p:ext>
+    </p:extLst>
+  </p:cSld>
+  <p:clrMapOvr>
+    <a:masterClrMapping/>
+  </p:clrMapOvr>
+</p:sld>
+</file>
+
+<file path=ppt/slides/slide19.xml><?xml version="1.0" encoding="utf-8"?>
+<p:sld xmlns:a="http://schemas.openxmlformats.org/drawingml/2006/main" xmlns:r="http://schemas.openxmlformats.org/officeDocument/2006/relationships" xmlns:p="http://schemas.openxmlformats.org/presentationml/2006/main">
+  <p:cSld>
+    <p:spTree>
+      <p:nvGrpSpPr>
+        <p:cNvPr id="1" name=""/>
+        <p:cNvGrpSpPr/>
+        <p:nvPr/>
+      </p:nvGrpSpPr>
+      <p:grpSpPr>
+        <a:xfrm>
+          <a:off x="0" y="0"/>
+          <a:ext cx="0" cy="0"/>
+          <a:chOff x="0" y="0"/>
+          <a:chExt cx="0" cy="0"/>
+        </a:xfrm>
+      </p:grpSpPr>
+      <p:sp>
+        <p:nvSpPr>
+          <p:cNvPr id="2" name="Title 1">
+            <a:extLst>
+              <a:ext uri="{FF2B5EF4-FFF2-40B4-BE49-F238E27FC236}">
+                <a16:creationId xmlns:a16="http://schemas.microsoft.com/office/drawing/2014/main" id="{D6145CC1-C337-5213-81D8-E4E36A6B8DA7}"/>
+              </a:ext>
+            </a:extLst>
+          </p:cNvPr>
+          <p:cNvSpPr>
+            <a:spLocks noGrp="1"/>
+          </p:cNvSpPr>
+          <p:nvPr>
+            <p:ph type="title"/>
+          </p:nvPr>
+        </p:nvSpPr>
+        <p:spPr>
+          <a:xfrm>
+            <a:off x="1451579" y="804519"/>
+            <a:ext cx="3272821" cy="1049235"/>
+          </a:xfrm>
+        </p:spPr>
+        <p:txBody>
+          <a:bodyPr/>
+          <a:lstStyle/>
+          <a:p>
+            <a:r>
+              <a:rPr lang="en-US" dirty="0"/>
+              <a:t>Overlap</a:t>
+            </a:r>
+          </a:p>
+        </p:txBody>
+      </p:sp>
+      <p:sp>
+        <p:nvSpPr>
+          <p:cNvPr id="3" name="Content Placeholder 2">
+            <a:extLst>
+              <a:ext uri="{FF2B5EF4-FFF2-40B4-BE49-F238E27FC236}">
+                <a16:creationId xmlns:a16="http://schemas.microsoft.com/office/drawing/2014/main" id="{460E7EAB-A663-F42F-BAED-DD52E6A94762}"/>
+              </a:ext>
+            </a:extLst>
+          </p:cNvPr>
+          <p:cNvSpPr>
+            <a:spLocks noGrp="1"/>
+          </p:cNvSpPr>
+          <p:nvPr>
+            <p:ph idx="1"/>
+          </p:nvPr>
+        </p:nvSpPr>
+        <p:spPr>
+          <a:xfrm>
+            <a:off x="1" y="1853754"/>
+            <a:ext cx="5273944" cy="4199727"/>
+          </a:xfrm>
+        </p:spPr>
+        <p:txBody>
+          <a:bodyPr/>
+          <a:lstStyle/>
+          <a:p>
+            <a:r>
+              <a:rPr lang="en-US" dirty="0"/>
+              <a:t>If the two </a:t>
+            </a:r>
+            <a:r>
+              <a:rPr lang="en-US" dirty="0" err="1"/>
+              <a:t>dists</a:t>
+            </a:r>
+            <a:r>
+              <a:rPr lang="en-US" dirty="0"/>
+              <a:t> don’t overlap much at all, we can clearly classify into group A or B. </a:t>
+            </a:r>
+          </a:p>
+          <a:p>
+            <a:pPr lvl="1"/>
+            <a:r>
+              <a:rPr lang="en-US" dirty="0"/>
+              <a:t>The overlap area is where we might make mistakes. </a:t>
+            </a:r>
+          </a:p>
+          <a:p>
+            <a:pPr lvl="1"/>
+            <a:r>
+              <a:rPr lang="en-US" dirty="0"/>
+              <a:t>On either side of the overlap, we know exactly what class a value belongs to. </a:t>
+            </a:r>
+          </a:p>
+          <a:p>
+            <a:r>
+              <a:rPr lang="en-US" dirty="0"/>
+              <a:t>E.g. a value of .5 could be in either group. </a:t>
+            </a:r>
+          </a:p>
+          <a:p>
+            <a:pPr lvl="1"/>
+            <a:r>
+              <a:rPr lang="en-US" dirty="0"/>
+              <a:t>A value of 8 can only be blue. </a:t>
+            </a:r>
+          </a:p>
+          <a:p>
+            <a:r>
+              <a:rPr lang="en-US" dirty="0"/>
+              <a:t>More different distributions have less overlap. </a:t>
+            </a:r>
+          </a:p>
+        </p:txBody>
+      </p:sp>
+      <p:pic>
+        <p:nvPicPr>
+          <p:cNvPr id="4098" name="Picture 2" descr="machine learning - How to find the threshold between two histograms at  fixed false positive rate? - Cross Validated">
+            <a:extLst>
+              <a:ext uri="{FF2B5EF4-FFF2-40B4-BE49-F238E27FC236}">
+                <a16:creationId xmlns:a16="http://schemas.microsoft.com/office/drawing/2014/main" id="{EA2D23F6-BED9-55DB-56BB-A84CFD6F14C3}"/>
+              </a:ext>
+            </a:extLst>
+          </p:cNvPr>
+          <p:cNvPicPr>
+            <a:picLocks noChangeAspect="1" noChangeArrowheads="1"/>
+          </p:cNvPicPr>
+          <p:nvPr/>
+        </p:nvPicPr>
+        <p:blipFill rotWithShape="1">
+          <a:blip r:embed="rId2">
+            <a:extLst>
+              <a:ext uri="{28A0092B-C50C-407E-A947-70E740481C1C}">
+                <a14:useLocalDpi xmlns:a14="http://schemas.microsoft.com/office/drawing/2010/main" val="0"/>
+              </a:ext>
+            </a:extLst>
+          </a:blip>
+          <a:srcRect t="10224"/>
+          <a:stretch>
+            <a:fillRect/>
+          </a:stretch>
+        </p:blipFill>
+        <p:spPr bwMode="auto">
+          <a:xfrm>
+            <a:off x="5273944" y="1423851"/>
+            <a:ext cx="6918056" cy="5027748"/>
+          </a:xfrm>
+          <a:prstGeom prst="rect">
+            <a:avLst/>
+          </a:prstGeom>
+          <a:noFill/>
+          <a:extLst>
+            <a:ext uri="{909E8E84-426E-40DD-AFC4-6F175D3DCCD1}">
+              <a14:hiddenFill xmlns:a14="http://schemas.microsoft.com/office/drawing/2010/main">
+                <a:solidFill>
+                  <a:srgbClr val="FFFFFF"/>
+                </a:solidFill>
+              </a14:hiddenFill>
+            </a:ext>
+          </a:extLst>
+        </p:spPr>
+      </p:pic>
+    </p:spTree>
+    <p:extLst>
+      <p:ext uri="{BB962C8B-B14F-4D97-AF65-F5344CB8AC3E}">
+        <p14:creationId xmlns:p14="http://schemas.microsoft.com/office/powerpoint/2010/main" val="2168809185"/>
       </p:ext>
     </p:extLst>
   </p:cSld>
@@ -4125,6 +5345,1377 @@
           <p:cNvPr id="2" name="Title 1">
             <a:extLst>
               <a:ext uri="{FF2B5EF4-FFF2-40B4-BE49-F238E27FC236}">
+                <a16:creationId xmlns:a16="http://schemas.microsoft.com/office/drawing/2014/main" id="{463AAA3E-E2C6-BC7C-58BF-F9A3C729437E}"/>
+              </a:ext>
+            </a:extLst>
+          </p:cNvPr>
+          <p:cNvSpPr>
+            <a:spLocks noGrp="1"/>
+          </p:cNvSpPr>
+          <p:nvPr>
+            <p:ph type="title"/>
+          </p:nvPr>
+        </p:nvSpPr>
+        <p:spPr/>
+        <p:txBody>
+          <a:bodyPr/>
+          <a:lstStyle/>
+          <a:p>
+            <a:r>
+              <a:rPr lang="en-US" dirty="0"/>
+              <a:t>More Housekeeping</a:t>
+            </a:r>
+          </a:p>
+        </p:txBody>
+      </p:sp>
+      <p:sp>
+        <p:nvSpPr>
+          <p:cNvPr id="3" name="Content Placeholder 2">
+            <a:extLst>
+              <a:ext uri="{FF2B5EF4-FFF2-40B4-BE49-F238E27FC236}">
+                <a16:creationId xmlns:a16="http://schemas.microsoft.com/office/drawing/2014/main" id="{B1E40DCF-0AD5-6E6E-0A43-1132C635B0F3}"/>
+              </a:ext>
+            </a:extLst>
+          </p:cNvPr>
+          <p:cNvSpPr>
+            <a:spLocks noGrp="1"/>
+          </p:cNvSpPr>
+          <p:nvPr>
+            <p:ph idx="1"/>
+          </p:nvPr>
+        </p:nvSpPr>
+        <p:spPr>
+          <a:xfrm>
+            <a:off x="1451579" y="1853754"/>
+            <a:ext cx="9603275" cy="4199727"/>
+          </a:xfrm>
+        </p:spPr>
+        <p:txBody>
+          <a:bodyPr/>
+          <a:lstStyle/>
+          <a:p>
+            <a:r>
+              <a:rPr lang="en-US" dirty="0"/>
+              <a:t>Some of the ideas here are really important to understand for future. </a:t>
+            </a:r>
+          </a:p>
+          <a:p>
+            <a:pPr lvl="1"/>
+            <a:r>
+              <a:rPr lang="en-US" dirty="0"/>
+              <a:t>Probability, odds, logit, models, estimation…</a:t>
+            </a:r>
+          </a:p>
+          <a:p>
+            <a:pPr lvl="1"/>
+            <a:r>
+              <a:rPr lang="en-US" dirty="0"/>
+              <a:t>The next 3-4ish days will cover the basics, they are somewhat </a:t>
+            </a:r>
+            <a:r>
+              <a:rPr lang="en-US"/>
+              <a:t>all connected. </a:t>
+            </a:r>
+            <a:endParaRPr lang="en-US" dirty="0"/>
+          </a:p>
+          <a:p>
+            <a:r>
+              <a:rPr lang="en-US" dirty="0"/>
+              <a:t>Especially on the simulation stuff, you really need to try to do some unguided. </a:t>
+            </a:r>
+          </a:p>
+          <a:p>
+            <a:pPr lvl="1"/>
+            <a:r>
+              <a:rPr lang="en-US" dirty="0"/>
+              <a:t>We are going to be dealing with many sets of data, and need to stay organized. </a:t>
+            </a:r>
+          </a:p>
+          <a:p>
+            <a:pPr lvl="1"/>
+            <a:r>
+              <a:rPr lang="en-US" dirty="0"/>
+              <a:t>We’ll have some loops and need to tabulate data each run. </a:t>
+            </a:r>
+          </a:p>
+          <a:p>
+            <a:pPr lvl="1"/>
+            <a:r>
+              <a:rPr lang="en-US" dirty="0"/>
+              <a:t>Several things have partially overlapping terms and definitions. </a:t>
+            </a:r>
+          </a:p>
+          <a:p>
+            <a:r>
+              <a:rPr lang="en-US" dirty="0"/>
+              <a:t>Make sure the examples make sense and exercises are doable – ask if issue. </a:t>
+            </a:r>
+          </a:p>
+          <a:p>
+            <a:pPr lvl="1"/>
+            <a:r>
+              <a:rPr lang="en-US" dirty="0"/>
+              <a:t>Exercises in workbooks and book, can also reproduce examples with tweaks. </a:t>
+            </a:r>
+          </a:p>
+          <a:p>
+            <a:pPr lvl="1"/>
+            <a:r>
+              <a:rPr lang="en-US" dirty="0"/>
+              <a:t>Generalizing any distribution also works pretty similarly. </a:t>
+            </a:r>
+          </a:p>
+        </p:txBody>
+      </p:sp>
+    </p:spTree>
+    <p:extLst>
+      <p:ext uri="{BB962C8B-B14F-4D97-AF65-F5344CB8AC3E}">
+        <p14:creationId xmlns:p14="http://schemas.microsoft.com/office/powerpoint/2010/main" val="528870643"/>
+      </p:ext>
+    </p:extLst>
+  </p:cSld>
+  <p:clrMapOvr>
+    <a:masterClrMapping/>
+  </p:clrMapOvr>
+</p:sld>
+</file>
+
+<file path=ppt/slides/slide20.xml><?xml version="1.0" encoding="utf-8"?>
+<p:sld xmlns:a="http://schemas.openxmlformats.org/drawingml/2006/main" xmlns:r="http://schemas.openxmlformats.org/officeDocument/2006/relationships" xmlns:p="http://schemas.openxmlformats.org/presentationml/2006/main">
+  <p:cSld>
+    <p:spTree>
+      <p:nvGrpSpPr>
+        <p:cNvPr id="1" name=""/>
+        <p:cNvGrpSpPr/>
+        <p:nvPr/>
+      </p:nvGrpSpPr>
+      <p:grpSpPr>
+        <a:xfrm>
+          <a:off x="0" y="0"/>
+          <a:ext cx="0" cy="0"/>
+          <a:chOff x="0" y="0"/>
+          <a:chExt cx="0" cy="0"/>
+        </a:xfrm>
+      </p:grpSpPr>
+      <p:sp>
+        <p:nvSpPr>
+          <p:cNvPr id="2" name="Title 1">
+            <a:extLst>
+              <a:ext uri="{FF2B5EF4-FFF2-40B4-BE49-F238E27FC236}">
+                <a16:creationId xmlns:a16="http://schemas.microsoft.com/office/drawing/2014/main" id="{578C9733-3D0E-E3ED-AB04-A5715761AC08}"/>
+              </a:ext>
+            </a:extLst>
+          </p:cNvPr>
+          <p:cNvSpPr>
+            <a:spLocks noGrp="1"/>
+          </p:cNvSpPr>
+          <p:nvPr>
+            <p:ph type="title"/>
+          </p:nvPr>
+        </p:nvSpPr>
+        <p:spPr/>
+        <p:txBody>
+          <a:bodyPr/>
+          <a:lstStyle/>
+          <a:p>
+            <a:r>
+              <a:rPr lang="en-US" dirty="0"/>
+              <a:t>Probability of Superiority</a:t>
+            </a:r>
+          </a:p>
+        </p:txBody>
+      </p:sp>
+      <p:sp>
+        <p:nvSpPr>
+          <p:cNvPr id="3" name="Content Placeholder 2">
+            <a:extLst>
+              <a:ext uri="{FF2B5EF4-FFF2-40B4-BE49-F238E27FC236}">
+                <a16:creationId xmlns:a16="http://schemas.microsoft.com/office/drawing/2014/main" id="{E9061EE7-8686-94A9-824B-A5D5FCE50ACE}"/>
+              </a:ext>
+            </a:extLst>
+          </p:cNvPr>
+          <p:cNvSpPr>
+            <a:spLocks noGrp="1"/>
+          </p:cNvSpPr>
+          <p:nvPr>
+            <p:ph idx="1"/>
+          </p:nvPr>
+        </p:nvSpPr>
+        <p:spPr>
+          <a:xfrm>
+            <a:off x="100361" y="1940312"/>
+            <a:ext cx="5956125" cy="4215161"/>
+          </a:xfrm>
+        </p:spPr>
+        <p:txBody>
+          <a:bodyPr>
+            <a:normAutofit/>
+          </a:bodyPr>
+          <a:lstStyle/>
+          <a:p>
+            <a:r>
+              <a:rPr lang="en-US" dirty="0"/>
+              <a:t>The overlap and threshold ideas can be formed into the Probability of Superiority. </a:t>
+            </a:r>
+          </a:p>
+          <a:p>
+            <a:pPr lvl="1"/>
+            <a:r>
+              <a:rPr lang="en-US" dirty="0"/>
+              <a:t>If we pick a random value from the higher group what is the probability it is larger than a random value from the lower group. </a:t>
+            </a:r>
+          </a:p>
+          <a:p>
+            <a:pPr lvl="1"/>
+            <a:r>
+              <a:rPr lang="en-US" dirty="0"/>
+              <a:t>E.g. does a random treatment person live longer than a random placebo person? </a:t>
+            </a:r>
+          </a:p>
+          <a:p>
+            <a:r>
+              <a:rPr lang="en-US" dirty="0"/>
+              <a:t>This is in line with the overlap is we plot the PDFs. </a:t>
+            </a:r>
+          </a:p>
+          <a:p>
+            <a:r>
+              <a:rPr lang="en-US" dirty="0"/>
+              <a:t>https://</a:t>
+            </a:r>
+            <a:r>
+              <a:rPr lang="en-US" dirty="0" err="1"/>
+              <a:t>rpsychologist.com</a:t>
+            </a:r>
+            <a:r>
+              <a:rPr lang="en-US" dirty="0"/>
+              <a:t>/</a:t>
+            </a:r>
+            <a:r>
+              <a:rPr lang="en-US" dirty="0" err="1"/>
+              <a:t>cohend</a:t>
+            </a:r>
+            <a:r>
+              <a:rPr lang="en-US" dirty="0"/>
+              <a:t>/</a:t>
+            </a:r>
+          </a:p>
+        </p:txBody>
+      </p:sp>
+      <p:pic>
+        <p:nvPicPr>
+          <p:cNvPr id="6146" name="Picture 2" descr="因果推理方法— 全栈DS/DA养成手册">
+            <a:extLst>
+              <a:ext uri="{FF2B5EF4-FFF2-40B4-BE49-F238E27FC236}">
+                <a16:creationId xmlns:a16="http://schemas.microsoft.com/office/drawing/2014/main" id="{4030EC37-F6AA-B971-1402-E7052B7B0992}"/>
+              </a:ext>
+            </a:extLst>
+          </p:cNvPr>
+          <p:cNvPicPr>
+            <a:picLocks noChangeAspect="1" noChangeArrowheads="1"/>
+          </p:cNvPicPr>
+          <p:nvPr/>
+        </p:nvPicPr>
+        <p:blipFill rotWithShape="1">
+          <a:blip r:embed="rId2">
+            <a:extLst>
+              <a:ext uri="{28A0092B-C50C-407E-A947-70E740481C1C}">
+                <a14:useLocalDpi xmlns:a14="http://schemas.microsoft.com/office/drawing/2010/main" val="0"/>
+              </a:ext>
+            </a:extLst>
+          </a:blip>
+          <a:srcRect l="6702" r="5149"/>
+          <a:stretch>
+            <a:fillRect/>
+          </a:stretch>
+        </p:blipFill>
+        <p:spPr bwMode="auto">
+          <a:xfrm>
+            <a:off x="6054201" y="2061802"/>
+            <a:ext cx="6037438" cy="3424598"/>
+          </a:xfrm>
+          <a:prstGeom prst="rect">
+            <a:avLst/>
+          </a:prstGeom>
+          <a:noFill/>
+          <a:extLst>
+            <a:ext uri="{909E8E84-426E-40DD-AFC4-6F175D3DCCD1}">
+              <a14:hiddenFill xmlns:a14="http://schemas.microsoft.com/office/drawing/2010/main">
+                <a:solidFill>
+                  <a:srgbClr val="FFFFFF"/>
+                </a:solidFill>
+              </a14:hiddenFill>
+            </a:ext>
+          </a:extLst>
+        </p:spPr>
+      </p:pic>
+    </p:spTree>
+    <p:extLst>
+      <p:ext uri="{BB962C8B-B14F-4D97-AF65-F5344CB8AC3E}">
+        <p14:creationId xmlns:p14="http://schemas.microsoft.com/office/powerpoint/2010/main" val="1298076308"/>
+      </p:ext>
+    </p:extLst>
+  </p:cSld>
+  <p:clrMapOvr>
+    <a:masterClrMapping/>
+  </p:clrMapOvr>
+</p:sld>
+</file>
+
+<file path=ppt/slides/slide21.xml><?xml version="1.0" encoding="utf-8"?>
+<p:sld xmlns:a="http://schemas.openxmlformats.org/drawingml/2006/main" xmlns:r="http://schemas.openxmlformats.org/officeDocument/2006/relationships" xmlns:p="http://schemas.openxmlformats.org/presentationml/2006/main">
+  <p:cSld>
+    <p:spTree>
+      <p:nvGrpSpPr>
+        <p:cNvPr id="1" name=""/>
+        <p:cNvGrpSpPr/>
+        <p:nvPr/>
+      </p:nvGrpSpPr>
+      <p:grpSpPr>
+        <a:xfrm>
+          <a:off x="0" y="0"/>
+          <a:ext cx="0" cy="0"/>
+          <a:chOff x="0" y="0"/>
+          <a:chExt cx="0" cy="0"/>
+        </a:xfrm>
+      </p:grpSpPr>
+      <p:sp>
+        <p:nvSpPr>
+          <p:cNvPr id="2" name="Title 1">
+            <a:extLst>
+              <a:ext uri="{FF2B5EF4-FFF2-40B4-BE49-F238E27FC236}">
+                <a16:creationId xmlns:a16="http://schemas.microsoft.com/office/drawing/2014/main" id="{46857B74-29CE-E500-AAF6-BAE7098B78A3}"/>
+              </a:ext>
+            </a:extLst>
+          </p:cNvPr>
+          <p:cNvSpPr>
+            <a:spLocks noGrp="1"/>
+          </p:cNvSpPr>
+          <p:nvPr>
+            <p:ph type="title"/>
+          </p:nvPr>
+        </p:nvSpPr>
+        <p:spPr/>
+        <p:txBody>
+          <a:bodyPr/>
+          <a:lstStyle/>
+          <a:p>
+            <a:r>
+              <a:rPr lang="en-US" dirty="0"/>
+              <a:t>Comparison Tools</a:t>
+            </a:r>
+          </a:p>
+        </p:txBody>
+      </p:sp>
+      <p:sp>
+        <p:nvSpPr>
+          <p:cNvPr id="3" name="Content Placeholder 2">
+            <a:extLst>
+              <a:ext uri="{FF2B5EF4-FFF2-40B4-BE49-F238E27FC236}">
+                <a16:creationId xmlns:a16="http://schemas.microsoft.com/office/drawing/2014/main" id="{95D89D88-9AC9-1850-D5BF-65E65362FAAF}"/>
+              </a:ext>
+            </a:extLst>
+          </p:cNvPr>
+          <p:cNvSpPr>
+            <a:spLocks noGrp="1"/>
+          </p:cNvSpPr>
+          <p:nvPr>
+            <p:ph idx="1"/>
+          </p:nvPr>
+        </p:nvSpPr>
+        <p:spPr>
+          <a:xfrm>
+            <a:off x="1451579" y="1951464"/>
+            <a:ext cx="9603275" cy="4102018"/>
+          </a:xfrm>
+        </p:spPr>
+        <p:txBody>
+          <a:bodyPr/>
+          <a:lstStyle/>
+          <a:p>
+            <a:r>
+              <a:rPr lang="en-US" dirty="0"/>
+              <a:t>All of these things allow us to do a comparison of distributions. </a:t>
+            </a:r>
+          </a:p>
+          <a:p>
+            <a:pPr lvl="1"/>
+            <a:r>
+              <a:rPr lang="en-US" dirty="0"/>
+              <a:t>Effect size, overlap, superiority. </a:t>
+            </a:r>
+          </a:p>
+          <a:p>
+            <a:pPr lvl="1"/>
+            <a:r>
+              <a:rPr lang="en-US" dirty="0"/>
+              <a:t>None give a definitive &lt;&gt;= result. </a:t>
+            </a:r>
+          </a:p>
+          <a:p>
+            <a:r>
+              <a:rPr lang="en-US" dirty="0"/>
+              <a:t>After we do estimation we’ll add another, hypothesis tests. </a:t>
+            </a:r>
+          </a:p>
+          <a:p>
+            <a:r>
+              <a:rPr lang="en-US" dirty="0"/>
+              <a:t>Each leaves us with some uncertainty. </a:t>
+            </a:r>
+          </a:p>
+          <a:p>
+            <a:pPr lvl="1"/>
+            <a:r>
+              <a:rPr lang="en-US" dirty="0"/>
+              <a:t>Each thing is evidence of difference/similarity. </a:t>
+            </a:r>
+          </a:p>
+          <a:p>
+            <a:pPr lvl="1"/>
+            <a:r>
+              <a:rPr lang="en-US" dirty="0"/>
+              <a:t>We need ‘reasonable doubt’. </a:t>
+            </a:r>
+          </a:p>
+        </p:txBody>
+      </p:sp>
+    </p:spTree>
+    <p:extLst>
+      <p:ext uri="{BB962C8B-B14F-4D97-AF65-F5344CB8AC3E}">
+        <p14:creationId xmlns:p14="http://schemas.microsoft.com/office/powerpoint/2010/main" val="300796387"/>
+      </p:ext>
+    </p:extLst>
+  </p:cSld>
+  <p:clrMapOvr>
+    <a:masterClrMapping/>
+  </p:clrMapOvr>
+</p:sld>
+</file>
+
+<file path=ppt/slides/slide22.xml><?xml version="1.0" encoding="utf-8"?>
+<p:sld xmlns:a="http://schemas.openxmlformats.org/drawingml/2006/main" xmlns:r="http://schemas.openxmlformats.org/officeDocument/2006/relationships" xmlns:p="http://schemas.openxmlformats.org/presentationml/2006/main">
+  <p:cSld>
+    <p:spTree>
+      <p:nvGrpSpPr>
+        <p:cNvPr id="1" name=""/>
+        <p:cNvGrpSpPr/>
+        <p:nvPr/>
+      </p:nvGrpSpPr>
+      <p:grpSpPr>
+        <a:xfrm>
+          <a:off x="0" y="0"/>
+          <a:ext cx="0" cy="0"/>
+          <a:chOff x="0" y="0"/>
+          <a:chExt cx="0" cy="0"/>
+        </a:xfrm>
+      </p:grpSpPr>
+      <p:sp>
+        <p:nvSpPr>
+          <p:cNvPr id="2" name="Title 1">
+            <a:extLst>
+              <a:ext uri="{FF2B5EF4-FFF2-40B4-BE49-F238E27FC236}">
+                <a16:creationId xmlns:a16="http://schemas.microsoft.com/office/drawing/2014/main" id="{E02EB4AF-E945-3564-AE2C-8D101A281F72}"/>
+              </a:ext>
+            </a:extLst>
+          </p:cNvPr>
+          <p:cNvSpPr>
+            <a:spLocks noGrp="1"/>
+          </p:cNvSpPr>
+          <p:nvPr>
+            <p:ph type="title"/>
+          </p:nvPr>
+        </p:nvSpPr>
+        <p:spPr/>
+        <p:txBody>
+          <a:bodyPr/>
+          <a:lstStyle/>
+          <a:p>
+            <a:r>
+              <a:rPr lang="en-US" dirty="0"/>
+              <a:t>Odds</a:t>
+            </a:r>
+          </a:p>
+        </p:txBody>
+      </p:sp>
+      <p:sp>
+        <p:nvSpPr>
+          <p:cNvPr id="3" name="Content Placeholder 2">
+            <a:extLst>
+              <a:ext uri="{FF2B5EF4-FFF2-40B4-BE49-F238E27FC236}">
+                <a16:creationId xmlns:a16="http://schemas.microsoft.com/office/drawing/2014/main" id="{0D19A075-03D3-CE2C-2556-1E467F68CFCB}"/>
+              </a:ext>
+            </a:extLst>
+          </p:cNvPr>
+          <p:cNvSpPr>
+            <a:spLocks noGrp="1"/>
+          </p:cNvSpPr>
+          <p:nvPr>
+            <p:ph idx="1"/>
+          </p:nvPr>
+        </p:nvSpPr>
+        <p:spPr/>
+        <p:txBody>
+          <a:bodyPr/>
+          <a:lstStyle/>
+          <a:p>
+            <a:r>
+              <a:rPr lang="en-US" dirty="0"/>
+              <a:t>All of this probability talk leads us to one of the most important ML concepts – odds. </a:t>
+            </a:r>
+          </a:p>
+          <a:p>
+            <a:r>
+              <a:rPr lang="en-US" dirty="0"/>
+              <a:t>Odds are an alternate expression of probability. </a:t>
+            </a:r>
+          </a:p>
+        </p:txBody>
+      </p:sp>
+    </p:spTree>
+    <p:extLst>
+      <p:ext uri="{BB962C8B-B14F-4D97-AF65-F5344CB8AC3E}">
+        <p14:creationId xmlns:p14="http://schemas.microsoft.com/office/powerpoint/2010/main" val="429911426"/>
+      </p:ext>
+    </p:extLst>
+  </p:cSld>
+  <p:clrMapOvr>
+    <a:masterClrMapping/>
+  </p:clrMapOvr>
+</p:sld>
+</file>
+
+<file path=ppt/slides/slide23.xml><?xml version="1.0" encoding="utf-8"?>
+<p:sld xmlns:a="http://schemas.openxmlformats.org/drawingml/2006/main" xmlns:r="http://schemas.openxmlformats.org/officeDocument/2006/relationships" xmlns:p="http://schemas.openxmlformats.org/presentationml/2006/main">
+  <p:cSld>
+    <p:spTree>
+      <p:nvGrpSpPr>
+        <p:cNvPr id="1" name=""/>
+        <p:cNvGrpSpPr/>
+        <p:nvPr/>
+      </p:nvGrpSpPr>
+      <p:grpSpPr>
+        <a:xfrm>
+          <a:off x="0" y="0"/>
+          <a:ext cx="0" cy="0"/>
+          <a:chOff x="0" y="0"/>
+          <a:chExt cx="0" cy="0"/>
+        </a:xfrm>
+      </p:grpSpPr>
+      <p:sp>
+        <p:nvSpPr>
+          <p:cNvPr id="2" name="Title 1">
+            <a:extLst>
+              <a:ext uri="{FF2B5EF4-FFF2-40B4-BE49-F238E27FC236}">
+                <a16:creationId xmlns:a16="http://schemas.microsoft.com/office/drawing/2014/main" id="{35230F09-B44A-CB77-DFE0-6E063223B214}"/>
+              </a:ext>
+            </a:extLst>
+          </p:cNvPr>
+          <p:cNvSpPr>
+            <a:spLocks noGrp="1"/>
+          </p:cNvSpPr>
+          <p:nvPr>
+            <p:ph type="title"/>
+          </p:nvPr>
+        </p:nvSpPr>
+        <p:spPr/>
+        <p:txBody>
+          <a:bodyPr/>
+          <a:lstStyle/>
+          <a:p>
+            <a:r>
+              <a:rPr lang="en-US" dirty="0"/>
+              <a:t>Odds</a:t>
+            </a:r>
+          </a:p>
+        </p:txBody>
+      </p:sp>
+      <p:sp>
+        <p:nvSpPr>
+          <p:cNvPr id="3" name="Content Placeholder 2">
+            <a:extLst>
+              <a:ext uri="{FF2B5EF4-FFF2-40B4-BE49-F238E27FC236}">
+                <a16:creationId xmlns:a16="http://schemas.microsoft.com/office/drawing/2014/main" id="{F7464E83-DAA2-5F11-C3F2-FD8C920A5071}"/>
+              </a:ext>
+            </a:extLst>
+          </p:cNvPr>
+          <p:cNvSpPr>
+            <a:spLocks noGrp="1"/>
+          </p:cNvSpPr>
+          <p:nvPr>
+            <p:ph idx="1"/>
+          </p:nvPr>
+        </p:nvSpPr>
+        <p:spPr>
+          <a:xfrm>
+            <a:off x="135924" y="1853754"/>
+            <a:ext cx="4569891" cy="4199727"/>
+          </a:xfrm>
+        </p:spPr>
+        <p:txBody>
+          <a:bodyPr>
+            <a:normAutofit/>
+          </a:bodyPr>
+          <a:lstStyle/>
+          <a:p>
+            <a:r>
+              <a:rPr lang="en-US" sz="2400" dirty="0"/>
+              <a:t>Odds are ratio to 1 to 0.</a:t>
+            </a:r>
+          </a:p>
+          <a:p>
+            <a:pPr lvl="1"/>
+            <a:r>
+              <a:rPr lang="en-US" dirty="0"/>
+              <a:t>Binary – ‘true’ can be either. </a:t>
+            </a:r>
+          </a:p>
+          <a:p>
+            <a:pPr lvl="1"/>
+            <a:r>
+              <a:rPr lang="en-US" dirty="0"/>
+              <a:t>We can translate at will. </a:t>
+            </a:r>
+          </a:p>
+          <a:p>
+            <a:r>
+              <a:rPr lang="en-US" sz="2400" dirty="0"/>
+              <a:t>Example - 80% chance of winning. </a:t>
+            </a:r>
+          </a:p>
+          <a:p>
+            <a:pPr lvl="1"/>
+            <a:r>
+              <a:rPr lang="en-US" sz="2000" dirty="0"/>
+              <a:t>.8 / .2 = 4. 4 to 1 odds of winning. </a:t>
+            </a:r>
+          </a:p>
+          <a:p>
+            <a:pPr lvl="1"/>
+            <a:r>
+              <a:rPr lang="en-US" sz="2000" dirty="0"/>
+              <a:t>.2 / .8 = .25. 1 to 4 odds of losing. </a:t>
+            </a:r>
+          </a:p>
+          <a:p>
+            <a:r>
+              <a:rPr lang="en-US" sz="2200" dirty="0"/>
+              <a:t>Translating probability to odds is needed in some places…</a:t>
+            </a:r>
+          </a:p>
+        </p:txBody>
+      </p:sp>
+      <p:pic>
+        <p:nvPicPr>
+          <p:cNvPr id="3074" name="Picture 2" descr="WHAT ARE THE ODDS? | Stats With Cats Blog">
+            <a:extLst>
+              <a:ext uri="{FF2B5EF4-FFF2-40B4-BE49-F238E27FC236}">
+                <a16:creationId xmlns:a16="http://schemas.microsoft.com/office/drawing/2014/main" id="{749D1FBF-A66F-6103-FE5B-671112D689EB}"/>
+              </a:ext>
+            </a:extLst>
+          </p:cNvPr>
+          <p:cNvPicPr>
+            <a:picLocks noChangeAspect="1" noChangeArrowheads="1"/>
+          </p:cNvPicPr>
+          <p:nvPr/>
+        </p:nvPicPr>
+        <p:blipFill>
+          <a:blip r:embed="rId2">
+            <a:extLst>
+              <a:ext uri="{28A0092B-C50C-407E-A947-70E740481C1C}">
+                <a14:useLocalDpi xmlns:a14="http://schemas.microsoft.com/office/drawing/2010/main" val="0"/>
+              </a:ext>
+            </a:extLst>
+          </a:blip>
+          <a:srcRect/>
+          <a:stretch>
+            <a:fillRect/>
+          </a:stretch>
+        </p:blipFill>
+        <p:spPr bwMode="auto">
+          <a:xfrm>
+            <a:off x="4704998" y="1120775"/>
+            <a:ext cx="7487001" cy="4443684"/>
+          </a:xfrm>
+          <a:prstGeom prst="rect">
+            <a:avLst/>
+          </a:prstGeom>
+          <a:noFill/>
+          <a:extLst>
+            <a:ext uri="{909E8E84-426E-40DD-AFC4-6F175D3DCCD1}">
+              <a14:hiddenFill xmlns:a14="http://schemas.microsoft.com/office/drawing/2010/main">
+                <a:solidFill>
+                  <a:srgbClr val="FFFFFF"/>
+                </a:solidFill>
+              </a14:hiddenFill>
+            </a:ext>
+          </a:extLst>
+        </p:spPr>
+      </p:pic>
+    </p:spTree>
+    <p:extLst>
+      <p:ext uri="{BB962C8B-B14F-4D97-AF65-F5344CB8AC3E}">
+        <p14:creationId xmlns:p14="http://schemas.microsoft.com/office/powerpoint/2010/main" val="3516702342"/>
+      </p:ext>
+    </p:extLst>
+  </p:cSld>
+  <p:clrMapOvr>
+    <a:masterClrMapping/>
+  </p:clrMapOvr>
+</p:sld>
+</file>
+
+<file path=ppt/slides/slide24.xml><?xml version="1.0" encoding="utf-8"?>
+<p:sld xmlns:a="http://schemas.openxmlformats.org/drawingml/2006/main" xmlns:r="http://schemas.openxmlformats.org/officeDocument/2006/relationships" xmlns:p="http://schemas.openxmlformats.org/presentationml/2006/main">
+  <p:cSld>
+    <p:spTree>
+      <p:nvGrpSpPr>
+        <p:cNvPr id="1" name=""/>
+        <p:cNvGrpSpPr/>
+        <p:nvPr/>
+      </p:nvGrpSpPr>
+      <p:grpSpPr>
+        <a:xfrm>
+          <a:off x="0" y="0"/>
+          <a:ext cx="0" cy="0"/>
+          <a:chOff x="0" y="0"/>
+          <a:chExt cx="0" cy="0"/>
+        </a:xfrm>
+      </p:grpSpPr>
+      <p:sp>
+        <p:nvSpPr>
+          <p:cNvPr id="2" name="Title 1">
+            <a:extLst>
+              <a:ext uri="{FF2B5EF4-FFF2-40B4-BE49-F238E27FC236}">
+                <a16:creationId xmlns:a16="http://schemas.microsoft.com/office/drawing/2014/main" id="{1082E946-B9B1-7098-30FB-63E737FCEC88}"/>
+              </a:ext>
+            </a:extLst>
+          </p:cNvPr>
+          <p:cNvSpPr>
+            <a:spLocks noGrp="1"/>
+          </p:cNvSpPr>
+          <p:nvPr>
+            <p:ph type="title"/>
+          </p:nvPr>
+        </p:nvSpPr>
+        <p:spPr/>
+        <p:txBody>
+          <a:bodyPr/>
+          <a:lstStyle/>
+          <a:p>
+            <a:r>
+              <a:rPr lang="en-US" dirty="0"/>
+              <a:t>Gambling Odds</a:t>
+            </a:r>
+          </a:p>
+        </p:txBody>
+      </p:sp>
+      <p:sp>
+        <p:nvSpPr>
+          <p:cNvPr id="3" name="Content Placeholder 2">
+            <a:extLst>
+              <a:ext uri="{FF2B5EF4-FFF2-40B4-BE49-F238E27FC236}">
+                <a16:creationId xmlns:a16="http://schemas.microsoft.com/office/drawing/2014/main" id="{E868D726-2503-34A2-A378-F0F3B97F6889}"/>
+              </a:ext>
+            </a:extLst>
+          </p:cNvPr>
+          <p:cNvSpPr>
+            <a:spLocks noGrp="1"/>
+          </p:cNvSpPr>
+          <p:nvPr>
+            <p:ph idx="1"/>
+          </p:nvPr>
+        </p:nvSpPr>
+        <p:spPr/>
+        <p:txBody>
+          <a:bodyPr/>
+          <a:lstStyle/>
+          <a:p>
+            <a:r>
+              <a:rPr lang="en-US" dirty="0"/>
+              <a:t>If you like gambling, odds are your old best friend. </a:t>
+            </a:r>
+          </a:p>
+          <a:p>
+            <a:r>
+              <a:rPr lang="en-US" dirty="0"/>
+              <a:t>In gambling we see both ratios and +/- (American) odds. </a:t>
+            </a:r>
+          </a:p>
+          <a:p>
+            <a:r>
+              <a:rPr lang="en-US" dirty="0"/>
+              <a:t>We often see payouts expressed in odds:</a:t>
+            </a:r>
+          </a:p>
+        </p:txBody>
+      </p:sp>
+      <p:pic>
+        <p:nvPicPr>
+          <p:cNvPr id="4" name="Picture 3">
+            <a:extLst>
+              <a:ext uri="{FF2B5EF4-FFF2-40B4-BE49-F238E27FC236}">
+                <a16:creationId xmlns:a16="http://schemas.microsoft.com/office/drawing/2014/main" id="{D7551F29-D6E3-80A7-2F03-C21A48809DA5}"/>
+              </a:ext>
+            </a:extLst>
+          </p:cNvPr>
+          <p:cNvPicPr>
+            <a:picLocks noChangeAspect="1"/>
+          </p:cNvPicPr>
+          <p:nvPr/>
+        </p:nvPicPr>
+        <p:blipFill>
+          <a:blip r:embed="rId2"/>
+          <a:stretch>
+            <a:fillRect/>
+          </a:stretch>
+        </p:blipFill>
+        <p:spPr>
+          <a:xfrm>
+            <a:off x="6056838" y="0"/>
+            <a:ext cx="6135162" cy="1391655"/>
+          </a:xfrm>
+          <a:prstGeom prst="rect">
+            <a:avLst/>
+          </a:prstGeom>
+        </p:spPr>
+      </p:pic>
+    </p:spTree>
+    <p:extLst>
+      <p:ext uri="{BB962C8B-B14F-4D97-AF65-F5344CB8AC3E}">
+        <p14:creationId xmlns:p14="http://schemas.microsoft.com/office/powerpoint/2010/main" val="3244536568"/>
+      </p:ext>
+    </p:extLst>
+  </p:cSld>
+  <p:clrMapOvr>
+    <a:masterClrMapping/>
+  </p:clrMapOvr>
+</p:sld>
+</file>
+
+<file path=ppt/slides/slide25.xml><?xml version="1.0" encoding="utf-8"?>
+<p:sld xmlns:a="http://schemas.openxmlformats.org/drawingml/2006/main" xmlns:r="http://schemas.openxmlformats.org/officeDocument/2006/relationships" xmlns:p="http://schemas.openxmlformats.org/presentationml/2006/main">
+  <p:cSld>
+    <p:spTree>
+      <p:nvGrpSpPr>
+        <p:cNvPr id="1" name=""/>
+        <p:cNvGrpSpPr/>
+        <p:nvPr/>
+      </p:nvGrpSpPr>
+      <p:grpSpPr>
+        <a:xfrm>
+          <a:off x="0" y="0"/>
+          <a:ext cx="0" cy="0"/>
+          <a:chOff x="0" y="0"/>
+          <a:chExt cx="0" cy="0"/>
+        </a:xfrm>
+      </p:grpSpPr>
+      <p:sp>
+        <p:nvSpPr>
+          <p:cNvPr id="2" name="Title 1">
+            <a:extLst>
+              <a:ext uri="{FF2B5EF4-FFF2-40B4-BE49-F238E27FC236}">
+                <a16:creationId xmlns:a16="http://schemas.microsoft.com/office/drawing/2014/main" id="{F19675AC-B6AC-2B2A-EBAB-D6EDA961AD26}"/>
+              </a:ext>
+            </a:extLst>
+          </p:cNvPr>
+          <p:cNvSpPr>
+            <a:spLocks noGrp="1"/>
+          </p:cNvSpPr>
+          <p:nvPr>
+            <p:ph type="title"/>
+          </p:nvPr>
+        </p:nvSpPr>
+        <p:spPr/>
+        <p:txBody>
+          <a:bodyPr/>
+          <a:lstStyle/>
+          <a:p>
+            <a:r>
+              <a:rPr lang="en-US" dirty="0"/>
+              <a:t>Log Odds</a:t>
+            </a:r>
+          </a:p>
+        </p:txBody>
+      </p:sp>
+      <p:sp>
+        <p:nvSpPr>
+          <p:cNvPr id="3" name="Content Placeholder 2">
+            <a:extLst>
+              <a:ext uri="{FF2B5EF4-FFF2-40B4-BE49-F238E27FC236}">
+                <a16:creationId xmlns:a16="http://schemas.microsoft.com/office/drawing/2014/main" id="{B1CD082F-37FD-EDCB-33E4-44300595AF3C}"/>
+              </a:ext>
+            </a:extLst>
+          </p:cNvPr>
+          <p:cNvSpPr>
+            <a:spLocks noGrp="1"/>
+          </p:cNvSpPr>
+          <p:nvPr>
+            <p:ph idx="1"/>
+          </p:nvPr>
+        </p:nvSpPr>
+        <p:spPr>
+          <a:xfrm>
+            <a:off x="1451579" y="1853754"/>
+            <a:ext cx="9603275" cy="4290568"/>
+          </a:xfrm>
+        </p:spPr>
+        <p:txBody>
+          <a:bodyPr>
+            <a:normAutofit/>
+          </a:bodyPr>
+          <a:lstStyle/>
+          <a:p>
+            <a:r>
+              <a:rPr lang="en-US" dirty="0"/>
+              <a:t>Probabilities have one problem (that will matter soon) – changes in each direction. </a:t>
+            </a:r>
+          </a:p>
+          <a:p>
+            <a:pPr lvl="1"/>
+            <a:r>
+              <a:rPr lang="en-US" dirty="0"/>
+              <a:t>Going from 100 to 10 is a 90% reduction. </a:t>
+            </a:r>
+          </a:p>
+          <a:p>
+            <a:pPr lvl="1"/>
+            <a:r>
+              <a:rPr lang="en-US" dirty="0"/>
+              <a:t>Going from 10 to 100 is a 900% increase. </a:t>
+            </a:r>
+          </a:p>
+          <a:p>
+            <a:r>
+              <a:rPr lang="en-US" dirty="0"/>
+              <a:t>Odds are useful in comparing probabilities in combination with logs. </a:t>
+            </a:r>
+          </a:p>
+          <a:p>
+            <a:r>
+              <a:rPr lang="en-US" dirty="0"/>
+              <a:t>By taking the log of the odds, the value becomes symmetrical. </a:t>
+            </a:r>
+          </a:p>
+          <a:p>
+            <a:r>
+              <a:rPr lang="en-US" dirty="0"/>
+              <a:t>This is called the logit – important later in ML. </a:t>
+            </a:r>
+          </a:p>
+          <a:p>
+            <a:r>
+              <a:rPr lang="en-US" dirty="0"/>
+              <a:t>Allows for comparisons of probabilities that is comparable. </a:t>
+            </a:r>
+          </a:p>
+          <a:p>
+            <a:r>
+              <a:rPr lang="en-US" dirty="0"/>
+              <a:t>*intercept bit of the formula can be ignored for now. </a:t>
+            </a:r>
+          </a:p>
+        </p:txBody>
+      </p:sp>
+      <p:pic>
+        <p:nvPicPr>
+          <p:cNvPr id="6" name="Picture 5">
+            <a:extLst>
+              <a:ext uri="{FF2B5EF4-FFF2-40B4-BE49-F238E27FC236}">
+                <a16:creationId xmlns:a16="http://schemas.microsoft.com/office/drawing/2014/main" id="{CDA1C5F9-E4A2-7DF4-9E10-F4EB438C23BF}"/>
+              </a:ext>
+            </a:extLst>
+          </p:cNvPr>
+          <p:cNvPicPr>
+            <a:picLocks noChangeAspect="1"/>
+          </p:cNvPicPr>
+          <p:nvPr/>
+        </p:nvPicPr>
+        <p:blipFill>
+          <a:blip r:embed="rId2"/>
+          <a:stretch>
+            <a:fillRect/>
+          </a:stretch>
+        </p:blipFill>
+        <p:spPr>
+          <a:xfrm>
+            <a:off x="7169961" y="0"/>
+            <a:ext cx="5026158" cy="1853754"/>
+          </a:xfrm>
+          <a:prstGeom prst="rect">
+            <a:avLst/>
+          </a:prstGeom>
+        </p:spPr>
+      </p:pic>
+    </p:spTree>
+    <p:extLst>
+      <p:ext uri="{BB962C8B-B14F-4D97-AF65-F5344CB8AC3E}">
+        <p14:creationId xmlns:p14="http://schemas.microsoft.com/office/powerpoint/2010/main" val="3868561471"/>
+      </p:ext>
+    </p:extLst>
+  </p:cSld>
+  <p:clrMapOvr>
+    <a:masterClrMapping/>
+  </p:clrMapOvr>
+</p:sld>
+</file>
+
+<file path=ppt/slides/slide26.xml><?xml version="1.0" encoding="utf-8"?>
+<p:sld xmlns:a="http://schemas.openxmlformats.org/drawingml/2006/main" xmlns:r="http://schemas.openxmlformats.org/officeDocument/2006/relationships" xmlns:p="http://schemas.openxmlformats.org/presentationml/2006/main" show="0">
+  <p:cSld>
+    <p:spTree>
+      <p:nvGrpSpPr>
+        <p:cNvPr id="1" name=""/>
+        <p:cNvGrpSpPr/>
+        <p:nvPr/>
+      </p:nvGrpSpPr>
+      <p:grpSpPr>
+        <a:xfrm>
+          <a:off x="0" y="0"/>
+          <a:ext cx="0" cy="0"/>
+          <a:chOff x="0" y="0"/>
+          <a:chExt cx="0" cy="0"/>
+        </a:xfrm>
+      </p:grpSpPr>
+      <p:sp>
+        <p:nvSpPr>
+          <p:cNvPr id="2" name="Title 1">
+            <a:extLst>
+              <a:ext uri="{FF2B5EF4-FFF2-40B4-BE49-F238E27FC236}">
+                <a16:creationId xmlns:a16="http://schemas.microsoft.com/office/drawing/2014/main" id="{52FA847A-1163-5E49-A407-9CEA36D1942E}"/>
+              </a:ext>
+            </a:extLst>
+          </p:cNvPr>
+          <p:cNvSpPr>
+            <a:spLocks noGrp="1"/>
+          </p:cNvSpPr>
+          <p:nvPr>
+            <p:ph type="title"/>
+          </p:nvPr>
+        </p:nvSpPr>
+        <p:spPr/>
+        <p:txBody>
+          <a:bodyPr/>
+          <a:lstStyle/>
+          <a:p>
+            <a:r>
+              <a:rPr lang="en-US" dirty="0"/>
+              <a:t>Bayes</a:t>
+            </a:r>
+          </a:p>
+        </p:txBody>
+      </p:sp>
+      <p:sp>
+        <p:nvSpPr>
+          <p:cNvPr id="3" name="Content Placeholder 2">
+            <a:extLst>
+              <a:ext uri="{FF2B5EF4-FFF2-40B4-BE49-F238E27FC236}">
+                <a16:creationId xmlns:a16="http://schemas.microsoft.com/office/drawing/2014/main" id="{1F53A5AB-70E3-5942-8353-02D7E65E9EB9}"/>
+              </a:ext>
+            </a:extLst>
+          </p:cNvPr>
+          <p:cNvSpPr>
+            <a:spLocks noGrp="1"/>
+          </p:cNvSpPr>
+          <p:nvPr>
+            <p:ph idx="1"/>
+          </p:nvPr>
+        </p:nvSpPr>
+        <p:spPr/>
+        <p:txBody>
+          <a:bodyPr/>
+          <a:lstStyle/>
+          <a:p>
+            <a:r>
+              <a:rPr lang="en-US" dirty="0"/>
+              <a:t>Bayes theorem expands on the idea of conditional probability. </a:t>
+            </a:r>
+          </a:p>
+          <a:p>
+            <a:r>
+              <a:rPr lang="en-US" dirty="0"/>
+              <a:t>We can derive it pretty easily, by looking at examples. </a:t>
+            </a:r>
+          </a:p>
+          <a:p>
+            <a:r>
+              <a:rPr lang="en-US" dirty="0"/>
+              <a:t>It is the basis of Bayesian statistics, which we will touch on a little, but not do in great depth. </a:t>
+            </a:r>
+          </a:p>
+        </p:txBody>
+      </p:sp>
+    </p:spTree>
+    <p:extLst>
+      <p:ext uri="{BB962C8B-B14F-4D97-AF65-F5344CB8AC3E}">
+        <p14:creationId xmlns:p14="http://schemas.microsoft.com/office/powerpoint/2010/main" val="1442097028"/>
+      </p:ext>
+    </p:extLst>
+  </p:cSld>
+  <p:clrMapOvr>
+    <a:masterClrMapping/>
+  </p:clrMapOvr>
+</p:sld>
+</file>
+
+<file path=ppt/slides/slide27.xml><?xml version="1.0" encoding="utf-8"?>
+<p:sld xmlns:a="http://schemas.openxmlformats.org/drawingml/2006/main" xmlns:r="http://schemas.openxmlformats.org/officeDocument/2006/relationships" xmlns:p="http://schemas.openxmlformats.org/presentationml/2006/main">
+  <p:cSld>
+    <p:spTree>
+      <p:nvGrpSpPr>
+        <p:cNvPr id="1" name=""/>
+        <p:cNvGrpSpPr/>
+        <p:nvPr/>
+      </p:nvGrpSpPr>
+      <p:grpSpPr>
+        <a:xfrm>
+          <a:off x="0" y="0"/>
+          <a:ext cx="0" cy="0"/>
+          <a:chOff x="0" y="0"/>
+          <a:chExt cx="0" cy="0"/>
+        </a:xfrm>
+      </p:grpSpPr>
+      <p:sp>
+        <p:nvSpPr>
+          <p:cNvPr id="2" name="Title 1">
+            <a:extLst>
+              <a:ext uri="{FF2B5EF4-FFF2-40B4-BE49-F238E27FC236}">
+                <a16:creationId xmlns:a16="http://schemas.microsoft.com/office/drawing/2014/main" id="{30D14190-7D92-DEC6-84E4-D1D940F21649}"/>
+              </a:ext>
+            </a:extLst>
+          </p:cNvPr>
+          <p:cNvSpPr>
+            <a:spLocks noGrp="1"/>
+          </p:cNvSpPr>
+          <p:nvPr>
+            <p:ph type="title"/>
+          </p:nvPr>
+        </p:nvSpPr>
+        <p:spPr/>
+        <p:txBody>
+          <a:bodyPr/>
+          <a:lstStyle/>
+          <a:p>
+            <a:r>
+              <a:rPr lang="en-US" dirty="0"/>
+              <a:t>Probability and Estimation</a:t>
+            </a:r>
+          </a:p>
+        </p:txBody>
+      </p:sp>
+      <p:sp>
+        <p:nvSpPr>
+          <p:cNvPr id="3" name="Content Placeholder 2">
+            <a:extLst>
+              <a:ext uri="{FF2B5EF4-FFF2-40B4-BE49-F238E27FC236}">
+                <a16:creationId xmlns:a16="http://schemas.microsoft.com/office/drawing/2014/main" id="{2E81BFAB-1E58-E3F3-96EB-F722C988A76C}"/>
+              </a:ext>
+            </a:extLst>
+          </p:cNvPr>
+          <p:cNvSpPr>
+            <a:spLocks noGrp="1"/>
+          </p:cNvSpPr>
+          <p:nvPr>
+            <p:ph idx="1"/>
+          </p:nvPr>
+        </p:nvSpPr>
+        <p:spPr>
+          <a:xfrm>
+            <a:off x="1451579" y="1853754"/>
+            <a:ext cx="9603275" cy="4199727"/>
+          </a:xfrm>
+        </p:spPr>
+        <p:txBody>
+          <a:bodyPr>
+            <a:normAutofit lnSpcReduction="10000"/>
+          </a:bodyPr>
+          <a:lstStyle/>
+          <a:p>
+            <a:r>
+              <a:rPr lang="en-US" dirty="0"/>
+              <a:t>The idea of probability underlies much of the analysis we want to do. </a:t>
+            </a:r>
+          </a:p>
+          <a:p>
+            <a:pPr lvl="1"/>
+            <a:r>
+              <a:rPr lang="en-US" dirty="0"/>
+              <a:t>When dealing with samples, we rarely know ’the’ answer, we have uncertainty. </a:t>
+            </a:r>
+          </a:p>
+          <a:p>
+            <a:r>
+              <a:rPr lang="en-US" dirty="0"/>
+              <a:t>Core idea – based on this expectation, does the reality match that. </a:t>
+            </a:r>
+          </a:p>
+          <a:p>
+            <a:pPr lvl="1"/>
+            <a:r>
+              <a:rPr lang="en-US" dirty="0"/>
+              <a:t>I.e. Hypothesis testing – what are the odds these two things are different? </a:t>
+            </a:r>
+          </a:p>
+          <a:p>
+            <a:pPr lvl="1"/>
+            <a:r>
+              <a:rPr lang="en-US" dirty="0"/>
+              <a:t>Generalization – if we expand from a sample to population, how confident are we? </a:t>
+            </a:r>
+          </a:p>
+          <a:p>
+            <a:r>
+              <a:rPr lang="en-US" dirty="0"/>
+              <a:t>Answering a question is (usually) not a yes/no thing:</a:t>
+            </a:r>
+          </a:p>
+          <a:p>
+            <a:pPr lvl="1"/>
+            <a:r>
+              <a:rPr lang="en-US" dirty="0"/>
+              <a:t>Are the life expectancies of treatment/placebo different after a drug trial?</a:t>
+            </a:r>
+          </a:p>
+          <a:p>
+            <a:pPr lvl="1"/>
+            <a:r>
+              <a:rPr lang="en-US" dirty="0"/>
+              <a:t>Some treated people will die quick, some placebo people will live a long time. </a:t>
+            </a:r>
+          </a:p>
+          <a:p>
+            <a:pPr lvl="1"/>
+            <a:r>
+              <a:rPr lang="en-US" dirty="0"/>
+              <a:t>What is the likelihood that drug people outlive placebo people? </a:t>
+            </a:r>
+          </a:p>
+          <a:p>
+            <a:r>
+              <a:rPr lang="en-US" dirty="0"/>
+              <a:t>There’s an alternative branch of stats, Bayesian, that does all basic stats via probability. </a:t>
+            </a:r>
+          </a:p>
+        </p:txBody>
+      </p:sp>
+    </p:spTree>
+    <p:extLst>
+      <p:ext uri="{BB962C8B-B14F-4D97-AF65-F5344CB8AC3E}">
+        <p14:creationId xmlns:p14="http://schemas.microsoft.com/office/powerpoint/2010/main" val="3371470544"/>
+      </p:ext>
+    </p:extLst>
+  </p:cSld>
+  <p:clrMapOvr>
+    <a:masterClrMapping/>
+  </p:clrMapOvr>
+</p:sld>
+</file>
+
+<file path=ppt/slides/slide3.xml><?xml version="1.0" encoding="utf-8"?>
+<p:sld xmlns:a="http://schemas.openxmlformats.org/drawingml/2006/main" xmlns:r="http://schemas.openxmlformats.org/officeDocument/2006/relationships" xmlns:p="http://schemas.openxmlformats.org/presentationml/2006/main">
+  <p:cSld>
+    <p:spTree>
+      <p:nvGrpSpPr>
+        <p:cNvPr id="1" name=""/>
+        <p:cNvGrpSpPr/>
+        <p:nvPr/>
+      </p:nvGrpSpPr>
+      <p:grpSpPr>
+        <a:xfrm>
+          <a:off x="0" y="0"/>
+          <a:ext cx="0" cy="0"/>
+          <a:chOff x="0" y="0"/>
+          <a:chExt cx="0" cy="0"/>
+        </a:xfrm>
+      </p:grpSpPr>
+      <p:sp>
+        <p:nvSpPr>
+          <p:cNvPr id="2" name="Title 1">
+            <a:extLst>
+              <a:ext uri="{FF2B5EF4-FFF2-40B4-BE49-F238E27FC236}">
+                <a16:creationId xmlns:a16="http://schemas.microsoft.com/office/drawing/2014/main" id="{C302EF34-2FE0-9247-A153-6964C526EAE4}"/>
+              </a:ext>
+            </a:extLst>
+          </p:cNvPr>
+          <p:cNvSpPr>
+            <a:spLocks noGrp="1"/>
+          </p:cNvSpPr>
+          <p:nvPr>
+            <p:ph type="ctrTitle"/>
+          </p:nvPr>
+        </p:nvSpPr>
+        <p:spPr/>
+        <p:txBody>
+          <a:bodyPr/>
+          <a:lstStyle/>
+          <a:p>
+            <a:r>
+              <a:rPr lang="en-US" dirty="0"/>
+              <a:t>Probability</a:t>
+            </a:r>
+          </a:p>
+        </p:txBody>
+      </p:sp>
+      <p:sp>
+        <p:nvSpPr>
+          <p:cNvPr id="3" name="Subtitle 2">
+            <a:extLst>
+              <a:ext uri="{FF2B5EF4-FFF2-40B4-BE49-F238E27FC236}">
+                <a16:creationId xmlns:a16="http://schemas.microsoft.com/office/drawing/2014/main" id="{6E706542-2F47-C249-8FEC-E1F579C97596}"/>
+              </a:ext>
+            </a:extLst>
+          </p:cNvPr>
+          <p:cNvSpPr>
+            <a:spLocks noGrp="1"/>
+          </p:cNvSpPr>
+          <p:nvPr>
+            <p:ph type="subTitle" idx="1"/>
+          </p:nvPr>
+        </p:nvSpPr>
+        <p:spPr/>
+        <p:txBody>
+          <a:bodyPr/>
+          <a:lstStyle/>
+          <a:p>
+            <a:endParaRPr lang="en-US"/>
+          </a:p>
+        </p:txBody>
+      </p:sp>
+    </p:spTree>
+    <p:extLst>
+      <p:ext uri="{BB962C8B-B14F-4D97-AF65-F5344CB8AC3E}">
+        <p14:creationId xmlns:p14="http://schemas.microsoft.com/office/powerpoint/2010/main" val="3217872114"/>
+      </p:ext>
+    </p:extLst>
+  </p:cSld>
+  <p:clrMapOvr>
+    <a:masterClrMapping/>
+  </p:clrMapOvr>
+</p:sld>
+</file>
+
+<file path=ppt/slides/slide4.xml><?xml version="1.0" encoding="utf-8"?>
+<p:sld xmlns:a="http://schemas.openxmlformats.org/drawingml/2006/main" xmlns:r="http://schemas.openxmlformats.org/officeDocument/2006/relationships" xmlns:p="http://schemas.openxmlformats.org/presentationml/2006/main">
+  <p:cSld>
+    <p:spTree>
+      <p:nvGrpSpPr>
+        <p:cNvPr id="1" name=""/>
+        <p:cNvGrpSpPr/>
+        <p:nvPr/>
+      </p:nvGrpSpPr>
+      <p:grpSpPr>
+        <a:xfrm>
+          <a:off x="0" y="0"/>
+          <a:ext cx="0" cy="0"/>
+          <a:chOff x="0" y="0"/>
+          <a:chExt cx="0" cy="0"/>
+        </a:xfrm>
+      </p:grpSpPr>
+      <p:sp>
+        <p:nvSpPr>
+          <p:cNvPr id="2" name="Title 1">
+            <a:extLst>
+              <a:ext uri="{FF2B5EF4-FFF2-40B4-BE49-F238E27FC236}">
                 <a16:creationId xmlns:a16="http://schemas.microsoft.com/office/drawing/2014/main" id="{2ADDD541-FF24-883C-5322-EB30CE7E0F91}"/>
               </a:ext>
             </a:extLst>
@@ -4143,7 +6734,7 @@
           <a:p>
             <a:r>
               <a:rPr lang="en-US" dirty="0"/>
-              <a:t>Discreet vs Continuous</a:t>
+              <a:t>Side Note - Discreet vs Continuous</a:t>
             </a:r>
           </a:p>
         </p:txBody>
@@ -4226,7 +6817,7 @@
 </p:sld>
 </file>
 
-<file path=ppt/slides/slide3.xml><?xml version="1.0" encoding="utf-8"?>
+<file path=ppt/slides/slide5.xml><?xml version="1.0" encoding="utf-8"?>
 <p:sld xmlns:a="http://schemas.openxmlformats.org/drawingml/2006/main" xmlns:r="http://schemas.openxmlformats.org/officeDocument/2006/relationships" xmlns:p="http://schemas.openxmlformats.org/presentationml/2006/main">
   <p:cSld>
     <p:spTree>
@@ -4303,7 +6894,7 @@
 </p:sld>
 </file>
 
-<file path=ppt/slides/slide4.xml><?xml version="1.0" encoding="utf-8"?>
+<file path=ppt/slides/slide6.xml><?xml version="1.0" encoding="utf-8"?>
 <p:sld xmlns:a="http://schemas.openxmlformats.org/drawingml/2006/main" xmlns:r="http://schemas.openxmlformats.org/officeDocument/2006/relationships" xmlns:p="http://schemas.openxmlformats.org/presentationml/2006/main">
   <p:cSld>
     <p:spTree>
@@ -4320,453 +6911,10 @@
           <a:chExt cx="0" cy="0"/>
         </a:xfrm>
       </p:grpSpPr>
-      <p:sp>
-        <p:nvSpPr>
-          <p:cNvPr id="2" name="Title 1">
-            <a:extLst>
-              <a:ext uri="{FF2B5EF4-FFF2-40B4-BE49-F238E27FC236}">
-                <a16:creationId xmlns:a16="http://schemas.microsoft.com/office/drawing/2014/main" id="{3D786B20-D5EC-CF4F-8C37-924A9298E58D}"/>
-              </a:ext>
-            </a:extLst>
-          </p:cNvPr>
-          <p:cNvSpPr>
-            <a:spLocks noGrp="1"/>
-          </p:cNvSpPr>
-          <p:nvPr>
-            <p:ph type="title"/>
-          </p:nvPr>
-        </p:nvSpPr>
-        <p:spPr/>
-        <p:txBody>
-          <a:bodyPr/>
-          <a:lstStyle/>
-          <a:p>
-            <a:r>
-              <a:rPr lang="en-US" dirty="0"/>
-              <a:t>What’s the Probability? </a:t>
-            </a:r>
-          </a:p>
-        </p:txBody>
-      </p:sp>
-      <p:sp>
-        <p:nvSpPr>
-          <p:cNvPr id="3" name="Content Placeholder 2">
-            <a:extLst>
-              <a:ext uri="{FF2B5EF4-FFF2-40B4-BE49-F238E27FC236}">
-                <a16:creationId xmlns:a16="http://schemas.microsoft.com/office/drawing/2014/main" id="{3C7917E6-EC70-C540-B629-F6D3990AB300}"/>
-              </a:ext>
-            </a:extLst>
-          </p:cNvPr>
-          <p:cNvSpPr>
-            <a:spLocks noGrp="1"/>
-          </p:cNvSpPr>
-          <p:nvPr>
-            <p:ph idx="1"/>
-          </p:nvPr>
-        </p:nvSpPr>
-        <p:spPr>
-          <a:xfrm>
-            <a:off x="1451579" y="2015732"/>
-            <a:ext cx="9603275" cy="4146529"/>
-          </a:xfrm>
-        </p:spPr>
-        <p:txBody>
-          <a:bodyPr/>
-          <a:lstStyle/>
-          <a:p>
-            <a:r>
-              <a:rPr lang="en-US" dirty="0"/>
-              <a:t>Probability = the chances something happens.</a:t>
-            </a:r>
-          </a:p>
-          <a:p>
-            <a:pPr lvl="1"/>
-            <a:r>
-              <a:rPr lang="en-US" dirty="0"/>
-              <a:t>Or: The fraction of a total possibilities. </a:t>
-            </a:r>
-          </a:p>
-          <a:p>
-            <a:pPr lvl="1"/>
-            <a:r>
-              <a:rPr lang="en-US" dirty="0"/>
-              <a:t>E.g. the chances you roll a die and get a 5 = 1/6</a:t>
-            </a:r>
-          </a:p>
-          <a:p>
-            <a:r>
-              <a:rPr lang="en-US" dirty="0"/>
-              <a:t>What does probability matter to us?</a:t>
-            </a:r>
-          </a:p>
-          <a:p>
-            <a:pPr lvl="1"/>
-            <a:r>
-              <a:rPr lang="en-US" dirty="0"/>
-              <a:t>They matter – a little. </a:t>
-            </a:r>
-          </a:p>
-          <a:p>
-            <a:pPr lvl="1"/>
-            <a:r>
-              <a:rPr lang="en-US" dirty="0"/>
-              <a:t>Probabilities are common – e.g. gambling. </a:t>
-            </a:r>
-          </a:p>
-          <a:p>
-            <a:pPr lvl="1"/>
-            <a:r>
-              <a:rPr lang="en-US" dirty="0"/>
-              <a:t>Probability is often misunderstood. </a:t>
-            </a:r>
-          </a:p>
-          <a:p>
-            <a:pPr lvl="1"/>
-            <a:r>
-              <a:rPr lang="en-US" dirty="0"/>
-              <a:t>Probability provides an alternate view of what we are looking at. </a:t>
-            </a:r>
-          </a:p>
-          <a:p>
-            <a:pPr lvl="2"/>
-            <a:r>
-              <a:rPr lang="en-US" dirty="0"/>
-              <a:t>Can reach things like distributions, by looking at probability, instead of data.</a:t>
-            </a:r>
-          </a:p>
-          <a:p>
-            <a:pPr lvl="2"/>
-            <a:r>
-              <a:rPr lang="en-US" dirty="0"/>
-              <a:t>probability something happens = share of data where that happens (</a:t>
-            </a:r>
-            <a:r>
-              <a:rPr lang="en-US" dirty="0" err="1"/>
-              <a:t>apx</a:t>
-            </a:r>
-            <a:r>
-              <a:rPr lang="en-US" dirty="0"/>
-              <a:t>)</a:t>
-            </a:r>
-          </a:p>
-          <a:p>
-            <a:pPr lvl="1"/>
-            <a:endParaRPr lang="en-US" dirty="0"/>
-          </a:p>
-        </p:txBody>
-      </p:sp>
     </p:spTree>
     <p:extLst>
       <p:ext uri="{BB962C8B-B14F-4D97-AF65-F5344CB8AC3E}">
-        <p14:creationId xmlns:p14="http://schemas.microsoft.com/office/powerpoint/2010/main" val="3240744396"/>
-      </p:ext>
-    </p:extLst>
-  </p:cSld>
-  <p:clrMapOvr>
-    <a:masterClrMapping/>
-  </p:clrMapOvr>
-</p:sld>
-</file>
-
-<file path=ppt/slides/slide5.xml><?xml version="1.0" encoding="utf-8"?>
-<p:sld xmlns:a="http://schemas.openxmlformats.org/drawingml/2006/main" xmlns:r="http://schemas.openxmlformats.org/officeDocument/2006/relationships" xmlns:p="http://schemas.openxmlformats.org/presentationml/2006/main">
-  <p:cSld>
-    <p:spTree>
-      <p:nvGrpSpPr>
-        <p:cNvPr id="1" name=""/>
-        <p:cNvGrpSpPr/>
-        <p:nvPr/>
-      </p:nvGrpSpPr>
-      <p:grpSpPr>
-        <a:xfrm>
-          <a:off x="0" y="0"/>
-          <a:ext cx="0" cy="0"/>
-          <a:chOff x="0" y="0"/>
-          <a:chExt cx="0" cy="0"/>
-        </a:xfrm>
-      </p:grpSpPr>
-      <p:sp>
-        <p:nvSpPr>
-          <p:cNvPr id="2" name="Title 1">
-            <a:extLst>
-              <a:ext uri="{FF2B5EF4-FFF2-40B4-BE49-F238E27FC236}">
-                <a16:creationId xmlns:a16="http://schemas.microsoft.com/office/drawing/2014/main" id="{1147EF03-8FEA-2C42-A25D-1BF98613C5AA}"/>
-              </a:ext>
-            </a:extLst>
-          </p:cNvPr>
-          <p:cNvSpPr>
-            <a:spLocks noGrp="1"/>
-          </p:cNvSpPr>
-          <p:nvPr>
-            <p:ph type="title"/>
-          </p:nvPr>
-        </p:nvSpPr>
-        <p:spPr/>
-        <p:txBody>
-          <a:bodyPr/>
-          <a:lstStyle/>
-          <a:p>
-            <a:r>
-              <a:rPr lang="en-US" dirty="0"/>
-              <a:t>Probability Notation</a:t>
-            </a:r>
-          </a:p>
-        </p:txBody>
-      </p:sp>
-      <p:sp>
-        <p:nvSpPr>
-          <p:cNvPr id="3" name="Content Placeholder 2">
-            <a:extLst>
-              <a:ext uri="{FF2B5EF4-FFF2-40B4-BE49-F238E27FC236}">
-                <a16:creationId xmlns:a16="http://schemas.microsoft.com/office/drawing/2014/main" id="{D4B34D7C-4418-D44A-9722-960449F34C2F}"/>
-              </a:ext>
-            </a:extLst>
-          </p:cNvPr>
-          <p:cNvSpPr>
-            <a:spLocks noGrp="1"/>
-          </p:cNvSpPr>
-          <p:nvPr>
-            <p:ph idx="1"/>
-          </p:nvPr>
-        </p:nvSpPr>
-        <p:spPr/>
-        <p:txBody>
-          <a:bodyPr/>
-          <a:lstStyle/>
-          <a:p>
-            <a:r>
-              <a:rPr lang="en-US" dirty="0"/>
-              <a:t>P(A) = Probability that A is true. </a:t>
-            </a:r>
-          </a:p>
-          <a:p>
-            <a:r>
-              <a:rPr lang="en-US" dirty="0"/>
-              <a:t>P(A and B) = P(A) * P(B). Probability that A and B are true. </a:t>
-            </a:r>
-          </a:p>
-          <a:p>
-            <a:r>
-              <a:rPr lang="en-US" dirty="0"/>
-              <a:t>P(A or B) = P(A) + P(B). Probability that A or B are true. </a:t>
-            </a:r>
-          </a:p>
-          <a:p>
-            <a:r>
-              <a:rPr lang="en-US" dirty="0"/>
-              <a:t>P(A</a:t>
-            </a:r>
-            <a:r>
-              <a:rPr lang="en-US" baseline="30000" dirty="0"/>
-              <a:t>c</a:t>
-            </a:r>
-            <a:r>
-              <a:rPr lang="en-US" dirty="0"/>
-              <a:t>) = 1-P(A) = P(not A). Probability that is is false. </a:t>
-            </a:r>
-          </a:p>
-          <a:p>
-            <a:r>
-              <a:rPr lang="en-US" dirty="0"/>
-              <a:t>Simple probability assumes mutual exclusivity (only one is true), and one thing is true. </a:t>
-            </a:r>
-          </a:p>
-          <a:p>
-            <a:pPr lvl="1"/>
-            <a:r>
-              <a:rPr lang="en-US"/>
-              <a:t>P(A and B) = 0</a:t>
-            </a:r>
-            <a:endParaRPr lang="en-US" dirty="0"/>
-          </a:p>
-        </p:txBody>
-      </p:sp>
-    </p:spTree>
-    <p:extLst>
-      <p:ext uri="{BB962C8B-B14F-4D97-AF65-F5344CB8AC3E}">
-        <p14:creationId xmlns:p14="http://schemas.microsoft.com/office/powerpoint/2010/main" val="4279640077"/>
-      </p:ext>
-    </p:extLst>
-  </p:cSld>
-  <p:clrMapOvr>
-    <a:masterClrMapping/>
-  </p:clrMapOvr>
-</p:sld>
-</file>
-
-<file path=ppt/slides/slide6.xml><?xml version="1.0" encoding="utf-8"?>
-<p:sld xmlns:a="http://schemas.openxmlformats.org/drawingml/2006/main" xmlns:r="http://schemas.openxmlformats.org/officeDocument/2006/relationships" xmlns:p="http://schemas.openxmlformats.org/presentationml/2006/main">
-  <p:cSld>
-    <p:bg>
-      <p:bgPr>
-        <a:gradFill rotWithShape="1">
-          <a:gsLst>
-            <a:gs pos="0">
-              <a:schemeClr val="bg2">
-                <a:tint val="94000"/>
-                <a:satMod val="80000"/>
-                <a:lumMod val="106000"/>
-              </a:schemeClr>
-            </a:gs>
-            <a:gs pos="100000">
-              <a:schemeClr val="bg2">
-                <a:shade val="80000"/>
-              </a:schemeClr>
-            </a:gs>
-          </a:gsLst>
-          <a:path path="circle">
-            <a:fillToRect l="43000" r="43000" b="100000"/>
-          </a:path>
-        </a:gradFill>
-        <a:effectLst/>
-      </p:bgPr>
-    </p:bg>
-    <p:spTree>
-      <p:nvGrpSpPr>
-        <p:cNvPr id="1" name=""/>
-        <p:cNvGrpSpPr/>
-        <p:nvPr/>
-      </p:nvGrpSpPr>
-      <p:grpSpPr>
-        <a:xfrm>
-          <a:off x="0" y="0"/>
-          <a:ext cx="0" cy="0"/>
-          <a:chOff x="0" y="0"/>
-          <a:chExt cx="0" cy="0"/>
-        </a:xfrm>
-      </p:grpSpPr>
-      <p:sp>
-        <p:nvSpPr>
-          <p:cNvPr id="2" name="Title 1">
-            <a:extLst>
-              <a:ext uri="{FF2B5EF4-FFF2-40B4-BE49-F238E27FC236}">
-                <a16:creationId xmlns:a16="http://schemas.microsoft.com/office/drawing/2014/main" id="{FB519E84-2B20-554F-96AC-21F5038BBE31}"/>
-              </a:ext>
-            </a:extLst>
-          </p:cNvPr>
-          <p:cNvSpPr>
-            <a:spLocks noGrp="1"/>
-          </p:cNvSpPr>
-          <p:nvPr>
-            <p:ph type="title"/>
-          </p:nvPr>
-        </p:nvSpPr>
-        <p:spPr>
-          <a:xfrm>
-            <a:off x="1451579" y="804519"/>
-            <a:ext cx="9603275" cy="1049235"/>
-          </a:xfrm>
-        </p:spPr>
-        <p:txBody>
-          <a:bodyPr>
-            <a:normAutofit/>
-          </a:bodyPr>
-          <a:lstStyle/>
-          <a:p>
-            <a:r>
-              <a:rPr lang="en-US" dirty="0"/>
-              <a:t>Using Probability – Will We live?</a:t>
-            </a:r>
-          </a:p>
-        </p:txBody>
-      </p:sp>
-      <p:sp>
-        <p:nvSpPr>
-          <p:cNvPr id="3" name="Content Placeholder 2">
-            <a:extLst>
-              <a:ext uri="{FF2B5EF4-FFF2-40B4-BE49-F238E27FC236}">
-                <a16:creationId xmlns:a16="http://schemas.microsoft.com/office/drawing/2014/main" id="{03680AA9-13F5-EB4B-AF07-8A85470748A0}"/>
-              </a:ext>
-            </a:extLst>
-          </p:cNvPr>
-          <p:cNvSpPr>
-            <a:spLocks noGrp="1"/>
-          </p:cNvSpPr>
-          <p:nvPr>
-            <p:ph idx="1"/>
-          </p:nvPr>
-        </p:nvSpPr>
-        <p:spPr>
-          <a:xfrm>
-            <a:off x="571501" y="2015734"/>
-            <a:ext cx="4969614" cy="3450613"/>
-          </a:xfrm>
-        </p:spPr>
-        <p:txBody>
-          <a:bodyPr>
-            <a:normAutofit/>
-          </a:bodyPr>
-          <a:lstStyle/>
-          <a:p>
-            <a:r>
-              <a:rPr lang="en-US" dirty="0"/>
-              <a:t>We need to win at 5 simple games. </a:t>
-            </a:r>
-          </a:p>
-          <a:p>
-            <a:r>
-              <a:rPr lang="en-US" dirty="0"/>
-              <a:t>We are really, really good at games, we win 90% of the time.</a:t>
-            </a:r>
-          </a:p>
-          <a:p>
-            <a:r>
-              <a:rPr lang="en-US" dirty="0"/>
-              <a:t>Are we dead?</a:t>
-            </a:r>
-          </a:p>
-        </p:txBody>
-      </p:sp>
-      <p:pic>
-        <p:nvPicPr>
-          <p:cNvPr id="1026" name="Picture 2" descr="All the best &amp;#39;Squid Game&amp;#39; memes on the internet">
-            <a:extLst>
-              <a:ext uri="{FF2B5EF4-FFF2-40B4-BE49-F238E27FC236}">
-                <a16:creationId xmlns:a16="http://schemas.microsoft.com/office/drawing/2014/main" id="{D878DA7F-B129-2143-BA4F-5B965767096C}"/>
-              </a:ext>
-            </a:extLst>
-          </p:cNvPr>
-          <p:cNvPicPr>
-            <a:picLocks noChangeAspect="1" noChangeArrowheads="1"/>
-          </p:cNvPicPr>
-          <p:nvPr/>
-        </p:nvPicPr>
-        <p:blipFill>
-          <a:blip r:embed="rId2">
-            <a:extLst>
-              <a:ext uri="{28A0092B-C50C-407E-A947-70E740481C1C}">
-                <a14:useLocalDpi xmlns:a14="http://schemas.microsoft.com/office/drawing/2010/main" val="0"/>
-              </a:ext>
-            </a:extLst>
-          </a:blip>
-          <a:stretch>
-            <a:fillRect/>
-          </a:stretch>
-        </p:blipFill>
-        <p:spPr bwMode="auto">
-          <a:xfrm>
-            <a:off x="5541115" y="1932358"/>
-            <a:ext cx="6650885" cy="3325442"/>
-          </a:xfrm>
-          <a:prstGeom prst="rect">
-            <a:avLst/>
-          </a:prstGeom>
-          <a:noFill/>
-          <a:extLst>
-            <a:ext uri="{909E8E84-426E-40DD-AFC4-6F175D3DCCD1}">
-              <a14:hiddenFill xmlns:a14="http://schemas.microsoft.com/office/drawing/2010/main">
-                <a:solidFill>
-                  <a:srgbClr val="FFFFFF"/>
-                </a:solidFill>
-              </a14:hiddenFill>
-            </a:ext>
-          </a:extLst>
-        </p:spPr>
-      </p:pic>
-    </p:spTree>
-    <p:extLst>
-      <p:ext uri="{BB962C8B-B14F-4D97-AF65-F5344CB8AC3E}">
-        <p14:creationId xmlns:p14="http://schemas.microsoft.com/office/powerpoint/2010/main" val="3997645213"/>
+        <p14:creationId xmlns:p14="http://schemas.microsoft.com/office/powerpoint/2010/main" val="4259924014"/>
       </p:ext>
     </p:extLst>
   </p:cSld>
@@ -4798,7 +6946,7 @@
           <p:cNvPr id="2" name="Title 1">
             <a:extLst>
               <a:ext uri="{FF2B5EF4-FFF2-40B4-BE49-F238E27FC236}">
-                <a16:creationId xmlns:a16="http://schemas.microsoft.com/office/drawing/2014/main" id="{D53E4AA8-B3D4-284A-B0CD-C0DA2209B755}"/>
+                <a16:creationId xmlns:a16="http://schemas.microsoft.com/office/drawing/2014/main" id="{3D786B20-D5EC-CF4F-8C37-924A9298E58D}"/>
               </a:ext>
             </a:extLst>
           </p:cNvPr>
@@ -4816,7 +6964,7 @@
           <a:p>
             <a:r>
               <a:rPr lang="en-US" dirty="0"/>
-              <a:t>Will we Live?</a:t>
+              <a:t>What’s the Probability? </a:t>
             </a:r>
           </a:p>
         </p:txBody>
@@ -4826,7 +6974,7 @@
           <p:cNvPr id="3" name="Content Placeholder 2">
             <a:extLst>
               <a:ext uri="{FF2B5EF4-FFF2-40B4-BE49-F238E27FC236}">
-                <a16:creationId xmlns:a16="http://schemas.microsoft.com/office/drawing/2014/main" id="{725F6146-186E-0C4A-8057-81778B705DC1}"/>
+                <a16:creationId xmlns:a16="http://schemas.microsoft.com/office/drawing/2014/main" id="{3C7917E6-EC70-C540-B629-F6D3990AB300}"/>
               </a:ext>
             </a:extLst>
           </p:cNvPr>
@@ -4840,7 +6988,7 @@
         <p:spPr>
           <a:xfrm>
             <a:off x="1451579" y="2015732"/>
-            <a:ext cx="9603275" cy="4037749"/>
+            <a:ext cx="9603275" cy="4146529"/>
           </a:xfrm>
         </p:spPr>
         <p:txBody>
@@ -4849,63 +6997,81 @@
           <a:p>
             <a:r>
               <a:rPr lang="en-US" dirty="0"/>
-              <a:t>P(Win) = .9</a:t>
-            </a:r>
-          </a:p>
-          <a:p>
-            <a:r>
-              <a:rPr lang="en-US" dirty="0"/>
-              <a:t>Odds we are alive after:</a:t>
-            </a:r>
-          </a:p>
-          <a:p>
-            <a:pPr lvl="1"/>
-            <a:r>
-              <a:rPr lang="en-US" dirty="0"/>
-              <a:t>1 Game – 90%</a:t>
-            </a:r>
-          </a:p>
-          <a:p>
-            <a:pPr lvl="1"/>
-            <a:r>
-              <a:rPr lang="en-US" dirty="0"/>
-              <a:t>2 Games: P(W1 and W2) = .9 * .9 = .81 = 81%</a:t>
-            </a:r>
-          </a:p>
-          <a:p>
-            <a:pPr lvl="1"/>
-            <a:r>
-              <a:rPr lang="en-US" dirty="0"/>
-              <a:t>3 Games P(W1&amp;W2&amp;W3) = .9^3 = .729 = 73%</a:t>
-            </a:r>
-          </a:p>
-          <a:p>
-            <a:pPr lvl="1"/>
-            <a:r>
-              <a:rPr lang="en-US" dirty="0"/>
-              <a:t>4 Games P(W1&amp;W2&amp;W3&amp;W4) = .9^4 = .66 = 66%</a:t>
-            </a:r>
-          </a:p>
-          <a:p>
-            <a:pPr lvl="1"/>
-            <a:r>
-              <a:rPr lang="en-US" dirty="0"/>
-              <a:t>5 Games P(W1&amp;W2&amp;W3&amp;W4&amp;W5) = .9^5 = 59%</a:t>
-            </a:r>
-          </a:p>
-          <a:p>
-            <a:r>
-              <a:rPr lang="en-US" dirty="0"/>
-              <a:t>Damn it. </a:t>
-            </a:r>
-          </a:p>
-          <a:p>
-            <a:r>
-              <a:rPr lang="en-US" dirty="0"/>
-              <a:t>Even if we are better – 95% win rate, we only survive 77% of the time. </a:t>
-            </a:r>
-          </a:p>
-          <a:p>
+              <a:t>Probability = the chances something happens.</a:t>
+            </a:r>
+          </a:p>
+          <a:p>
+            <a:pPr lvl="1"/>
+            <a:r>
+              <a:rPr lang="en-US" dirty="0"/>
+              <a:t>Or: The fraction of a total possibilities. </a:t>
+            </a:r>
+          </a:p>
+          <a:p>
+            <a:pPr lvl="1"/>
+            <a:r>
+              <a:rPr lang="en-US" dirty="0"/>
+              <a:t>E.g. the chances you roll a die and get a 5 = 1/6</a:t>
+            </a:r>
+          </a:p>
+          <a:p>
+            <a:r>
+              <a:rPr lang="en-US" dirty="0"/>
+              <a:t>What does probability matter to us?</a:t>
+            </a:r>
+          </a:p>
+          <a:p>
+            <a:pPr lvl="1"/>
+            <a:r>
+              <a:rPr lang="en-US" dirty="0"/>
+              <a:t>They matter – a little. </a:t>
+            </a:r>
+          </a:p>
+          <a:p>
+            <a:pPr lvl="1"/>
+            <a:r>
+              <a:rPr lang="en-US" dirty="0"/>
+              <a:t>Probabilities are common – e.g. gambling. </a:t>
+            </a:r>
+          </a:p>
+          <a:p>
+            <a:pPr lvl="1"/>
+            <a:r>
+              <a:rPr lang="en-US" dirty="0"/>
+              <a:t>Probability is often misunderstood. </a:t>
+            </a:r>
+          </a:p>
+          <a:p>
+            <a:pPr lvl="1"/>
+            <a:r>
+              <a:rPr lang="en-US" dirty="0"/>
+              <a:t>Probability provides an alternate view of what we are looking at. </a:t>
+            </a:r>
+          </a:p>
+          <a:p>
+            <a:pPr lvl="2"/>
+            <a:r>
+              <a:rPr lang="en-US" dirty="0"/>
+              <a:t>Can reach things like distributions, by looking at probability, instead of data.</a:t>
+            </a:r>
+          </a:p>
+          <a:p>
+            <a:pPr lvl="2"/>
+            <a:r>
+              <a:rPr lang="en-US" dirty="0"/>
+              <a:t>probability something happens = share of data where that happens (</a:t>
+            </a:r>
+            <a:r>
+              <a:rPr lang="en-US" dirty="0" err="1"/>
+              <a:t>apx</a:t>
+            </a:r>
+            <a:r>
+              <a:rPr lang="en-US" dirty="0"/>
+              <a:t>)</a:t>
+            </a:r>
+          </a:p>
+          <a:p>
+            <a:pPr lvl="1"/>
             <a:endParaRPr lang="en-US" dirty="0"/>
           </a:p>
         </p:txBody>
@@ -4913,7 +7079,7 @@
     </p:spTree>
     <p:extLst>
       <p:ext uri="{BB962C8B-B14F-4D97-AF65-F5344CB8AC3E}">
-        <p14:creationId xmlns:p14="http://schemas.microsoft.com/office/powerpoint/2010/main" val="1293442868"/>
+        <p14:creationId xmlns:p14="http://schemas.microsoft.com/office/powerpoint/2010/main" val="3240744396"/>
       </p:ext>
     </p:extLst>
   </p:cSld>
@@ -4926,30 +7092,6 @@
 <file path=ppt/slides/slide8.xml><?xml version="1.0" encoding="utf-8"?>
 <p:sld xmlns:a="http://schemas.openxmlformats.org/drawingml/2006/main" xmlns:r="http://schemas.openxmlformats.org/officeDocument/2006/relationships" xmlns:p="http://schemas.openxmlformats.org/presentationml/2006/main">
   <p:cSld>
-    <p:bg>
-      <p:bgPr>
-        <a:gradFill rotWithShape="1">
-          <a:gsLst>
-            <a:gs pos="0">
-              <a:schemeClr val="bg2">
-                <a:tint val="94000"/>
-                <a:satMod val="80000"/>
-                <a:lumMod val="106000"/>
-              </a:schemeClr>
-            </a:gs>
-            <a:gs pos="100000">
-              <a:schemeClr val="bg2">
-                <a:shade val="80000"/>
-              </a:schemeClr>
-            </a:gs>
-          </a:gsLst>
-          <a:path path="circle">
-            <a:fillToRect l="43000" r="43000" b="100000"/>
-          </a:path>
-        </a:gradFill>
-        <a:effectLst/>
-      </p:bgPr>
-    </p:bg>
     <p:spTree>
       <p:nvGrpSpPr>
         <p:cNvPr id="1" name=""/>
@@ -4969,7 +7111,7 @@
           <p:cNvPr id="2" name="Title 1">
             <a:extLst>
               <a:ext uri="{FF2B5EF4-FFF2-40B4-BE49-F238E27FC236}">
-                <a16:creationId xmlns:a16="http://schemas.microsoft.com/office/drawing/2014/main" id="{54BC807B-0003-3849-AAF4-1D4997877BA4}"/>
+                <a16:creationId xmlns:a16="http://schemas.microsoft.com/office/drawing/2014/main" id="{1147EF03-8FEA-2C42-A25D-1BF98613C5AA}"/>
               </a:ext>
             </a:extLst>
           </p:cNvPr>
@@ -4980,21 +7122,14 @@
             <p:ph type="title"/>
           </p:nvPr>
         </p:nvSpPr>
-        <p:spPr>
-          <a:xfrm>
-            <a:off x="1451579" y="804519"/>
-            <a:ext cx="9603275" cy="1049235"/>
-          </a:xfrm>
-        </p:spPr>
-        <p:txBody>
-          <a:bodyPr>
-            <a:normAutofit/>
-          </a:bodyPr>
-          <a:lstStyle/>
-          <a:p>
-            <a:r>
-              <a:rPr lang="en-US" dirty="0"/>
-              <a:t>Choose Carefully</a:t>
+        <p:spPr/>
+        <p:txBody>
+          <a:bodyPr/>
+          <a:lstStyle/>
+          <a:p>
+            <a:r>
+              <a:rPr lang="en-US" dirty="0"/>
+              <a:t>Probability Notation</a:t>
             </a:r>
           </a:p>
         </p:txBody>
@@ -5004,7 +7139,7 @@
           <p:cNvPr id="3" name="Content Placeholder 2">
             <a:extLst>
               <a:ext uri="{FF2B5EF4-FFF2-40B4-BE49-F238E27FC236}">
-                <a16:creationId xmlns:a16="http://schemas.microsoft.com/office/drawing/2014/main" id="{EF962E4C-0B60-9F41-92C1-84326E6143FA}"/>
+                <a16:creationId xmlns:a16="http://schemas.microsoft.com/office/drawing/2014/main" id="{D4B34D7C-4418-D44A-9722-960449F34C2F}"/>
               </a:ext>
             </a:extLst>
           </p:cNvPr>
@@ -5015,128 +7150,62 @@
             <p:ph idx="1"/>
           </p:nvPr>
         </p:nvSpPr>
-        <p:spPr>
-          <a:xfrm>
-            <a:off x="233362" y="2015734"/>
-            <a:ext cx="6946371" cy="4125422"/>
-          </a:xfrm>
-        </p:spPr>
-        <p:txBody>
-          <a:bodyPr>
-            <a:normAutofit lnSpcReduction="10000"/>
-          </a:bodyPr>
-          <a:lstStyle/>
-          <a:p>
-            <a:r>
-              <a:rPr lang="en-US" dirty="0"/>
-              <a:t>Probabilities, especially when there’s more than one involved, are not always intuitive.</a:t>
-            </a:r>
-          </a:p>
-          <a:p>
-            <a:r>
-              <a:rPr lang="en-US" dirty="0"/>
-              <a:t>E.g. Jackpot odds for 6/49 lottery are roughly 1 in 14 million.</a:t>
-            </a:r>
-          </a:p>
-          <a:p>
-            <a:r>
-              <a:rPr lang="en-US" dirty="0"/>
-              <a:t>If your work buys 10 tickets every week, for 30 years. </a:t>
-            </a:r>
-          </a:p>
-          <a:p>
-            <a:pPr lvl="1"/>
-            <a:r>
-              <a:rPr lang="en-US" dirty="0"/>
-              <a:t>10*52*30 = 15,600 chances to win. </a:t>
-            </a:r>
-          </a:p>
-          <a:p>
-            <a:pPr lvl="1"/>
-            <a:r>
-              <a:rPr lang="en-US" dirty="0"/>
-              <a:t>= .1%</a:t>
-            </a:r>
-          </a:p>
-          <a:p>
-            <a:pPr lvl="1"/>
-            <a:r>
-              <a:rPr lang="en-US" dirty="0"/>
-              <a:t>Expected value:</a:t>
-            </a:r>
-          </a:p>
-          <a:p>
-            <a:pPr lvl="2"/>
-            <a:r>
-              <a:rPr lang="en-US" dirty="0"/>
-              <a:t>15,600*$5 = $78,000</a:t>
-            </a:r>
-          </a:p>
-          <a:p>
-            <a:pPr lvl="2"/>
-            <a:r>
-              <a:rPr lang="en-US" dirty="0"/>
-              <a:t>$10 million avg jackpot – $10,000 / people in pool</a:t>
-            </a:r>
-          </a:p>
-          <a:p>
-            <a:r>
-              <a:rPr lang="en-US" dirty="0"/>
-              <a:t>Even so, some people in my old job won ~$3.5m each. </a:t>
-            </a:r>
-          </a:p>
-        </p:txBody>
-      </p:sp>
-      <p:pic>
-        <p:nvPicPr>
-          <p:cNvPr id="2050" name="Picture 2" descr="Squid Game - choosing and push a button [1920x2880]: MemeTemplatesOfficial">
-            <a:extLst>
-              <a:ext uri="{FF2B5EF4-FFF2-40B4-BE49-F238E27FC236}">
-                <a16:creationId xmlns:a16="http://schemas.microsoft.com/office/drawing/2014/main" id="{215B05DE-9FC6-FE46-8A78-F7C6A038FCE5}"/>
-              </a:ext>
-            </a:extLst>
-          </p:cNvPr>
-          <p:cNvPicPr>
-            <a:picLocks noChangeAspect="1" noChangeArrowheads="1"/>
-          </p:cNvPicPr>
-          <p:nvPr/>
-        </p:nvPicPr>
-        <p:blipFill>
-          <a:blip r:embed="rId2">
-            <a:extLst>
-              <a:ext uri="{28A0092B-C50C-407E-A947-70E740481C1C}">
-                <a14:useLocalDpi xmlns:a14="http://schemas.microsoft.com/office/drawing/2010/main" val="0"/>
-              </a:ext>
-            </a:extLst>
-          </a:blip>
-          <a:stretch>
-            <a:fillRect/>
-          </a:stretch>
-        </p:blipFill>
-        <p:spPr bwMode="auto">
-          <a:xfrm>
-            <a:off x="7422989" y="-17694"/>
-            <a:ext cx="4535649" cy="6794980"/>
-          </a:xfrm>
-          <a:prstGeom prst="rect">
-            <a:avLst/>
-          </a:prstGeom>
-          <a:noFill/>
-          <a:extLst>
-            <a:ext uri="{909E8E84-426E-40DD-AFC4-6F175D3DCCD1}">
-              <a14:hiddenFill xmlns:a14="http://schemas.microsoft.com/office/drawing/2010/main">
-                <a:solidFill>
-                  <a:srgbClr val="FFFFFF"/>
-                </a:solidFill>
-              </a14:hiddenFill>
-            </a:ext>
-          </a:extLst>
-        </p:spPr>
-      </p:pic>
+        <p:spPr/>
+        <p:txBody>
+          <a:bodyPr/>
+          <a:lstStyle/>
+          <a:p>
+            <a:r>
+              <a:rPr lang="en-US" dirty="0"/>
+              <a:t>P(A) = Probability that A is true. </a:t>
+            </a:r>
+          </a:p>
+          <a:p>
+            <a:r>
+              <a:rPr lang="en-US" dirty="0"/>
+              <a:t>P(A and B) = P(A) * P(B). Probability that A and B are true. </a:t>
+            </a:r>
+          </a:p>
+          <a:p>
+            <a:r>
+              <a:rPr lang="en-US" dirty="0"/>
+              <a:t>P(A or B) = P(A) + P(B). Probability that A or B are true. </a:t>
+            </a:r>
+          </a:p>
+          <a:p>
+            <a:r>
+              <a:rPr lang="en-US" dirty="0"/>
+              <a:t>P(A</a:t>
+            </a:r>
+            <a:r>
+              <a:rPr lang="en-US" baseline="30000" dirty="0"/>
+              <a:t>c</a:t>
+            </a:r>
+            <a:r>
+              <a:rPr lang="en-US" dirty="0"/>
+              <a:t>) = 1-P(A) = P(not A). Probability that is is false. </a:t>
+            </a:r>
+          </a:p>
+          <a:p>
+            <a:r>
+              <a:rPr lang="en-US" dirty="0"/>
+              <a:t>Simple probability assumes mutual exclusivity (only one is true), and one thing is true. </a:t>
+            </a:r>
+          </a:p>
+          <a:p>
+            <a:pPr lvl="1"/>
+            <a:r>
+              <a:rPr lang="en-US"/>
+              <a:t>P(A and B) = 0</a:t>
+            </a:r>
+            <a:endParaRPr lang="en-US" dirty="0"/>
+          </a:p>
+        </p:txBody>
+      </p:sp>
     </p:spTree>
     <p:extLst>
       <p:ext uri="{BB962C8B-B14F-4D97-AF65-F5344CB8AC3E}">
-        <p14:creationId xmlns:p14="http://schemas.microsoft.com/office/powerpoint/2010/main" val="4095244745"/>
+        <p14:creationId xmlns:p14="http://schemas.microsoft.com/office/powerpoint/2010/main" val="4279640077"/>
       </p:ext>
     </p:extLst>
   </p:cSld>
@@ -5168,7 +7237,7 @@
           <p:cNvPr id="2" name="Title 1">
             <a:extLst>
               <a:ext uri="{FF2B5EF4-FFF2-40B4-BE49-F238E27FC236}">
-                <a16:creationId xmlns:a16="http://schemas.microsoft.com/office/drawing/2014/main" id="{3D20239F-9A82-DF45-AA6F-25B28BD41AA6}"/>
+                <a16:creationId xmlns:a16="http://schemas.microsoft.com/office/drawing/2014/main" id="{67D5F4AB-0184-BAC1-DEFE-CAD595CCF950}"/>
               </a:ext>
             </a:extLst>
           </p:cNvPr>
@@ -5186,7 +7255,7 @@
           <a:p>
             <a:r>
               <a:rPr lang="en-US" dirty="0"/>
-              <a:t>Conditional Probability</a:t>
+              <a:t>Probabilistic Statistics</a:t>
             </a:r>
           </a:p>
         </p:txBody>
@@ -5196,7 +7265,7 @@
           <p:cNvPr id="3" name="Content Placeholder 2">
             <a:extLst>
               <a:ext uri="{FF2B5EF4-FFF2-40B4-BE49-F238E27FC236}">
-                <a16:creationId xmlns:a16="http://schemas.microsoft.com/office/drawing/2014/main" id="{DF913740-0231-894D-9658-BE40BCA0C9C4}"/>
+                <a16:creationId xmlns:a16="http://schemas.microsoft.com/office/drawing/2014/main" id="{1A469DAE-7237-DEE6-98EB-6A64F4CDA025}"/>
               </a:ext>
             </a:extLst>
           </p:cNvPr>
@@ -5207,63 +7276,100 @@
             <p:ph idx="1"/>
           </p:nvPr>
         </p:nvSpPr>
-        <p:spPr/>
-        <p:txBody>
-          <a:bodyPr/>
-          <a:lstStyle/>
-          <a:p>
-            <a:r>
-              <a:rPr lang="en-US" dirty="0"/>
-              <a:t>Conditional probability is allows us to say “how likely is X if something happens?”</a:t>
-            </a:r>
-          </a:p>
-          <a:p>
-            <a:pPr lvl="1"/>
-            <a:r>
-              <a:rPr lang="en-US" dirty="0"/>
-              <a:t>E.g. If we are over 7’0” how </a:t>
-            </a:r>
-            <a:r>
-              <a:rPr lang="en-US" dirty="0" err="1"/>
-              <a:t>likey</a:t>
-            </a:r>
-            <a:r>
-              <a:rPr lang="en-US" dirty="0"/>
-              <a:t> are we to make the NBA?</a:t>
-            </a:r>
-          </a:p>
-          <a:p>
-            <a:pPr lvl="1"/>
-            <a:r>
-              <a:rPr lang="en-US" dirty="0"/>
-              <a:t>In the 90s someone calculated that at about 14%</a:t>
-            </a:r>
-          </a:p>
-          <a:p>
-            <a:r>
-              <a:rPr lang="en-US" dirty="0"/>
-              <a:t>P(A | B) = probability that A is true, given that B is true.</a:t>
-            </a:r>
-          </a:p>
-          <a:p>
-            <a:r>
-              <a:rPr lang="en-US" dirty="0"/>
-              <a:t>Some quick covid tests have reported about a 20% false negative rate. </a:t>
-            </a:r>
-          </a:p>
-          <a:p>
-            <a:pPr lvl="1"/>
-            <a:r>
-              <a:rPr lang="en-US" dirty="0"/>
-              <a:t>P(Test Positive | Have Covid) = 80%</a:t>
-            </a:r>
-          </a:p>
-        </p:txBody>
-      </p:sp>
+        <p:spPr>
+          <a:xfrm>
+            <a:off x="4778298" y="2015732"/>
+            <a:ext cx="7413702" cy="4037749"/>
+          </a:xfrm>
+        </p:spPr>
+        <p:txBody>
+          <a:bodyPr/>
+          <a:lstStyle/>
+          <a:p>
+            <a:r>
+              <a:rPr lang="en-US" dirty="0"/>
+              <a:t>With our datasets, we often look at density – the percentage that falls in M range. </a:t>
+            </a:r>
+          </a:p>
+          <a:p>
+            <a:pPr lvl="1"/>
+            <a:r>
+              <a:rPr lang="en-US" dirty="0"/>
+              <a:t>Looking backwards, this is a percentage. </a:t>
+            </a:r>
+          </a:p>
+          <a:p>
+            <a:pPr lvl="1"/>
+            <a:r>
+              <a:rPr lang="en-US" dirty="0"/>
+              <a:t>Looking forwards, this is a likelihood. </a:t>
+            </a:r>
+          </a:p>
+          <a:p>
+            <a:r>
+              <a:rPr lang="en-US" dirty="0"/>
+              <a:t>Our distribution defines the probability that a new item on that distribution will be X. </a:t>
+            </a:r>
+          </a:p>
+          <a:p>
+            <a:r>
+              <a:rPr lang="en-US" dirty="0"/>
+              <a:t>If we’ve chosen a model that actually matches the data, all new occurrences should follow the defined pattern. </a:t>
+            </a:r>
+          </a:p>
+        </p:txBody>
+      </p:sp>
+      <p:pic>
+        <p:nvPicPr>
+          <p:cNvPr id="7170" name="Picture 2" descr="Intro to Statistics: Part 6: Probability Density Functions — L0ng  C0nnect10ns">
+            <a:extLst>
+              <a:ext uri="{FF2B5EF4-FFF2-40B4-BE49-F238E27FC236}">
+                <a16:creationId xmlns:a16="http://schemas.microsoft.com/office/drawing/2014/main" id="{A7279E28-37EA-932D-E446-5798D2F76391}"/>
+              </a:ext>
+            </a:extLst>
+          </p:cNvPr>
+          <p:cNvPicPr>
+            <a:picLocks noChangeAspect="1" noChangeArrowheads="1"/>
+          </p:cNvPicPr>
+          <p:nvPr/>
+        </p:nvPicPr>
+        <p:blipFill>
+          <a:blip r:embed="rId2">
+            <a:extLst>
+              <a:ext uri="{28A0092B-C50C-407E-A947-70E740481C1C}">
+                <a14:useLocalDpi xmlns:a14="http://schemas.microsoft.com/office/drawing/2010/main" val="0"/>
+              </a:ext>
+            </a:extLst>
+          </a:blip>
+          <a:srcRect/>
+          <a:stretch>
+            <a:fillRect/>
+          </a:stretch>
+        </p:blipFill>
+        <p:spPr bwMode="auto">
+          <a:xfrm>
+            <a:off x="0" y="1750741"/>
+            <a:ext cx="4778298" cy="4778298"/>
+          </a:xfrm>
+          <a:prstGeom prst="rect">
+            <a:avLst/>
+          </a:prstGeom>
+          <a:noFill/>
+          <a:extLst>
+            <a:ext uri="{909E8E84-426E-40DD-AFC4-6F175D3DCCD1}">
+              <a14:hiddenFill xmlns:a14="http://schemas.microsoft.com/office/drawing/2010/main">
+                <a:solidFill>
+                  <a:srgbClr val="FFFFFF"/>
+                </a:solidFill>
+              </a14:hiddenFill>
+            </a:ext>
+          </a:extLst>
+        </p:spPr>
+      </p:pic>
     </p:spTree>
     <p:extLst>
       <p:ext uri="{BB962C8B-B14F-4D97-AF65-F5344CB8AC3E}">
-        <p14:creationId xmlns:p14="http://schemas.microsoft.com/office/powerpoint/2010/main" val="702050722"/>
+        <p14:creationId xmlns:p14="http://schemas.microsoft.com/office/powerpoint/2010/main" val="1387545396"/>
       </p:ext>
     </p:extLst>
   </p:cSld>

--- a/reference_material/slides/013_Probability_and_Bayes.pptx
+++ b/reference_material/slides/013_Probability_and_Bayes.pptx
@@ -277,7 +277,7 @@
           <a:p>
             <a:fld id="{38EBEB88-524C-934C-AA67-A5128709C9CE}" type="datetimeFigureOut">
               <a:rPr lang="en-US" smtClean="0"/>
-              <a:t>10/4/25</a:t>
+              <a:t>10/17/25</a:t>
             </a:fld>
             <a:endParaRPr lang="en-US"/>
           </a:p>
@@ -488,7 +488,7 @@
           <a:p>
             <a:fld id="{38EBEB88-524C-934C-AA67-A5128709C9CE}" type="datetimeFigureOut">
               <a:rPr lang="en-US" smtClean="0"/>
-              <a:t>10/4/25</a:t>
+              <a:t>10/17/25</a:t>
             </a:fld>
             <a:endParaRPr lang="en-US"/>
           </a:p>
@@ -703,7 +703,7 @@
           <a:p>
             <a:fld id="{38EBEB88-524C-934C-AA67-A5128709C9CE}" type="datetimeFigureOut">
               <a:rPr lang="en-US" smtClean="0"/>
-              <a:t>10/4/25</a:t>
+              <a:t>10/17/25</a:t>
             </a:fld>
             <a:endParaRPr lang="en-US"/>
           </a:p>
@@ -904,7 +904,7 @@
           <a:p>
             <a:fld id="{38EBEB88-524C-934C-AA67-A5128709C9CE}" type="datetimeFigureOut">
               <a:rPr lang="en-US" smtClean="0"/>
-              <a:t>10/4/25</a:t>
+              <a:t>10/17/25</a:t>
             </a:fld>
             <a:endParaRPr lang="en-US"/>
           </a:p>
@@ -1183,7 +1183,7 @@
           <a:p>
             <a:fld id="{38EBEB88-524C-934C-AA67-A5128709C9CE}" type="datetimeFigureOut">
               <a:rPr lang="en-US" smtClean="0"/>
-              <a:t>10/4/25</a:t>
+              <a:t>10/17/25</a:t>
             </a:fld>
             <a:endParaRPr lang="en-US"/>
           </a:p>
@@ -1451,7 +1451,7 @@
           <a:p>
             <a:fld id="{38EBEB88-524C-934C-AA67-A5128709C9CE}" type="datetimeFigureOut">
               <a:rPr lang="en-US" smtClean="0"/>
-              <a:t>10/4/25</a:t>
+              <a:t>10/17/25</a:t>
             </a:fld>
             <a:endParaRPr lang="en-US"/>
           </a:p>
@@ -1867,7 +1867,7 @@
           <a:p>
             <a:fld id="{38EBEB88-524C-934C-AA67-A5128709C9CE}" type="datetimeFigureOut">
               <a:rPr lang="en-US" smtClean="0"/>
-              <a:t>10/4/25</a:t>
+              <a:t>10/17/25</a:t>
             </a:fld>
             <a:endParaRPr lang="en-US"/>
           </a:p>
@@ -2016,7 +2016,7 @@
           <a:p>
             <a:fld id="{38EBEB88-524C-934C-AA67-A5128709C9CE}" type="datetimeFigureOut">
               <a:rPr lang="en-US" smtClean="0"/>
-              <a:t>10/4/25</a:t>
+              <a:t>10/17/25</a:t>
             </a:fld>
             <a:endParaRPr lang="en-US"/>
           </a:p>
@@ -2142,7 +2142,7 @@
           <a:p>
             <a:fld id="{38EBEB88-524C-934C-AA67-A5128709C9CE}" type="datetimeFigureOut">
               <a:rPr lang="en-US" smtClean="0"/>
-              <a:t>10/4/25</a:t>
+              <a:t>10/17/25</a:t>
             </a:fld>
             <a:endParaRPr lang="en-US"/>
           </a:p>
@@ -2393,7 +2393,7 @@
           <a:p>
             <a:fld id="{38EBEB88-524C-934C-AA67-A5128709C9CE}" type="datetimeFigureOut">
               <a:rPr lang="en-US" smtClean="0"/>
-              <a:t>10/4/25</a:t>
+              <a:t>10/17/25</a:t>
             </a:fld>
             <a:endParaRPr lang="en-US"/>
           </a:p>
@@ -2838,7 +2838,7 @@
           <a:p>
             <a:fld id="{38EBEB88-524C-934C-AA67-A5128709C9CE}" type="datetimeFigureOut">
               <a:rPr lang="en-US" smtClean="0"/>
-              <a:t>10/4/25</a:t>
+              <a:t>10/17/25</a:t>
             </a:fld>
             <a:endParaRPr lang="en-US"/>
           </a:p>
@@ -3005,6 +3005,13 @@
             <a:schemeClr val="lt1"/>
           </a:fontRef>
         </p:style>
+        <p:txBody>
+          <a:bodyPr/>
+          <a:lstStyle/>
+          <a:p>
+            <a:endParaRPr lang="en-US"/>
+          </a:p>
+        </p:txBody>
       </p:sp>
       <p:pic>
         <p:nvPicPr>
@@ -3165,7 +3172,7 @@
           <a:p>
             <a:fld id="{38EBEB88-524C-934C-AA67-A5128709C9CE}" type="datetimeFigureOut">
               <a:rPr lang="en-US" smtClean="0"/>
-              <a:t>10/4/25</a:t>
+              <a:t>10/17/25</a:t>
             </a:fld>
             <a:endParaRPr lang="en-US"/>
           </a:p>
@@ -3721,28 +3728,14 @@
             <a:pPr lvl="1"/>
             <a:r>
               <a:rPr lang="en-US" dirty="0"/>
+              <a:t>Discreet distributions. </a:t>
+            </a:r>
+          </a:p>
+          <a:p>
+            <a:pPr lvl="1"/>
+            <a:r>
+              <a:rPr lang="en-US" dirty="0"/>
               <a:t>Odds and logits. </a:t>
-            </a:r>
-          </a:p>
-          <a:p>
-            <a:r>
-              <a:rPr lang="en-US" dirty="0"/>
-              <a:t>Comparing two distributions. </a:t>
-            </a:r>
-          </a:p>
-          <a:p>
-            <a:pPr lvl="1"/>
-            <a:r>
-              <a:rPr lang="en-US" dirty="0"/>
-              <a:t>Thresholds, overlap, </a:t>
-            </a:r>
-            <a:r>
-              <a:rPr lang="en-US" dirty="0" err="1"/>
-              <a:t>cohen</a:t>
-            </a:r>
-            <a:r>
-              <a:rPr lang="en-US" dirty="0"/>
-              <a:t>. </a:t>
             </a:r>
           </a:p>
           <a:p>
@@ -3778,6 +3771,12 @@
             <a:r>
               <a:rPr lang="en-US" dirty="0"/>
               <a:t>Generalizing from a sample, yay inferential stats! </a:t>
+            </a:r>
+          </a:p>
+          <a:p>
+            <a:r>
+              <a:rPr lang="en-US" dirty="0"/>
+              <a:t>Next – comparing distributions (similar, slightly more complex). </a:t>
             </a:r>
           </a:p>
         </p:txBody>
@@ -6863,8 +6862,8 @@
         </p:blipFill>
         <p:spPr bwMode="auto">
           <a:xfrm>
-            <a:off x="0" y="0"/>
-            <a:ext cx="9118600" cy="6350000"/>
+            <a:off x="1159398" y="0"/>
+            <a:ext cx="9873204" cy="6875490"/>
           </a:xfrm>
           <a:prstGeom prst="rect">
             <a:avLst/>
@@ -6911,6 +6910,151 @@
           <a:chExt cx="0" cy="0"/>
         </a:xfrm>
       </p:grpSpPr>
+      <p:sp>
+        <p:nvSpPr>
+          <p:cNvPr id="2" name="Title 1">
+            <a:extLst>
+              <a:ext uri="{FF2B5EF4-FFF2-40B4-BE49-F238E27FC236}">
+                <a16:creationId xmlns:a16="http://schemas.microsoft.com/office/drawing/2014/main" id="{D6838EBD-7D5C-6AAD-AD8C-C1A6E2BBDDBF}"/>
+              </a:ext>
+            </a:extLst>
+          </p:cNvPr>
+          <p:cNvSpPr>
+            <a:spLocks noGrp="1"/>
+          </p:cNvSpPr>
+          <p:nvPr>
+            <p:ph type="title"/>
+          </p:nvPr>
+        </p:nvSpPr>
+        <p:spPr/>
+        <p:txBody>
+          <a:bodyPr/>
+          <a:lstStyle/>
+          <a:p>
+            <a:r>
+              <a:rPr lang="en-US" dirty="0"/>
+              <a:t>Discreet vs Continuous</a:t>
+            </a:r>
+          </a:p>
+        </p:txBody>
+      </p:sp>
+      <p:sp>
+        <p:nvSpPr>
+          <p:cNvPr id="3" name="Content Placeholder 2">
+            <a:extLst>
+              <a:ext uri="{FF2B5EF4-FFF2-40B4-BE49-F238E27FC236}">
+                <a16:creationId xmlns:a16="http://schemas.microsoft.com/office/drawing/2014/main" id="{22931AB9-376A-2B26-20A3-7AB1D1B214B1}"/>
+              </a:ext>
+            </a:extLst>
+          </p:cNvPr>
+          <p:cNvSpPr>
+            <a:spLocks noGrp="1"/>
+          </p:cNvSpPr>
+          <p:nvPr>
+            <p:ph idx="1"/>
+          </p:nvPr>
+        </p:nvSpPr>
+        <p:spPr>
+          <a:xfrm>
+            <a:off x="416791" y="1853753"/>
+            <a:ext cx="4787425" cy="4199727"/>
+          </a:xfrm>
+        </p:spPr>
+        <p:txBody>
+          <a:bodyPr/>
+          <a:lstStyle/>
+          <a:p>
+            <a:r>
+              <a:rPr lang="en-US" dirty="0"/>
+              <a:t>Continuous variables express density as a % likeliness in a range.</a:t>
+            </a:r>
+          </a:p>
+          <a:p>
+            <a:r>
+              <a:rPr lang="en-US" dirty="0"/>
+              <a:t>Discreet expresses density as a % of a specific value. </a:t>
+            </a:r>
+          </a:p>
+          <a:p>
+            <a:r>
+              <a:rPr lang="en-US" dirty="0"/>
+              <a:t>There can be some questionable ones:</a:t>
+            </a:r>
+          </a:p>
+          <a:p>
+            <a:pPr lvl="1"/>
+            <a:r>
+              <a:rPr lang="en-US" dirty="0"/>
+              <a:t>Does the midpoint make sense? </a:t>
+            </a:r>
+          </a:p>
+          <a:p>
+            <a:pPr lvl="1"/>
+            <a:r>
+              <a:rPr lang="en-US" dirty="0"/>
+              <a:t>What matters for your scenario?</a:t>
+            </a:r>
+          </a:p>
+          <a:p>
+            <a:r>
+              <a:rPr lang="en-US" dirty="0"/>
+              <a:t>Bonus </a:t>
+            </a:r>
+            <a:r>
+              <a:rPr lang="en-US"/>
+              <a:t>– spot any errors? </a:t>
+            </a:r>
+            <a:endParaRPr lang="en-US" dirty="0"/>
+          </a:p>
+        </p:txBody>
+      </p:sp>
+      <p:pic>
+        <p:nvPicPr>
+          <p:cNvPr id="1026" name="Picture 2" descr="OC] Body Height Reported by U.S. Men : r/dataisbeautiful">
+            <a:extLst>
+              <a:ext uri="{FF2B5EF4-FFF2-40B4-BE49-F238E27FC236}">
+                <a16:creationId xmlns:a16="http://schemas.microsoft.com/office/drawing/2014/main" id="{0A234BE5-67AF-85FA-16E9-DC38B7B28DD5}"/>
+              </a:ext>
+            </a:extLst>
+          </p:cNvPr>
+          <p:cNvPicPr>
+            <a:picLocks noChangeAspect="1" noChangeArrowheads="1"/>
+          </p:cNvPicPr>
+          <p:nvPr/>
+        </p:nvPicPr>
+        <p:blipFill>
+          <a:blip r:embed="rId2">
+            <a:extLst>
+              <a:ext uri="{28A0092B-C50C-407E-A947-70E740481C1C}">
+                <a14:useLocalDpi xmlns:a14="http://schemas.microsoft.com/office/drawing/2010/main" val="0"/>
+              </a:ext>
+            </a:extLst>
+          </a:blip>
+          <a:srcRect/>
+          <a:stretch>
+            <a:fillRect/>
+          </a:stretch>
+        </p:blipFill>
+        <p:spPr bwMode="auto">
+          <a:xfrm>
+            <a:off x="5204216" y="1329136"/>
+            <a:ext cx="6972351" cy="5004246"/>
+          </a:xfrm>
+          <a:prstGeom prst="rect">
+            <a:avLst/>
+          </a:prstGeom>
+          <a:noFill/>
+          <a:extLst>
+            <a:ext uri="{909E8E84-426E-40DD-AFC4-6F175D3DCCD1}">
+              <a14:hiddenFill xmlns:a14="http://schemas.microsoft.com/office/drawing/2010/main">
+                <a:solidFill>
+                  <a:srgbClr val="FFFFFF"/>
+                </a:solidFill>
+              </a14:hiddenFill>
+            </a:ext>
+          </a:extLst>
+        </p:spPr>
+      </p:pic>
     </p:spTree>
     <p:extLst>
       <p:ext uri="{BB962C8B-B14F-4D97-AF65-F5344CB8AC3E}">
